--- a/INVEXA.pptx
+++ b/INVEXA.pptx
@@ -5,51 +5,30 @@
     <p:sldMasterId id="2147483648" r:id="rId1"/>
   </p:sldMasterIdLst>
   <p:notesMasterIdLst>
-    <p:notesMasterId r:id="rId14"/>
+    <p:notesMasterId r:id="rId13"/>
   </p:notesMasterIdLst>
   <p:sldIdLst>
-    <p:sldId id="256" r:id="rId2"/>
-    <p:sldId id="257" r:id="rId3"/>
-    <p:sldId id="258" r:id="rId4"/>
-    <p:sldId id="259" r:id="rId5"/>
-    <p:sldId id="260" r:id="rId6"/>
-    <p:sldId id="261" r:id="rId7"/>
-    <p:sldId id="262" r:id="rId8"/>
-    <p:sldId id="263" r:id="rId9"/>
-    <p:sldId id="264" r:id="rId10"/>
-    <p:sldId id="265" r:id="rId11"/>
-    <p:sldId id="267" r:id="rId12"/>
-    <p:sldId id="266" r:id="rId13"/>
+    <p:sldId id="257" r:id="rId2"/>
+    <p:sldId id="258" r:id="rId3"/>
+    <p:sldId id="259" r:id="rId4"/>
+    <p:sldId id="260" r:id="rId5"/>
+    <p:sldId id="261" r:id="rId6"/>
+    <p:sldId id="262" r:id="rId7"/>
+    <p:sldId id="263" r:id="rId8"/>
+    <p:sldId id="264" r:id="rId9"/>
+    <p:sldId id="265" r:id="rId10"/>
+    <p:sldId id="267" r:id="rId11"/>
+    <p:sldId id="266" r:id="rId12"/>
   </p:sldIdLst>
   <p:sldSz cx="18288000" cy="10287000"/>
   <p:notesSz cx="6858000" cy="9144000"/>
   <p:embeddedFontLst>
     <p:embeddedFont>
-      <p:font typeface="Alice" panose="020B0604020202020204" charset="0"/>
-      <p:regular r:id="rId15"/>
-    </p:embeddedFont>
-    <p:embeddedFont>
-      <p:font typeface="Anonymous Pro" panose="020B0604020202020204" charset="0"/>
-      <p:regular r:id="rId16"/>
-      <p:bold r:id="rId17"/>
-      <p:italic r:id="rId18"/>
-      <p:boldItalic r:id="rId19"/>
-    </p:embeddedFont>
-    <p:embeddedFont>
-      <p:font typeface="Arapey" panose="020B0604020202020204" charset="0"/>
-      <p:regular r:id="rId20"/>
-      <p:italic r:id="rId21"/>
-    </p:embeddedFont>
-    <p:embeddedFont>
-      <p:font typeface="NTR" panose="020B0604020202020204" charset="0"/>
-      <p:regular r:id="rId22"/>
-    </p:embeddedFont>
-    <p:embeddedFont>
       <p:font typeface="Times" panose="02020603050405020304" pitchFamily="18" charset="0"/>
-      <p:regular r:id="rId23"/>
-      <p:bold r:id="rId24"/>
-      <p:italic r:id="rId25"/>
-      <p:boldItalic r:id="rId26"/>
+      <p:regular r:id="rId14"/>
+      <p:bold r:id="rId15"/>
+      <p:italic r:id="rId16"/>
+      <p:boldItalic r:id="rId17"/>
     </p:embeddedFont>
   </p:embeddedFontLst>
   <p:defaultTextStyle>
@@ -306,7 +285,7 @@
 <file path=ppt/revisionInfo.xml><?xml version="1.0" encoding="utf-8"?>
 <p1510:revInfo xmlns:a="http://schemas.openxmlformats.org/drawingml/2006/main" xmlns:r="http://schemas.openxmlformats.org/officeDocument/2006/relationships" xmlns:p1510="http://schemas.microsoft.com/office/powerpoint/2015/10/main">
   <p1510:revLst>
-    <p1510:client id="{1BF0CF0E-9845-4362-A91D-923FDB6B1BA6}" v="40" dt="2026-04-01T06:58:23.075"/>
+    <p1510:client id="{E88F6C86-887B-4D9E-A879-C87033857B23}" v="3" dt="2026-04-23T15:58:48.043"/>
   </p1510:revLst>
 </p1510:revInfo>
 </file>
@@ -316,35 +295,170 @@
   <pc:docChgLst>
     <pc:chgData name="Samyak Jagtap" userId="fab308c070b6e54d" providerId="LiveId" clId="{C333D098-6AF2-48AA-ACB1-99C10C6737E7}"/>
     <pc:docChg chg="undo custSel addSld delSld modSld">
-      <pc:chgData name="Samyak Jagtap" userId="fab308c070b6e54d" providerId="LiveId" clId="{C333D098-6AF2-48AA-ACB1-99C10C6737E7}" dt="2026-04-01T07:21:50.541" v="726" actId="20577"/>
+      <pc:chgData name="Samyak Jagtap" userId="fab308c070b6e54d" providerId="LiveId" clId="{C333D098-6AF2-48AA-ACB1-99C10C6737E7}" dt="2026-04-23T16:09:42.041" v="832" actId="20577"/>
       <pc:docMkLst>
         <pc:docMk/>
       </pc:docMkLst>
-      <pc:sldChg chg="modSp mod">
-        <pc:chgData name="Samyak Jagtap" userId="fab308c070b6e54d" providerId="LiveId" clId="{C333D098-6AF2-48AA-ACB1-99C10C6737E7}" dt="2026-04-01T07:09:32.443" v="721" actId="14100"/>
+      <pc:sldChg chg="add del">
+        <pc:chgData name="Samyak Jagtap" userId="fab308c070b6e54d" providerId="LiveId" clId="{C333D098-6AF2-48AA-ACB1-99C10C6737E7}" dt="2026-04-23T15:58:59.410" v="760" actId="47"/>
+        <pc:sldMkLst>
+          <pc:docMk/>
+          <pc:sldMk cId="0" sldId="256"/>
+        </pc:sldMkLst>
+      </pc:sldChg>
+      <pc:sldChg chg="addSp delSp modSp mod">
+        <pc:chgData name="Samyak Jagtap" userId="fab308c070b6e54d" providerId="LiveId" clId="{C333D098-6AF2-48AA-ACB1-99C10C6737E7}" dt="2026-04-23T16:09:42.041" v="832" actId="20577"/>
         <pc:sldMkLst>
           <pc:docMk/>
           <pc:sldMk cId="0" sldId="257"/>
         </pc:sldMkLst>
+        <pc:spChg chg="mod modVis">
+          <ac:chgData name="Samyak Jagtap" userId="fab308c070b6e54d" providerId="LiveId" clId="{C333D098-6AF2-48AA-ACB1-99C10C6737E7}" dt="2026-04-23T15:58:01.512" v="751" actId="33935"/>
+          <ac:spMkLst>
+            <pc:docMk/>
+            <pc:sldMk cId="0" sldId="257"/>
+            <ac:spMk id="124" creationId="{00000000-0000-0000-0000-000000000000}"/>
+          </ac:spMkLst>
+        </pc:spChg>
+        <pc:spChg chg="mod topLvl modVis">
+          <ac:chgData name="Samyak Jagtap" userId="fab308c070b6e54d" providerId="LiveId" clId="{C333D098-6AF2-48AA-ACB1-99C10C6737E7}" dt="2026-04-23T15:58:48.043" v="756" actId="338"/>
+          <ac:spMkLst>
+            <pc:docMk/>
+            <pc:sldMk cId="0" sldId="257"/>
+            <ac:spMk id="126" creationId="{00000000-0000-0000-0000-000000000000}"/>
+          </ac:spMkLst>
+        </pc:spChg>
+        <pc:spChg chg="mod topLvl modVis">
+          <ac:chgData name="Samyak Jagtap" userId="fab308c070b6e54d" providerId="LiveId" clId="{C333D098-6AF2-48AA-ACB1-99C10C6737E7}" dt="2026-04-23T15:59:30.321" v="765" actId="1076"/>
+          <ac:spMkLst>
+            <pc:docMk/>
+            <pc:sldMk cId="0" sldId="257"/>
+            <ac:spMk id="127" creationId="{00000000-0000-0000-0000-000000000000}"/>
+          </ac:spMkLst>
+        </pc:spChg>
+        <pc:spChg chg="mod modVis">
+          <ac:chgData name="Samyak Jagtap" userId="fab308c070b6e54d" providerId="LiveId" clId="{C333D098-6AF2-48AA-ACB1-99C10C6737E7}" dt="2026-04-23T15:58:01.512" v="751" actId="33935"/>
+          <ac:spMkLst>
+            <pc:docMk/>
+            <pc:sldMk cId="0" sldId="257"/>
+            <ac:spMk id="128" creationId="{00000000-0000-0000-0000-000000000000}"/>
+          </ac:spMkLst>
+        </pc:spChg>
         <pc:spChg chg="mod">
-          <ac:chgData name="Samyak Jagtap" userId="fab308c070b6e54d" providerId="LiveId" clId="{C333D098-6AF2-48AA-ACB1-99C10C6737E7}" dt="2026-04-01T07:09:14.427" v="715" actId="20577"/>
+          <ac:chgData name="Samyak Jagtap" userId="fab308c070b6e54d" providerId="LiveId" clId="{C333D098-6AF2-48AA-ACB1-99C10C6737E7}" dt="2026-04-23T15:58:55.933" v="758" actId="1076"/>
+          <ac:spMkLst>
+            <pc:docMk/>
+            <pc:sldMk cId="0" sldId="257"/>
+            <ac:spMk id="131" creationId="{00000000-0000-0000-0000-000000000000}"/>
+          </ac:spMkLst>
+        </pc:spChg>
+        <pc:spChg chg="mod modVis">
+          <ac:chgData name="Samyak Jagtap" userId="fab308c070b6e54d" providerId="LiveId" clId="{C333D098-6AF2-48AA-ACB1-99C10C6737E7}" dt="2026-04-23T15:58:01.512" v="751" actId="33935"/>
+          <ac:spMkLst>
+            <pc:docMk/>
+            <pc:sldMk cId="0" sldId="257"/>
+            <ac:spMk id="132" creationId="{00000000-0000-0000-0000-000000000000}"/>
+          </ac:spMkLst>
+        </pc:spChg>
+        <pc:spChg chg="mod modVis">
+          <ac:chgData name="Samyak Jagtap" userId="fab308c070b6e54d" providerId="LiveId" clId="{C333D098-6AF2-48AA-ACB1-99C10C6737E7}" dt="2026-04-23T15:58:01.512" v="751" actId="33935"/>
+          <ac:spMkLst>
+            <pc:docMk/>
+            <pc:sldMk cId="0" sldId="257"/>
+            <ac:spMk id="133" creationId="{00000000-0000-0000-0000-000000000000}"/>
+          </ac:spMkLst>
+        </pc:spChg>
+        <pc:spChg chg="del">
+          <ac:chgData name="Samyak Jagtap" userId="fab308c070b6e54d" providerId="LiveId" clId="{C333D098-6AF2-48AA-ACB1-99C10C6737E7}" dt="2026-04-23T15:56:50.159" v="728" actId="478"/>
+          <ac:spMkLst>
+            <pc:docMk/>
+            <pc:sldMk cId="0" sldId="257"/>
+            <ac:spMk id="134" creationId="{00000000-0000-0000-0000-000000000000}"/>
+          </ac:spMkLst>
+        </pc:spChg>
+        <pc:spChg chg="del mod modVis">
+          <ac:chgData name="Samyak Jagtap" userId="fab308c070b6e54d" providerId="LiveId" clId="{C333D098-6AF2-48AA-ACB1-99C10C6737E7}" dt="2026-04-23T16:00:51.248" v="780" actId="478"/>
+          <ac:spMkLst>
+            <pc:docMk/>
+            <pc:sldMk cId="0" sldId="257"/>
+            <ac:spMk id="135" creationId="{00000000-0000-0000-0000-000000000000}"/>
+          </ac:spMkLst>
+        </pc:spChg>
+        <pc:spChg chg="mod modVis">
+          <ac:chgData name="Samyak Jagtap" userId="fab308c070b6e54d" providerId="LiveId" clId="{C333D098-6AF2-48AA-ACB1-99C10C6737E7}" dt="2026-04-23T15:58:01.512" v="751" actId="33935"/>
+          <ac:spMkLst>
+            <pc:docMk/>
+            <pc:sldMk cId="0" sldId="257"/>
+            <ac:spMk id="137" creationId="{00000000-0000-0000-0000-000000000000}"/>
+          </ac:spMkLst>
+        </pc:spChg>
+        <pc:spChg chg="mod modVis">
+          <ac:chgData name="Samyak Jagtap" userId="fab308c070b6e54d" providerId="LiveId" clId="{C333D098-6AF2-48AA-ACB1-99C10C6737E7}" dt="2026-04-23T16:09:42.041" v="832" actId="20577"/>
+          <ac:spMkLst>
+            <pc:docMk/>
+            <pc:sldMk cId="0" sldId="257"/>
+            <ac:spMk id="138" creationId="{00000000-0000-0000-0000-000000000000}"/>
+          </ac:spMkLst>
+        </pc:spChg>
+        <pc:spChg chg="mod modVis">
+          <ac:chgData name="Samyak Jagtap" userId="fab308c070b6e54d" providerId="LiveId" clId="{C333D098-6AF2-48AA-ACB1-99C10C6737E7}" dt="2026-04-23T16:04:44.396" v="821" actId="1076"/>
           <ac:spMkLst>
             <pc:docMk/>
             <pc:sldMk cId="0" sldId="257"/>
             <ac:spMk id="139" creationId="{00000000-0000-0000-0000-000000000000}"/>
           </ac:spMkLst>
         </pc:spChg>
+        <pc:spChg chg="mod modVis">
+          <ac:chgData name="Samyak Jagtap" userId="fab308c070b6e54d" providerId="LiveId" clId="{C333D098-6AF2-48AA-ACB1-99C10C6737E7}" dt="2026-04-23T16:02:43.010" v="804" actId="255"/>
+          <ac:spMkLst>
+            <pc:docMk/>
+            <pc:sldMk cId="0" sldId="257"/>
+            <ac:spMk id="140" creationId="{00000000-0000-0000-0000-000000000000}"/>
+          </ac:spMkLst>
+        </pc:spChg>
         <pc:spChg chg="mod">
-          <ac:chgData name="Samyak Jagtap" userId="fab308c070b6e54d" providerId="LiveId" clId="{C333D098-6AF2-48AA-ACB1-99C10C6737E7}" dt="2026-04-01T07:09:32.443" v="721" actId="14100"/>
+          <ac:chgData name="Samyak Jagtap" userId="fab308c070b6e54d" providerId="LiveId" clId="{C333D098-6AF2-48AA-ACB1-99C10C6737E7}" dt="2026-04-23T16:03:00.677" v="806" actId="14100"/>
           <ac:spMkLst>
             <pc:docMk/>
             <pc:sldMk cId="0" sldId="257"/>
             <ac:spMk id="141" creationId="{00000000-0000-0000-0000-000000000000}"/>
           </ac:spMkLst>
         </pc:spChg>
+        <pc:grpChg chg="add mod">
+          <ac:chgData name="Samyak Jagtap" userId="fab308c070b6e54d" providerId="LiveId" clId="{C333D098-6AF2-48AA-ACB1-99C10C6737E7}" dt="2026-04-23T15:58:48.043" v="756" actId="338"/>
+          <ac:grpSpMkLst>
+            <pc:docMk/>
+            <pc:sldMk cId="0" sldId="257"/>
+            <ac:grpSpMk id="2" creationId="{D95B9B1D-7642-8068-3396-39EB48D8E948}"/>
+          </ac:grpSpMkLst>
+        </pc:grpChg>
+        <pc:grpChg chg="del mod">
+          <ac:chgData name="Samyak Jagtap" userId="fab308c070b6e54d" providerId="LiveId" clId="{C333D098-6AF2-48AA-ACB1-99C10C6737E7}" dt="2026-04-23T15:57:05.083" v="731" actId="165"/>
+          <ac:grpSpMkLst>
+            <pc:docMk/>
+            <pc:sldMk cId="0" sldId="257"/>
+            <ac:grpSpMk id="125" creationId="{00000000-0000-0000-0000-000000000000}"/>
+          </ac:grpSpMkLst>
+        </pc:grpChg>
+        <pc:grpChg chg="mod modVis">
+          <ac:chgData name="Samyak Jagtap" userId="fab308c070b6e54d" providerId="LiveId" clId="{C333D098-6AF2-48AA-ACB1-99C10C6737E7}" dt="2026-04-23T16:03:30.716" v="808" actId="14100"/>
+          <ac:grpSpMkLst>
+            <pc:docMk/>
+            <pc:sldMk cId="0" sldId="257"/>
+            <ac:grpSpMk id="129" creationId="{00000000-0000-0000-0000-000000000000}"/>
+          </ac:grpSpMkLst>
+        </pc:grpChg>
+        <pc:picChg chg="del">
+          <ac:chgData name="Samyak Jagtap" userId="fab308c070b6e54d" providerId="LiveId" clId="{C333D098-6AF2-48AA-ACB1-99C10C6737E7}" dt="2026-04-23T15:56:46.961" v="727" actId="478"/>
+          <ac:picMkLst>
+            <pc:docMk/>
+            <pc:sldMk cId="0" sldId="257"/>
+            <ac:picMk id="142" creationId="{00000000-0000-0000-0000-000000000000}"/>
+          </ac:picMkLst>
+        </pc:picChg>
       </pc:sldChg>
-      <pc:sldChg chg="modSp mod">
-        <pc:chgData name="Samyak Jagtap" userId="fab308c070b6e54d" providerId="LiveId" clId="{C333D098-6AF2-48AA-ACB1-99C10C6737E7}" dt="2026-03-31T16:40:38.724" v="36" actId="14100"/>
+      <pc:sldChg chg="delSp modSp mod">
+        <pc:chgData name="Samyak Jagtap" userId="fab308c070b6e54d" providerId="LiveId" clId="{C333D098-6AF2-48AA-ACB1-99C10C6737E7}" dt="2026-04-23T16:00:24.371" v="778"/>
         <pc:sldMkLst>
           <pc:docMk/>
           <pc:sldMk cId="0" sldId="258"/>
@@ -357,9 +471,48 @@
             <ac:spMk id="3" creationId="{96CBF088-C003-D9A1-E64B-67A26E72B287}"/>
           </ac:spMkLst>
         </pc:spChg>
+        <pc:spChg chg="del mod">
+          <ac:chgData name="Samyak Jagtap" userId="fab308c070b6e54d" providerId="LiveId" clId="{C333D098-6AF2-48AA-ACB1-99C10C6737E7}" dt="2026-04-23T16:00:24.371" v="778"/>
+          <ac:spMkLst>
+            <pc:docMk/>
+            <pc:sldMk cId="0" sldId="258"/>
+            <ac:spMk id="165" creationId="{00000000-0000-0000-0000-000000000000}"/>
+          </ac:spMkLst>
+        </pc:spChg>
+        <pc:spChg chg="del">
+          <ac:chgData name="Samyak Jagtap" userId="fab308c070b6e54d" providerId="LiveId" clId="{C333D098-6AF2-48AA-ACB1-99C10C6737E7}" dt="2026-04-23T16:00:16.866" v="774" actId="478"/>
+          <ac:spMkLst>
+            <pc:docMk/>
+            <pc:sldMk cId="0" sldId="258"/>
+            <ac:spMk id="166" creationId="{00000000-0000-0000-0000-000000000000}"/>
+          </ac:spMkLst>
+        </pc:spChg>
+      </pc:sldChg>
+      <pc:sldChg chg="delSp mod">
+        <pc:chgData name="Samyak Jagtap" userId="fab308c070b6e54d" providerId="LiveId" clId="{C333D098-6AF2-48AA-ACB1-99C10C6737E7}" dt="2026-04-23T16:00:57.817" v="782" actId="478"/>
+        <pc:sldMkLst>
+          <pc:docMk/>
+          <pc:sldMk cId="0" sldId="259"/>
+        </pc:sldMkLst>
+        <pc:spChg chg="del">
+          <ac:chgData name="Samyak Jagtap" userId="fab308c070b6e54d" providerId="LiveId" clId="{C333D098-6AF2-48AA-ACB1-99C10C6737E7}" dt="2026-04-23T16:00:55.770" v="781" actId="478"/>
+          <ac:spMkLst>
+            <pc:docMk/>
+            <pc:sldMk cId="0" sldId="259"/>
+            <ac:spMk id="190" creationId="{00000000-0000-0000-0000-000000000000}"/>
+          </ac:spMkLst>
+        </pc:spChg>
+        <pc:spChg chg="del">
+          <ac:chgData name="Samyak Jagtap" userId="fab308c070b6e54d" providerId="LiveId" clId="{C333D098-6AF2-48AA-ACB1-99C10C6737E7}" dt="2026-04-23T16:00:57.817" v="782" actId="478"/>
+          <ac:spMkLst>
+            <pc:docMk/>
+            <pc:sldMk cId="0" sldId="259"/>
+            <ac:spMk id="192" creationId="{00000000-0000-0000-0000-000000000000}"/>
+          </ac:spMkLst>
+        </pc:spChg>
       </pc:sldChg>
       <pc:sldChg chg="addSp delSp modSp mod modNotes">
-        <pc:chgData name="Samyak Jagtap" userId="fab308c070b6e54d" providerId="LiveId" clId="{C333D098-6AF2-48AA-ACB1-99C10C6737E7}" dt="2026-04-01T07:21:50.541" v="726" actId="20577"/>
+        <pc:chgData name="Samyak Jagtap" userId="fab308c070b6e54d" providerId="LiveId" clId="{C333D098-6AF2-48AA-ACB1-99C10C6737E7}" dt="2026-04-23T16:01:07.935" v="786" actId="478"/>
         <pc:sldMkLst>
           <pc:docMk/>
           <pc:sldMk cId="0" sldId="260"/>
@@ -372,12 +525,20 @@
             <ac:spMk id="2" creationId="{D5A0F54F-0904-C937-D5D4-28D095EBA223}"/>
           </ac:spMkLst>
         </pc:spChg>
-        <pc:spChg chg="add del mod">
-          <ac:chgData name="Samyak Jagtap" userId="fab308c070b6e54d" providerId="LiveId" clId="{C333D098-6AF2-48AA-ACB1-99C10C6737E7}" dt="2026-03-31T16:37:31.186" v="10"/>
+        <pc:spChg chg="del mod">
+          <ac:chgData name="Samyak Jagtap" userId="fab308c070b6e54d" providerId="LiveId" clId="{C333D098-6AF2-48AA-ACB1-99C10C6737E7}" dt="2026-04-23T16:01:07.935" v="786" actId="478"/>
           <ac:spMkLst>
             <pc:docMk/>
             <pc:sldMk cId="0" sldId="260"/>
-            <ac:spMk id="3" creationId="{926E91BA-F490-5188-1930-3423E1E01EA7}"/>
+            <ac:spMk id="215" creationId="{00000000-0000-0000-0000-000000000000}"/>
+          </ac:spMkLst>
+        </pc:spChg>
+        <pc:spChg chg="del mod">
+          <ac:chgData name="Samyak Jagtap" userId="fab308c070b6e54d" providerId="LiveId" clId="{C333D098-6AF2-48AA-ACB1-99C10C6737E7}" dt="2026-04-23T16:01:03.450" v="784" actId="478"/>
+          <ac:spMkLst>
+            <pc:docMk/>
+            <pc:sldMk cId="0" sldId="260"/>
+            <ac:spMk id="217" creationId="{00000000-0000-0000-0000-000000000000}"/>
           </ac:spMkLst>
         </pc:spChg>
         <pc:grpChg chg="mod">
@@ -390,7 +551,7 @@
         </pc:grpChg>
       </pc:sldChg>
       <pc:sldChg chg="addSp delSp modSp mod modNotes">
-        <pc:chgData name="Samyak Jagtap" userId="fab308c070b6e54d" providerId="LiveId" clId="{C333D098-6AF2-48AA-ACB1-99C10C6737E7}" dt="2026-04-01T05:15:54.838" v="446" actId="1076"/>
+        <pc:chgData name="Samyak Jagtap" userId="fab308c070b6e54d" providerId="LiveId" clId="{C333D098-6AF2-48AA-ACB1-99C10C6737E7}" dt="2026-04-23T16:01:16.544" v="788" actId="478"/>
         <pc:sldMkLst>
           <pc:docMk/>
           <pc:sldMk cId="0" sldId="261"/>
@@ -403,28 +564,12 @@
             <ac:spMk id="2" creationId="{FEBF61E5-92A0-B620-B8F1-E63E0BB5C86C}"/>
           </ac:spMkLst>
         </pc:spChg>
-        <pc:spChg chg="add del mod">
-          <ac:chgData name="Samyak Jagtap" userId="fab308c070b6e54d" providerId="LiveId" clId="{C333D098-6AF2-48AA-ACB1-99C10C6737E7}" dt="2026-03-31T16:39:43.627" v="23"/>
-          <ac:spMkLst>
-            <pc:docMk/>
-            <pc:sldMk cId="0" sldId="261"/>
-            <ac:spMk id="3" creationId="{6E01951B-F517-7C53-C64F-2EE4BC55050E}"/>
-          </ac:spMkLst>
-        </pc:spChg>
         <pc:spChg chg="mod topLvl">
           <ac:chgData name="Samyak Jagtap" userId="fab308c070b6e54d" providerId="LiveId" clId="{C333D098-6AF2-48AA-ACB1-99C10C6737E7}" dt="2026-04-01T05:15:34.683" v="442" actId="14100"/>
           <ac:spMkLst>
             <pc:docMk/>
             <pc:sldMk cId="0" sldId="261"/>
             <ac:spMk id="232" creationId="{00000000-0000-0000-0000-000000000000}"/>
-          </ac:spMkLst>
-        </pc:spChg>
-        <pc:spChg chg="add del mod topLvl">
-          <ac:chgData name="Samyak Jagtap" userId="fab308c070b6e54d" providerId="LiveId" clId="{C333D098-6AF2-48AA-ACB1-99C10C6737E7}" dt="2026-04-01T05:15:30.929" v="441" actId="478"/>
-          <ac:spMkLst>
-            <pc:docMk/>
-            <pc:sldMk cId="0" sldId="261"/>
-            <ac:spMk id="233" creationId="{00000000-0000-0000-0000-000000000000}"/>
           </ac:spMkLst>
         </pc:spChg>
         <pc:spChg chg="mod topLvl">
@@ -435,14 +580,6 @@
             <ac:spMk id="235" creationId="{00000000-0000-0000-0000-000000000000}"/>
           </ac:spMkLst>
         </pc:spChg>
-        <pc:spChg chg="del mod topLvl">
-          <ac:chgData name="Samyak Jagtap" userId="fab308c070b6e54d" providerId="LiveId" clId="{C333D098-6AF2-48AA-ACB1-99C10C6737E7}" dt="2026-04-01T05:15:23.252" v="437" actId="478"/>
-          <ac:spMkLst>
-            <pc:docMk/>
-            <pc:sldMk cId="0" sldId="261"/>
-            <ac:spMk id="236" creationId="{00000000-0000-0000-0000-000000000000}"/>
-          </ac:spMkLst>
-        </pc:spChg>
         <pc:spChg chg="mod">
           <ac:chgData name="Samyak Jagtap" userId="fab308c070b6e54d" providerId="LiveId" clId="{C333D098-6AF2-48AA-ACB1-99C10C6737E7}" dt="2026-04-01T05:15:54.838" v="446" actId="1076"/>
           <ac:spMkLst>
@@ -451,61 +588,29 @@
             <ac:spMk id="237" creationId="{00000000-0000-0000-0000-000000000000}"/>
           </ac:spMkLst>
         </pc:spChg>
-        <pc:grpChg chg="add del">
-          <ac:chgData name="Samyak Jagtap" userId="fab308c070b6e54d" providerId="LiveId" clId="{C333D098-6AF2-48AA-ACB1-99C10C6737E7}" dt="2026-04-01T05:15:30.929" v="441" actId="478"/>
-          <ac:grpSpMkLst>
+        <pc:spChg chg="del">
+          <ac:chgData name="Samyak Jagtap" userId="fab308c070b6e54d" providerId="LiveId" clId="{C333D098-6AF2-48AA-ACB1-99C10C6737E7}" dt="2026-04-23T16:01:14.344" v="787" actId="478"/>
+          <ac:spMkLst>
             <pc:docMk/>
             <pc:sldMk cId="0" sldId="261"/>
-            <ac:grpSpMk id="231" creationId="{00000000-0000-0000-0000-000000000000}"/>
-          </ac:grpSpMkLst>
-        </pc:grpChg>
-        <pc:grpChg chg="del mod">
-          <ac:chgData name="Samyak Jagtap" userId="fab308c070b6e54d" providerId="LiveId" clId="{C333D098-6AF2-48AA-ACB1-99C10C6737E7}" dt="2026-04-01T05:15:23.252" v="437" actId="478"/>
-          <ac:grpSpMkLst>
+            <ac:spMk id="240" creationId="{00000000-0000-0000-0000-000000000000}"/>
+          </ac:spMkLst>
+        </pc:spChg>
+        <pc:spChg chg="del">
+          <ac:chgData name="Samyak Jagtap" userId="fab308c070b6e54d" providerId="LiveId" clId="{C333D098-6AF2-48AA-ACB1-99C10C6737E7}" dt="2026-04-23T16:01:16.544" v="788" actId="478"/>
+          <ac:spMkLst>
             <pc:docMk/>
             <pc:sldMk cId="0" sldId="261"/>
-            <ac:grpSpMk id="234" creationId="{00000000-0000-0000-0000-000000000000}"/>
-          </ac:grpSpMkLst>
-        </pc:grpChg>
+            <ac:spMk id="241" creationId="{00000000-0000-0000-0000-000000000000}"/>
+          </ac:spMkLst>
+        </pc:spChg>
       </pc:sldChg>
       <pc:sldChg chg="addSp delSp modSp mod">
-        <pc:chgData name="Samyak Jagtap" userId="fab308c070b6e54d" providerId="LiveId" clId="{C333D098-6AF2-48AA-ACB1-99C10C6737E7}" dt="2026-04-01T05:13:02.248" v="408" actId="20577"/>
+        <pc:chgData name="Samyak Jagtap" userId="fab308c070b6e54d" providerId="LiveId" clId="{C333D098-6AF2-48AA-ACB1-99C10C6737E7}" dt="2026-04-23T16:01:22.905" v="790" actId="478"/>
         <pc:sldMkLst>
           <pc:docMk/>
           <pc:sldMk cId="0" sldId="262"/>
         </pc:sldMkLst>
-        <pc:spChg chg="add mod">
-          <ac:chgData name="Samyak Jagtap" userId="fab308c070b6e54d" providerId="LiveId" clId="{C333D098-6AF2-48AA-ACB1-99C10C6737E7}" dt="2026-03-31T17:23:01.702" v="124" actId="14100"/>
-          <ac:spMkLst>
-            <pc:docMk/>
-            <pc:sldMk cId="0" sldId="262"/>
-            <ac:spMk id="2" creationId="{DB9E0E3D-962B-E742-8100-3195CB952C29}"/>
-          </ac:spMkLst>
-        </pc:spChg>
-        <pc:spChg chg="add">
-          <ac:chgData name="Samyak Jagtap" userId="fab308c070b6e54d" providerId="LiveId" clId="{C333D098-6AF2-48AA-ACB1-99C10C6737E7}" dt="2026-03-31T17:22:52.842" v="123"/>
-          <ac:spMkLst>
-            <pc:docMk/>
-            <pc:sldMk cId="0" sldId="262"/>
-            <ac:spMk id="3" creationId="{4ED1B1A4-497B-F363-6DEE-E38CFC4C3842}"/>
-          </ac:spMkLst>
-        </pc:spChg>
-        <pc:spChg chg="add del mod">
-          <ac:chgData name="Samyak Jagtap" userId="fab308c070b6e54d" providerId="LiveId" clId="{C333D098-6AF2-48AA-ACB1-99C10C6737E7}" dt="2026-03-31T17:27:00.411" v="140"/>
-          <ac:spMkLst>
-            <pc:docMk/>
-            <pc:sldMk cId="0" sldId="262"/>
-            <ac:spMk id="6" creationId="{239B9292-412F-E973-874B-3E1A5600FCDA}"/>
-          </ac:spMkLst>
-        </pc:spChg>
-        <pc:spChg chg="add del mod">
-          <ac:chgData name="Samyak Jagtap" userId="fab308c070b6e54d" providerId="LiveId" clId="{C333D098-6AF2-48AA-ACB1-99C10C6737E7}" dt="2026-03-31T17:27:09.354" v="143"/>
-          <ac:spMkLst>
-            <pc:docMk/>
-            <pc:sldMk cId="0" sldId="262"/>
-            <ac:spMk id="7" creationId="{821839A8-5F5B-3747-6FEB-CC3CF7BB2ED3}"/>
-          </ac:spMkLst>
-        </pc:spChg>
         <pc:spChg chg="add mod">
           <ac:chgData name="Samyak Jagtap" userId="fab308c070b6e54d" providerId="LiveId" clId="{C333D098-6AF2-48AA-ACB1-99C10C6737E7}" dt="2026-04-01T05:13:02.248" v="408" actId="20577"/>
           <ac:spMkLst>
@@ -546,6 +651,22 @@
             <ac:spMk id="263" creationId="{00000000-0000-0000-0000-000000000000}"/>
           </ac:spMkLst>
         </pc:spChg>
+        <pc:spChg chg="del">
+          <ac:chgData name="Samyak Jagtap" userId="fab308c070b6e54d" providerId="LiveId" clId="{C333D098-6AF2-48AA-ACB1-99C10C6737E7}" dt="2026-04-23T16:01:22.905" v="790" actId="478"/>
+          <ac:spMkLst>
+            <pc:docMk/>
+            <pc:sldMk cId="0" sldId="262"/>
+            <ac:spMk id="265" creationId="{00000000-0000-0000-0000-000000000000}"/>
+          </ac:spMkLst>
+        </pc:spChg>
+        <pc:spChg chg="del">
+          <ac:chgData name="Samyak Jagtap" userId="fab308c070b6e54d" providerId="LiveId" clId="{C333D098-6AF2-48AA-ACB1-99C10C6737E7}" dt="2026-04-23T16:01:20.186" v="789" actId="478"/>
+          <ac:spMkLst>
+            <pc:docMk/>
+            <pc:sldMk cId="0" sldId="262"/>
+            <ac:spMk id="266" creationId="{00000000-0000-0000-0000-000000000000}"/>
+          </ac:spMkLst>
+        </pc:spChg>
         <pc:grpChg chg="mod">
           <ac:chgData name="Samyak Jagtap" userId="fab308c070b6e54d" providerId="LiveId" clId="{C333D098-6AF2-48AA-ACB1-99C10C6737E7}" dt="2026-03-31T17:27:10.141" v="144" actId="1076"/>
           <ac:grpSpMkLst>
@@ -564,19 +685,11 @@
         </pc:picChg>
       </pc:sldChg>
       <pc:sldChg chg="addSp delSp modSp mod modNotes">
-        <pc:chgData name="Samyak Jagtap" userId="fab308c070b6e54d" providerId="LiveId" clId="{C333D098-6AF2-48AA-ACB1-99C10C6737E7}" dt="2026-04-01T07:00:37.007" v="569" actId="1076"/>
+        <pc:chgData name="Samyak Jagtap" userId="fab308c070b6e54d" providerId="LiveId" clId="{C333D098-6AF2-48AA-ACB1-99C10C6737E7}" dt="2026-04-23T16:01:34.210" v="792" actId="478"/>
         <pc:sldMkLst>
           <pc:docMk/>
           <pc:sldMk cId="0" sldId="263"/>
         </pc:sldMkLst>
-        <pc:spChg chg="add del mod">
-          <ac:chgData name="Samyak Jagtap" userId="fab308c070b6e54d" providerId="LiveId" clId="{C333D098-6AF2-48AA-ACB1-99C10C6737E7}" dt="2026-03-31T16:41:51.597" v="48" actId="47"/>
-          <ac:spMkLst>
-            <pc:docMk/>
-            <pc:sldMk cId="0" sldId="263"/>
-            <ac:spMk id="2" creationId="{66176A4F-4E7B-D86F-E9CE-0223181B0BAD}"/>
-          </ac:spMkLst>
-        </pc:spChg>
         <pc:spChg chg="add mod">
           <ac:chgData name="Samyak Jagtap" userId="fab308c070b6e54d" providerId="LiveId" clId="{C333D098-6AF2-48AA-ACB1-99C10C6737E7}" dt="2026-03-31T16:42:25.294" v="51"/>
           <ac:spMkLst>
@@ -633,14 +746,6 @@
             <ac:spMk id="9" creationId="{0C7340C4-DA42-BEE7-46C1-4B0C5D053C69}"/>
           </ac:spMkLst>
         </pc:spChg>
-        <pc:spChg chg="add del mod">
-          <ac:chgData name="Samyak Jagtap" userId="fab308c070b6e54d" providerId="LiveId" clId="{C333D098-6AF2-48AA-ACB1-99C10C6737E7}" dt="2026-03-31T16:44:44.025" v="66"/>
-          <ac:spMkLst>
-            <pc:docMk/>
-            <pc:sldMk cId="0" sldId="263"/>
-            <ac:spMk id="10" creationId="{4C84C07B-3CEC-B7D3-8450-46FA595BB010}"/>
-          </ac:spMkLst>
-        </pc:spChg>
         <pc:spChg chg="mod">
           <ac:chgData name="Samyak Jagtap" userId="fab308c070b6e54d" providerId="LiveId" clId="{C333D098-6AF2-48AA-ACB1-99C10C6737E7}" dt="2026-04-01T07:00:37.007" v="569" actId="1076"/>
           <ac:spMkLst>
@@ -649,9 +754,25 @@
             <ac:spMk id="283" creationId="{00000000-0000-0000-0000-000000000000}"/>
           </ac:spMkLst>
         </pc:spChg>
+        <pc:spChg chg="del">
+          <ac:chgData name="Samyak Jagtap" userId="fab308c070b6e54d" providerId="LiveId" clId="{C333D098-6AF2-48AA-ACB1-99C10C6737E7}" dt="2026-04-23T16:01:33.364" v="791" actId="478"/>
+          <ac:spMkLst>
+            <pc:docMk/>
+            <pc:sldMk cId="0" sldId="263"/>
+            <ac:spMk id="284" creationId="{00000000-0000-0000-0000-000000000000}"/>
+          </ac:spMkLst>
+        </pc:spChg>
+        <pc:spChg chg="del">
+          <ac:chgData name="Samyak Jagtap" userId="fab308c070b6e54d" providerId="LiveId" clId="{C333D098-6AF2-48AA-ACB1-99C10C6737E7}" dt="2026-04-23T16:01:34.210" v="792" actId="478"/>
+          <ac:spMkLst>
+            <pc:docMk/>
+            <pc:sldMk cId="0" sldId="263"/>
+            <ac:spMk id="286" creationId="{00000000-0000-0000-0000-000000000000}"/>
+          </ac:spMkLst>
+        </pc:spChg>
       </pc:sldChg>
       <pc:sldChg chg="addSp delSp modSp mod modNotes">
-        <pc:chgData name="Samyak Jagtap" userId="fab308c070b6e54d" providerId="LiveId" clId="{C333D098-6AF2-48AA-ACB1-99C10C6737E7}" dt="2026-04-01T05:46:47.955" v="447" actId="14100"/>
+        <pc:chgData name="Samyak Jagtap" userId="fab308c070b6e54d" providerId="LiveId" clId="{C333D098-6AF2-48AA-ACB1-99C10C6737E7}" dt="2026-04-23T16:01:37.473" v="794" actId="478"/>
         <pc:sldMkLst>
           <pc:docMk/>
           <pc:sldMk cId="0" sldId="264"/>
@@ -664,25 +785,25 @@
             <ac:spMk id="2" creationId="{B5399649-3DDE-22BA-F217-D4A44E6B4DD8}"/>
           </ac:spMkLst>
         </pc:spChg>
-        <pc:spChg chg="add del mod">
-          <ac:chgData name="Samyak Jagtap" userId="fab308c070b6e54d" providerId="LiveId" clId="{C333D098-6AF2-48AA-ACB1-99C10C6737E7}" dt="2026-03-31T16:46:11.456" v="85"/>
+        <pc:spChg chg="del">
+          <ac:chgData name="Samyak Jagtap" userId="fab308c070b6e54d" providerId="LiveId" clId="{C333D098-6AF2-48AA-ACB1-99C10C6737E7}" dt="2026-04-23T16:01:36.488" v="793" actId="478"/>
           <ac:spMkLst>
             <pc:docMk/>
             <pc:sldMk cId="0" sldId="264"/>
-            <ac:spMk id="3" creationId="{F9F715B1-F52B-4E79-543E-313E6E7A4490}"/>
+            <ac:spMk id="309" creationId="{00000000-0000-0000-0000-000000000000}"/>
           </ac:spMkLst>
         </pc:spChg>
-        <pc:spChg chg="add mod">
-          <ac:chgData name="Samyak Jagtap" userId="fab308c070b6e54d" providerId="LiveId" clId="{C333D098-6AF2-48AA-ACB1-99C10C6737E7}" dt="2026-03-31T16:45:53.090" v="79"/>
+        <pc:spChg chg="del">
+          <ac:chgData name="Samyak Jagtap" userId="fab308c070b6e54d" providerId="LiveId" clId="{C333D098-6AF2-48AA-ACB1-99C10C6737E7}" dt="2026-04-23T16:01:37.473" v="794" actId="478"/>
           <ac:spMkLst>
             <pc:docMk/>
             <pc:sldMk cId="0" sldId="264"/>
-            <ac:spMk id="4" creationId="{D8C2C2E0-5598-1F1B-2F24-7C192FBF34E8}"/>
+            <ac:spMk id="310" creationId="{00000000-0000-0000-0000-000000000000}"/>
           </ac:spMkLst>
         </pc:spChg>
       </pc:sldChg>
-      <pc:sldChg chg="modSp mod">
-        <pc:chgData name="Samyak Jagtap" userId="fab308c070b6e54d" providerId="LiveId" clId="{C333D098-6AF2-48AA-ACB1-99C10C6737E7}" dt="2026-03-31T16:41:54.885" v="50" actId="14100"/>
+      <pc:sldChg chg="delSp modSp mod">
+        <pc:chgData name="Samyak Jagtap" userId="fab308c070b6e54d" providerId="LiveId" clId="{C333D098-6AF2-48AA-ACB1-99C10C6737E7}" dt="2026-04-23T16:01:41.074" v="796" actId="478"/>
         <pc:sldMkLst>
           <pc:docMk/>
           <pc:sldMk cId="0" sldId="265"/>
@@ -695,21 +816,29 @@
             <ac:spMk id="4" creationId="{378305F1-FF05-4288-F3C9-295C56C5FE58}"/>
           </ac:spMkLst>
         </pc:spChg>
+        <pc:spChg chg="del">
+          <ac:chgData name="Samyak Jagtap" userId="fab308c070b6e54d" providerId="LiveId" clId="{C333D098-6AF2-48AA-ACB1-99C10C6737E7}" dt="2026-04-23T16:01:40.152" v="795" actId="478"/>
+          <ac:spMkLst>
+            <pc:docMk/>
+            <pc:sldMk cId="0" sldId="265"/>
+            <ac:spMk id="334" creationId="{00000000-0000-0000-0000-000000000000}"/>
+          </ac:spMkLst>
+        </pc:spChg>
+        <pc:spChg chg="del">
+          <ac:chgData name="Samyak Jagtap" userId="fab308c070b6e54d" providerId="LiveId" clId="{C333D098-6AF2-48AA-ACB1-99C10C6737E7}" dt="2026-04-23T16:01:41.074" v="796" actId="478"/>
+          <ac:spMkLst>
+            <pc:docMk/>
+            <pc:sldMk cId="0" sldId="265"/>
+            <ac:spMk id="336" creationId="{00000000-0000-0000-0000-000000000000}"/>
+          </ac:spMkLst>
+        </pc:spChg>
       </pc:sldChg>
       <pc:sldChg chg="addSp delSp modSp mod">
-        <pc:chgData name="Samyak Jagtap" userId="fab308c070b6e54d" providerId="LiveId" clId="{C333D098-6AF2-48AA-ACB1-99C10C6737E7}" dt="2026-04-01T03:06:37.197" v="272" actId="1076"/>
+        <pc:chgData name="Samyak Jagtap" userId="fab308c070b6e54d" providerId="LiveId" clId="{C333D098-6AF2-48AA-ACB1-99C10C6737E7}" dt="2026-04-23T16:01:51.289" v="801" actId="478"/>
         <pc:sldMkLst>
           <pc:docMk/>
           <pc:sldMk cId="0" sldId="266"/>
         </pc:sldMkLst>
-        <pc:spChg chg="del mod">
-          <ac:chgData name="Samyak Jagtap" userId="fab308c070b6e54d" providerId="LiveId" clId="{C333D098-6AF2-48AA-ACB1-99C10C6737E7}" dt="2026-03-31T17:28:45.132" v="161"/>
-          <ac:spMkLst>
-            <pc:docMk/>
-            <pc:sldMk cId="0" sldId="266"/>
-            <ac:spMk id="2" creationId="{8A893C0F-DBB9-2E24-0EA8-3031F4E36F56}"/>
-          </ac:spMkLst>
-        </pc:spChg>
         <pc:spChg chg="add mod">
           <ac:chgData name="Samyak Jagtap" userId="fab308c070b6e54d" providerId="LiveId" clId="{C333D098-6AF2-48AA-ACB1-99C10C6737E7}" dt="2026-04-01T03:06:37.197" v="272" actId="1076"/>
           <ac:spMkLst>
@@ -718,21 +847,29 @@
             <ac:spMk id="2" creationId="{CB63BA24-F63C-3B42-6197-D384B7278D3A}"/>
           </ac:spMkLst>
         </pc:spChg>
+        <pc:spChg chg="del mod">
+          <ac:chgData name="Samyak Jagtap" userId="fab308c070b6e54d" providerId="LiveId" clId="{C333D098-6AF2-48AA-ACB1-99C10C6737E7}" dt="2026-04-23T16:01:50.528" v="800" actId="478"/>
+          <ac:spMkLst>
+            <pc:docMk/>
+            <pc:sldMk cId="0" sldId="266"/>
+            <ac:spMk id="359" creationId="{00000000-0000-0000-0000-000000000000}"/>
+          </ac:spMkLst>
+        </pc:spChg>
+        <pc:spChg chg="del">
+          <ac:chgData name="Samyak Jagtap" userId="fab308c070b6e54d" providerId="LiveId" clId="{C333D098-6AF2-48AA-ACB1-99C10C6737E7}" dt="2026-04-23T16:01:51.289" v="801" actId="478"/>
+          <ac:spMkLst>
+            <pc:docMk/>
+            <pc:sldMk cId="0" sldId="266"/>
+            <ac:spMk id="361" creationId="{00000000-0000-0000-0000-000000000000}"/>
+          </ac:spMkLst>
+        </pc:spChg>
       </pc:sldChg>
       <pc:sldChg chg="addSp delSp modSp add mod setBg">
-        <pc:chgData name="Samyak Jagtap" userId="fab308c070b6e54d" providerId="LiveId" clId="{C333D098-6AF2-48AA-ACB1-99C10C6737E7}" dt="2026-04-01T07:03:33.571" v="622" actId="1076"/>
+        <pc:chgData name="Samyak Jagtap" userId="fab308c070b6e54d" providerId="LiveId" clId="{C333D098-6AF2-48AA-ACB1-99C10C6737E7}" dt="2026-04-23T16:01:45.155" v="798" actId="478"/>
         <pc:sldMkLst>
           <pc:docMk/>
           <pc:sldMk cId="474306975" sldId="267"/>
         </pc:sldMkLst>
-        <pc:spChg chg="del mod">
-          <ac:chgData name="Samyak Jagtap" userId="fab308c070b6e54d" providerId="LiveId" clId="{C333D098-6AF2-48AA-ACB1-99C10C6737E7}" dt="2026-04-01T06:58:33.255" v="556" actId="478"/>
-          <ac:spMkLst>
-            <pc:docMk/>
-            <pc:sldMk cId="474306975" sldId="267"/>
-            <ac:spMk id="2" creationId="{82C04A16-C7B1-9FA3-BDC9-BAB7CF0F96E7}"/>
-          </ac:spMkLst>
-        </pc:spChg>
         <pc:spChg chg="mod">
           <ac:chgData name="Samyak Jagtap" userId="fab308c070b6e54d" providerId="LiveId" clId="{C333D098-6AF2-48AA-ACB1-99C10C6737E7}" dt="2026-04-01T07:03:24.080" v="621" actId="255"/>
           <ac:spMkLst>
@@ -741,12 +878,20 @@
             <ac:spMk id="355" creationId="{73A87F9C-6C0E-35BF-5813-5692686C9260}"/>
           </ac:spMkLst>
         </pc:spChg>
-        <pc:spChg chg="del mod">
-          <ac:chgData name="Samyak Jagtap" userId="fab308c070b6e54d" providerId="LiveId" clId="{C333D098-6AF2-48AA-ACB1-99C10C6737E7}" dt="2026-04-01T06:59:29.225" v="567" actId="478"/>
+        <pc:spChg chg="del">
+          <ac:chgData name="Samyak Jagtap" userId="fab308c070b6e54d" providerId="LiveId" clId="{C333D098-6AF2-48AA-ACB1-99C10C6737E7}" dt="2026-04-23T16:01:44.376" v="797" actId="478"/>
           <ac:spMkLst>
             <pc:docMk/>
             <pc:sldMk cId="474306975" sldId="267"/>
-            <ac:spMk id="356" creationId="{C4ACEE4D-A638-8C10-0332-54D8A5301EEF}"/>
+            <ac:spMk id="359" creationId="{2207C8FC-4015-9F74-5666-63B4EF1C5511}"/>
+          </ac:spMkLst>
+        </pc:spChg>
+        <pc:spChg chg="del">
+          <ac:chgData name="Samyak Jagtap" userId="fab308c070b6e54d" providerId="LiveId" clId="{C333D098-6AF2-48AA-ACB1-99C10C6737E7}" dt="2026-04-23T16:01:45.155" v="798" actId="478"/>
+          <ac:spMkLst>
+            <pc:docMk/>
+            <pc:sldMk cId="474306975" sldId="267"/>
+            <ac:spMk id="361" creationId="{59FB9EAE-A981-AD93-C98E-7A8CF5B19DB9}"/>
           </ac:spMkLst>
         </pc:spChg>
         <pc:grpChg chg="mod">
@@ -782,89 +927,12 @@
           </ac:picMkLst>
         </pc:picChg>
       </pc:sldChg>
-      <pc:sldChg chg="addSp delSp modSp add del mod">
-        <pc:chgData name="Samyak Jagtap" userId="fab308c070b6e54d" providerId="LiveId" clId="{C333D098-6AF2-48AA-ACB1-99C10C6737E7}" dt="2026-04-01T05:54:19.174" v="507" actId="47"/>
-        <pc:sldMkLst>
-          <pc:docMk/>
-          <pc:sldMk cId="3169786225" sldId="267"/>
-        </pc:sldMkLst>
-        <pc:spChg chg="del">
-          <ac:chgData name="Samyak Jagtap" userId="fab308c070b6e54d" providerId="LiveId" clId="{C333D098-6AF2-48AA-ACB1-99C10C6737E7}" dt="2026-04-01T05:47:38.825" v="453" actId="478"/>
-          <ac:spMkLst>
-            <pc:docMk/>
-            <pc:sldMk cId="3169786225" sldId="267"/>
-            <ac:spMk id="2" creationId="{A9BC204D-754C-D407-2AA9-1DDE470AC6EE}"/>
-          </ac:spMkLst>
-        </pc:spChg>
-        <pc:spChg chg="del mod">
-          <ac:chgData name="Samyak Jagtap" userId="fab308c070b6e54d" providerId="LiveId" clId="{C333D098-6AF2-48AA-ACB1-99C10C6737E7}" dt="2026-04-01T05:49:13.425" v="484"/>
-          <ac:spMkLst>
-            <pc:docMk/>
-            <pc:sldMk cId="3169786225" sldId="267"/>
-            <ac:spMk id="306" creationId="{5D4E35F5-119B-533F-60A6-AAAA509EDA6B}"/>
-          </ac:spMkLst>
-        </pc:spChg>
-        <pc:grpChg chg="del">
-          <ac:chgData name="Samyak Jagtap" userId="fab308c070b6e54d" providerId="LiveId" clId="{C333D098-6AF2-48AA-ACB1-99C10C6737E7}" dt="2026-04-01T05:49:14.852" v="485" actId="478"/>
-          <ac:grpSpMkLst>
-            <pc:docMk/>
-            <pc:sldMk cId="3169786225" sldId="267"/>
-            <ac:grpSpMk id="300" creationId="{DEF7AB10-A697-8E37-25E9-2068C5484D08}"/>
-          </ac:grpSpMkLst>
-        </pc:grpChg>
-        <pc:grpChg chg="del">
-          <ac:chgData name="Samyak Jagtap" userId="fab308c070b6e54d" providerId="LiveId" clId="{C333D098-6AF2-48AA-ACB1-99C10C6737E7}" dt="2026-04-01T05:49:13.423" v="482" actId="478"/>
-          <ac:grpSpMkLst>
-            <pc:docMk/>
-            <pc:sldMk cId="3169786225" sldId="267"/>
-            <ac:grpSpMk id="303" creationId="{0F4551E6-BB60-5C9B-B592-7354A749FB1A}"/>
-          </ac:grpSpMkLst>
-        </pc:grpChg>
-        <pc:picChg chg="add mod">
-          <ac:chgData name="Samyak Jagtap" userId="fab308c070b6e54d" providerId="LiveId" clId="{C333D098-6AF2-48AA-ACB1-99C10C6737E7}" dt="2026-04-01T05:51:33.354" v="506" actId="14100"/>
-          <ac:picMkLst>
-            <pc:docMk/>
-            <pc:sldMk cId="3169786225" sldId="267"/>
-            <ac:picMk id="4" creationId="{4A70D69D-C226-5F3E-CEFC-2DFCD9136B93}"/>
-          </ac:picMkLst>
-        </pc:picChg>
-        <pc:picChg chg="add mod">
-          <ac:chgData name="Samyak Jagtap" userId="fab308c070b6e54d" providerId="LiveId" clId="{C333D098-6AF2-48AA-ACB1-99C10C6737E7}" dt="2026-04-01T05:51:28.583" v="505" actId="1076"/>
-          <ac:picMkLst>
-            <pc:docMk/>
-            <pc:sldMk cId="3169786225" sldId="267"/>
-            <ac:picMk id="6" creationId="{3081AEF6-545D-2C25-82CC-DBF808646BD3}"/>
-          </ac:picMkLst>
-        </pc:picChg>
-      </pc:sldChg>
-      <pc:sldChg chg="new del">
-        <pc:chgData name="Samyak Jagtap" userId="fab308c070b6e54d" providerId="LiveId" clId="{C333D098-6AF2-48AA-ACB1-99C10C6737E7}" dt="2026-04-01T05:47:23.370" v="451" actId="47"/>
-        <pc:sldMkLst>
-          <pc:docMk/>
-          <pc:sldMk cId="3706545149" sldId="267"/>
-        </pc:sldMkLst>
-      </pc:sldChg>
-      <pc:sldChg chg="add del">
-        <pc:chgData name="Samyak Jagtap" userId="fab308c070b6e54d" providerId="LiveId" clId="{C333D098-6AF2-48AA-ACB1-99C10C6737E7}" dt="2026-04-01T05:47:20.822" v="450" actId="47"/>
-        <pc:sldMkLst>
-          <pc:docMk/>
-          <pc:sldMk cId="3457693413" sldId="268"/>
-        </pc:sldMkLst>
-      </pc:sldChg>
       <pc:sldMasterChg chg="delSldLayout">
         <pc:chgData name="Samyak Jagtap" userId="fab308c070b6e54d" providerId="LiveId" clId="{C333D098-6AF2-48AA-ACB1-99C10C6737E7}" dt="2026-04-01T05:47:23.370" v="451" actId="47"/>
         <pc:sldMasterMkLst>
           <pc:docMk/>
           <pc:sldMasterMk cId="0" sldId="2147483648"/>
         </pc:sldMasterMkLst>
-        <pc:sldLayoutChg chg="del">
-          <pc:chgData name="Samyak Jagtap" userId="fab308c070b6e54d" providerId="LiveId" clId="{C333D098-6AF2-48AA-ACB1-99C10C6737E7}" dt="2026-04-01T05:47:23.370" v="451" actId="47"/>
-          <pc:sldLayoutMkLst>
-            <pc:docMk/>
-            <pc:sldMasterMk cId="0" sldId="2147483648"/>
-            <pc:sldLayoutMk cId="0" sldId="2147483650"/>
-          </pc:sldLayoutMkLst>
-        </pc:sldLayoutChg>
       </pc:sldMasterChg>
     </pc:docChg>
   </pc:docChgLst>
@@ -1452,7 +1520,7 @@
   <p:cSld>
     <p:spTree>
       <p:nvGrpSpPr>
-        <p:cNvPr id="1" name="Shape 80"/>
+        <p:cNvPr id="1" name="Shape 120"/>
         <p:cNvGrpSpPr/>
         <p:nvPr/>
       </p:nvGrpSpPr>
@@ -1466,7 +1534,7 @@
       </p:grpSpPr>
       <p:sp>
         <p:nvSpPr>
-          <p:cNvPr id="81" name="Google Shape;81;p1:notes"/>
+          <p:cNvPr id="121" name="Google Shape;121;p2:notes"/>
           <p:cNvSpPr txBox="1">
             <a:spLocks noGrp="1"/>
           </p:cNvSpPr>
@@ -1512,7 +1580,7 @@
       </p:sp>
       <p:sp>
         <p:nvSpPr>
-          <p:cNvPr id="82" name="Google Shape;82;p1:notes"/>
+          <p:cNvPr id="122" name="Google Shape;122;p2:notes"/>
           <p:cNvSpPr>
             <a:spLocks noGrp="1" noRot="1" noChangeAspect="1"/>
           </p:cNvSpPr>
@@ -1570,128 +1638,6 @@
 </file>
 
 <file path=ppt/notesSlides/notesSlide10.xml><?xml version="1.0" encoding="utf-8"?>
-<p:notes xmlns:a="http://schemas.openxmlformats.org/drawingml/2006/main" xmlns:r="http://schemas.openxmlformats.org/officeDocument/2006/relationships" xmlns:p="http://schemas.openxmlformats.org/presentationml/2006/main" showMasterSp="0" showMasterPhAnim="0">
-  <p:cSld>
-    <p:spTree>
-      <p:nvGrpSpPr>
-        <p:cNvPr id="1" name="Shape 312"/>
-        <p:cNvGrpSpPr/>
-        <p:nvPr/>
-      </p:nvGrpSpPr>
-      <p:grpSpPr>
-        <a:xfrm>
-          <a:off x="0" y="0"/>
-          <a:ext cx="0" cy="0"/>
-          <a:chOff x="0" y="0"/>
-          <a:chExt cx="0" cy="0"/>
-        </a:xfrm>
-      </p:grpSpPr>
-      <p:sp>
-        <p:nvSpPr>
-          <p:cNvPr id="313" name="Google Shape;313;p9:notes"/>
-          <p:cNvSpPr txBox="1">
-            <a:spLocks noGrp="1"/>
-          </p:cNvSpPr>
-          <p:nvPr>
-            <p:ph type="body" idx="1"/>
-          </p:nvPr>
-        </p:nvSpPr>
-        <p:spPr>
-          <a:xfrm>
-            <a:off x="685800" y="4343400"/>
-            <a:ext cx="5486400" cy="4114800"/>
-          </a:xfrm>
-          <a:prstGeom prst="rect">
-            <a:avLst/>
-          </a:prstGeom>
-          <a:noFill/>
-          <a:ln>
-            <a:noFill/>
-          </a:ln>
-        </p:spPr>
-        <p:txBody>
-          <a:bodyPr spcFirstLastPara="1" wrap="square" lIns="91425" tIns="91425" rIns="91425" bIns="91425" anchor="t" anchorCtr="0">
-            <a:noAutofit/>
-          </a:bodyPr>
-          <a:lstStyle/>
-          <a:p>
-            <a:pPr marL="0" lvl="0" indent="0" algn="l" rtl="0">
-              <a:lnSpc>
-                <a:spcPct val="100000"/>
-              </a:lnSpc>
-              <a:spcBef>
-                <a:spcPts val="0"/>
-              </a:spcBef>
-              <a:spcAft>
-                <a:spcPts val="0"/>
-              </a:spcAft>
-              <a:buSzPts val="1100"/>
-              <a:buNone/>
-            </a:pPr>
-            <a:endParaRPr/>
-          </a:p>
-        </p:txBody>
-      </p:sp>
-      <p:sp>
-        <p:nvSpPr>
-          <p:cNvPr id="314" name="Google Shape;314;p9:notes"/>
-          <p:cNvSpPr>
-            <a:spLocks noGrp="1" noRot="1" noChangeAspect="1"/>
-          </p:cNvSpPr>
-          <p:nvPr>
-            <p:ph type="sldImg" idx="2"/>
-          </p:nvPr>
-        </p:nvSpPr>
-        <p:spPr>
-          <a:xfrm>
-            <a:off x="381000" y="685800"/>
-            <a:ext cx="6096000" cy="3429000"/>
-          </a:xfrm>
-          <a:custGeom>
-            <a:avLst/>
-            <a:gdLst/>
-            <a:ahLst/>
-            <a:cxnLst/>
-            <a:rect l="l" t="t" r="r" b="b"/>
-            <a:pathLst>
-              <a:path w="120000" h="120000" extrusionOk="0">
-                <a:moveTo>
-                  <a:pt x="0" y="0"/>
-                </a:moveTo>
-                <a:lnTo>
-                  <a:pt x="120000" y="0"/>
-                </a:lnTo>
-                <a:lnTo>
-                  <a:pt x="120000" y="120000"/>
-                </a:lnTo>
-                <a:lnTo>
-                  <a:pt x="0" y="120000"/>
-                </a:lnTo>
-                <a:close/>
-              </a:path>
-            </a:pathLst>
-          </a:custGeom>
-          <a:noFill/>
-          <a:ln w="9525" cap="flat" cmpd="sng">
-            <a:solidFill>
-              <a:srgbClr val="000000"/>
-            </a:solidFill>
-            <a:prstDash val="solid"/>
-            <a:round/>
-            <a:headEnd type="none" w="sm" len="sm"/>
-            <a:tailEnd type="none" w="sm" len="sm"/>
-          </a:ln>
-        </p:spPr>
-      </p:sp>
-    </p:spTree>
-  </p:cSld>
-  <p:clrMapOvr>
-    <a:masterClrMapping/>
-  </p:clrMapOvr>
-</p:notes>
-</file>
-
-<file path=ppt/notesSlides/notesSlide11.xml><?xml version="1.0" encoding="utf-8"?>
 <p:notes xmlns:a="http://schemas.openxmlformats.org/drawingml/2006/main" xmlns:r="http://schemas.openxmlformats.org/officeDocument/2006/relationships" xmlns:p="http://schemas.openxmlformats.org/presentationml/2006/main" showMasterSp="0" showMasterPhAnim="0">
   <p:cSld>
     <p:spTree>
@@ -1836,7 +1782,7 @@
 </p:notes>
 </file>
 
-<file path=ppt/notesSlides/notesSlide12.xml><?xml version="1.0" encoding="utf-8"?>
+<file path=ppt/notesSlides/notesSlide11.xml><?xml version="1.0" encoding="utf-8"?>
 <p:notes xmlns:a="http://schemas.openxmlformats.org/drawingml/2006/main" xmlns:r="http://schemas.openxmlformats.org/officeDocument/2006/relationships" xmlns:p="http://schemas.openxmlformats.org/presentationml/2006/main" showMasterSp="0" showMasterPhAnim="0">
   <p:cSld>
     <p:spTree>
@@ -1963,128 +1909,6 @@
   <p:cSld>
     <p:spTree>
       <p:nvGrpSpPr>
-        <p:cNvPr id="1" name="Shape 120"/>
-        <p:cNvGrpSpPr/>
-        <p:nvPr/>
-      </p:nvGrpSpPr>
-      <p:grpSpPr>
-        <a:xfrm>
-          <a:off x="0" y="0"/>
-          <a:ext cx="0" cy="0"/>
-          <a:chOff x="0" y="0"/>
-          <a:chExt cx="0" cy="0"/>
-        </a:xfrm>
-      </p:grpSpPr>
-      <p:sp>
-        <p:nvSpPr>
-          <p:cNvPr id="121" name="Google Shape;121;p2:notes"/>
-          <p:cNvSpPr txBox="1">
-            <a:spLocks noGrp="1"/>
-          </p:cNvSpPr>
-          <p:nvPr>
-            <p:ph type="body" idx="1"/>
-          </p:nvPr>
-        </p:nvSpPr>
-        <p:spPr>
-          <a:xfrm>
-            <a:off x="685800" y="4343400"/>
-            <a:ext cx="5486400" cy="4114800"/>
-          </a:xfrm>
-          <a:prstGeom prst="rect">
-            <a:avLst/>
-          </a:prstGeom>
-          <a:noFill/>
-          <a:ln>
-            <a:noFill/>
-          </a:ln>
-        </p:spPr>
-        <p:txBody>
-          <a:bodyPr spcFirstLastPara="1" wrap="square" lIns="91425" tIns="91425" rIns="91425" bIns="91425" anchor="t" anchorCtr="0">
-            <a:noAutofit/>
-          </a:bodyPr>
-          <a:lstStyle/>
-          <a:p>
-            <a:pPr marL="0" lvl="0" indent="0" algn="l" rtl="0">
-              <a:lnSpc>
-                <a:spcPct val="100000"/>
-              </a:lnSpc>
-              <a:spcBef>
-                <a:spcPts val="0"/>
-              </a:spcBef>
-              <a:spcAft>
-                <a:spcPts val="0"/>
-              </a:spcAft>
-              <a:buSzPts val="1100"/>
-              <a:buNone/>
-            </a:pPr>
-            <a:endParaRPr/>
-          </a:p>
-        </p:txBody>
-      </p:sp>
-      <p:sp>
-        <p:nvSpPr>
-          <p:cNvPr id="122" name="Google Shape;122;p2:notes"/>
-          <p:cNvSpPr>
-            <a:spLocks noGrp="1" noRot="1" noChangeAspect="1"/>
-          </p:cNvSpPr>
-          <p:nvPr>
-            <p:ph type="sldImg" idx="2"/>
-          </p:nvPr>
-        </p:nvSpPr>
-        <p:spPr>
-          <a:xfrm>
-            <a:off x="381000" y="685800"/>
-            <a:ext cx="6096000" cy="3429000"/>
-          </a:xfrm>
-          <a:custGeom>
-            <a:avLst/>
-            <a:gdLst/>
-            <a:ahLst/>
-            <a:cxnLst/>
-            <a:rect l="l" t="t" r="r" b="b"/>
-            <a:pathLst>
-              <a:path w="120000" h="120000" extrusionOk="0">
-                <a:moveTo>
-                  <a:pt x="0" y="0"/>
-                </a:moveTo>
-                <a:lnTo>
-                  <a:pt x="120000" y="0"/>
-                </a:lnTo>
-                <a:lnTo>
-                  <a:pt x="120000" y="120000"/>
-                </a:lnTo>
-                <a:lnTo>
-                  <a:pt x="0" y="120000"/>
-                </a:lnTo>
-                <a:close/>
-              </a:path>
-            </a:pathLst>
-          </a:custGeom>
-          <a:noFill/>
-          <a:ln w="9525" cap="flat" cmpd="sng">
-            <a:solidFill>
-              <a:srgbClr val="000000"/>
-            </a:solidFill>
-            <a:prstDash val="solid"/>
-            <a:round/>
-            <a:headEnd type="none" w="sm" len="sm"/>
-            <a:tailEnd type="none" w="sm" len="sm"/>
-          </a:ln>
-        </p:spPr>
-      </p:sp>
-    </p:spTree>
-  </p:cSld>
-  <p:clrMapOvr>
-    <a:masterClrMapping/>
-  </p:clrMapOvr>
-</p:notes>
-</file>
-
-<file path=ppt/notesSlides/notesSlide3.xml><?xml version="1.0" encoding="utf-8"?>
-<p:notes xmlns:a="http://schemas.openxmlformats.org/drawingml/2006/main" xmlns:r="http://schemas.openxmlformats.org/officeDocument/2006/relationships" xmlns:p="http://schemas.openxmlformats.org/presentationml/2006/main" showMasterSp="0" showMasterPhAnim="0">
-  <p:cSld>
-    <p:spTree>
-      <p:nvGrpSpPr>
         <p:cNvPr id="1" name="Shape 143"/>
         <p:cNvGrpSpPr/>
         <p:nvPr/>
@@ -2202,7 +2026,7 @@
 </p:notes>
 </file>
 
-<file path=ppt/notesSlides/notesSlide4.xml><?xml version="1.0" encoding="utf-8"?>
+<file path=ppt/notesSlides/notesSlide3.xml><?xml version="1.0" encoding="utf-8"?>
 <p:notes xmlns:a="http://schemas.openxmlformats.org/drawingml/2006/main" xmlns:r="http://schemas.openxmlformats.org/officeDocument/2006/relationships" xmlns:p="http://schemas.openxmlformats.org/presentationml/2006/main" showMasterSp="0" showMasterPhAnim="0">
   <p:cSld>
     <p:spTree>
@@ -2324,7 +2148,7 @@
 </p:notes>
 </file>
 
-<file path=ppt/notesSlides/notesSlide5.xml><?xml version="1.0" encoding="utf-8"?>
+<file path=ppt/notesSlides/notesSlide4.xml><?xml version="1.0" encoding="utf-8"?>
 <p:notes xmlns:a="http://schemas.openxmlformats.org/drawingml/2006/main" xmlns:r="http://schemas.openxmlformats.org/officeDocument/2006/relationships" xmlns:p="http://schemas.openxmlformats.org/presentationml/2006/main" showMasterSp="0" showMasterPhAnim="0">
   <p:cSld>
     <p:spTree>
@@ -2446,7 +2270,7 @@
 </p:notes>
 </file>
 
-<file path=ppt/notesSlides/notesSlide6.xml><?xml version="1.0" encoding="utf-8"?>
+<file path=ppt/notesSlides/notesSlide5.xml><?xml version="1.0" encoding="utf-8"?>
 <p:notes xmlns:a="http://schemas.openxmlformats.org/drawingml/2006/main" xmlns:r="http://schemas.openxmlformats.org/officeDocument/2006/relationships" xmlns:p="http://schemas.openxmlformats.org/presentationml/2006/main" showMasterSp="0" showMasterPhAnim="0">
   <p:cSld>
     <p:spTree>
@@ -2568,7 +2392,7 @@
 </p:notes>
 </file>
 
-<file path=ppt/notesSlides/notesSlide7.xml><?xml version="1.0" encoding="utf-8"?>
+<file path=ppt/notesSlides/notesSlide6.xml><?xml version="1.0" encoding="utf-8"?>
 <p:notes xmlns:a="http://schemas.openxmlformats.org/drawingml/2006/main" xmlns:r="http://schemas.openxmlformats.org/officeDocument/2006/relationships" xmlns:p="http://schemas.openxmlformats.org/presentationml/2006/main" showMasterSp="0" showMasterPhAnim="0">
   <p:cSld>
     <p:spTree>
@@ -2690,7 +2514,7 @@
 </p:notes>
 </file>
 
-<file path=ppt/notesSlides/notesSlide8.xml><?xml version="1.0" encoding="utf-8"?>
+<file path=ppt/notesSlides/notesSlide7.xml><?xml version="1.0" encoding="utf-8"?>
 <p:notes xmlns:a="http://schemas.openxmlformats.org/drawingml/2006/main" xmlns:r="http://schemas.openxmlformats.org/officeDocument/2006/relationships" xmlns:p="http://schemas.openxmlformats.org/presentationml/2006/main" showMasterSp="0" showMasterPhAnim="0">
   <p:cSld>
     <p:spTree>
@@ -2812,7 +2636,7 @@
 </p:notes>
 </file>
 
-<file path=ppt/notesSlides/notesSlide9.xml><?xml version="1.0" encoding="utf-8"?>
+<file path=ppt/notesSlides/notesSlide8.xml><?xml version="1.0" encoding="utf-8"?>
 <p:notes xmlns:a="http://schemas.openxmlformats.org/drawingml/2006/main" xmlns:r="http://schemas.openxmlformats.org/officeDocument/2006/relationships" xmlns:p="http://schemas.openxmlformats.org/presentationml/2006/main" showMasterSp="0" showMasterPhAnim="0">
   <p:cSld>
     <p:spTree>
@@ -2878,6 +2702,128 @@
       <p:sp>
         <p:nvSpPr>
           <p:cNvPr id="289" name="Google Shape;289;p8:notes"/>
+          <p:cNvSpPr>
+            <a:spLocks noGrp="1" noRot="1" noChangeAspect="1"/>
+          </p:cNvSpPr>
+          <p:nvPr>
+            <p:ph type="sldImg" idx="2"/>
+          </p:nvPr>
+        </p:nvSpPr>
+        <p:spPr>
+          <a:xfrm>
+            <a:off x="381000" y="685800"/>
+            <a:ext cx="6096000" cy="3429000"/>
+          </a:xfrm>
+          <a:custGeom>
+            <a:avLst/>
+            <a:gdLst/>
+            <a:ahLst/>
+            <a:cxnLst/>
+            <a:rect l="l" t="t" r="r" b="b"/>
+            <a:pathLst>
+              <a:path w="120000" h="120000" extrusionOk="0">
+                <a:moveTo>
+                  <a:pt x="0" y="0"/>
+                </a:moveTo>
+                <a:lnTo>
+                  <a:pt x="120000" y="0"/>
+                </a:lnTo>
+                <a:lnTo>
+                  <a:pt x="120000" y="120000"/>
+                </a:lnTo>
+                <a:lnTo>
+                  <a:pt x="0" y="120000"/>
+                </a:lnTo>
+                <a:close/>
+              </a:path>
+            </a:pathLst>
+          </a:custGeom>
+          <a:noFill/>
+          <a:ln w="9525" cap="flat" cmpd="sng">
+            <a:solidFill>
+              <a:srgbClr val="000000"/>
+            </a:solidFill>
+            <a:prstDash val="solid"/>
+            <a:round/>
+            <a:headEnd type="none" w="sm" len="sm"/>
+            <a:tailEnd type="none" w="sm" len="sm"/>
+          </a:ln>
+        </p:spPr>
+      </p:sp>
+    </p:spTree>
+  </p:cSld>
+  <p:clrMapOvr>
+    <a:masterClrMapping/>
+  </p:clrMapOvr>
+</p:notes>
+</file>
+
+<file path=ppt/notesSlides/notesSlide9.xml><?xml version="1.0" encoding="utf-8"?>
+<p:notes xmlns:a="http://schemas.openxmlformats.org/drawingml/2006/main" xmlns:r="http://schemas.openxmlformats.org/officeDocument/2006/relationships" xmlns:p="http://schemas.openxmlformats.org/presentationml/2006/main" showMasterSp="0" showMasterPhAnim="0">
+  <p:cSld>
+    <p:spTree>
+      <p:nvGrpSpPr>
+        <p:cNvPr id="1" name="Shape 312"/>
+        <p:cNvGrpSpPr/>
+        <p:nvPr/>
+      </p:nvGrpSpPr>
+      <p:grpSpPr>
+        <a:xfrm>
+          <a:off x="0" y="0"/>
+          <a:ext cx="0" cy="0"/>
+          <a:chOff x="0" y="0"/>
+          <a:chExt cx="0" cy="0"/>
+        </a:xfrm>
+      </p:grpSpPr>
+      <p:sp>
+        <p:nvSpPr>
+          <p:cNvPr id="313" name="Google Shape;313;p9:notes"/>
+          <p:cNvSpPr txBox="1">
+            <a:spLocks noGrp="1"/>
+          </p:cNvSpPr>
+          <p:nvPr>
+            <p:ph type="body" idx="1"/>
+          </p:nvPr>
+        </p:nvSpPr>
+        <p:spPr>
+          <a:xfrm>
+            <a:off x="685800" y="4343400"/>
+            <a:ext cx="5486400" cy="4114800"/>
+          </a:xfrm>
+          <a:prstGeom prst="rect">
+            <a:avLst/>
+          </a:prstGeom>
+          <a:noFill/>
+          <a:ln>
+            <a:noFill/>
+          </a:ln>
+        </p:spPr>
+        <p:txBody>
+          <a:bodyPr spcFirstLastPara="1" wrap="square" lIns="91425" tIns="91425" rIns="91425" bIns="91425" anchor="t" anchorCtr="0">
+            <a:noAutofit/>
+          </a:bodyPr>
+          <a:lstStyle/>
+          <a:p>
+            <a:pPr marL="0" lvl="0" indent="0" algn="l" rtl="0">
+              <a:lnSpc>
+                <a:spcPct val="100000"/>
+              </a:lnSpc>
+              <a:spcBef>
+                <a:spcPts val="0"/>
+              </a:spcBef>
+              <a:spcAft>
+                <a:spcPts val="0"/>
+              </a:spcAft>
+              <a:buSzPts val="1100"/>
+              <a:buNone/>
+            </a:pPr>
+            <a:endParaRPr/>
+          </a:p>
+        </p:txBody>
+      </p:sp>
+      <p:sp>
+        <p:nvSpPr>
+          <p:cNvPr id="314" name="Google Shape;314;p9:notes"/>
           <p:cNvSpPr>
             <a:spLocks noGrp="1" noRot="1" noChangeAspect="1"/>
           </p:cNvSpPr>
@@ -15255,2030 +15201,7 @@
     </p:bg>
     <p:spTree>
       <p:nvGrpSpPr>
-        <p:cNvPr id="1" name="Shape 83"/>
-        <p:cNvGrpSpPr/>
-        <p:nvPr/>
-      </p:nvGrpSpPr>
-      <p:grpSpPr>
-        <a:xfrm>
-          <a:off x="0" y="0"/>
-          <a:ext cx="0" cy="0"/>
-          <a:chOff x="0" y="0"/>
-          <a:chExt cx="0" cy="0"/>
-        </a:xfrm>
-      </p:grpSpPr>
-      <p:grpSp>
-        <p:nvGrpSpPr>
-          <p:cNvPr id="84" name="Google Shape;84;p1"/>
-          <p:cNvGrpSpPr/>
-          <p:nvPr/>
-        </p:nvGrpSpPr>
-        <p:grpSpPr>
-          <a:xfrm rot="-2700000">
-            <a:off x="8291685" y="1839528"/>
-            <a:ext cx="6940602" cy="7021937"/>
-            <a:chOff x="0" y="-9525"/>
-            <a:chExt cx="812800" cy="822325"/>
-          </a:xfrm>
-        </p:grpSpPr>
-        <p:sp>
-          <p:nvSpPr>
-            <p:cNvPr id="85" name="Google Shape;85;p1"/>
-            <p:cNvSpPr/>
-            <p:nvPr/>
-          </p:nvSpPr>
-          <p:spPr>
-            <a:xfrm>
-              <a:off x="0" y="0"/>
-              <a:ext cx="812800" cy="812800"/>
-            </a:xfrm>
-            <a:custGeom>
-              <a:avLst/>
-              <a:gdLst/>
-              <a:ahLst/>
-              <a:cxnLst/>
-              <a:rect l="l" t="t" r="r" b="b"/>
-              <a:pathLst>
-                <a:path w="812800" h="812800" extrusionOk="0">
-                  <a:moveTo>
-                    <a:pt x="0" y="0"/>
-                  </a:moveTo>
-                  <a:lnTo>
-                    <a:pt x="812800" y="0"/>
-                  </a:lnTo>
-                  <a:lnTo>
-                    <a:pt x="812800" y="812800"/>
-                  </a:lnTo>
-                  <a:lnTo>
-                    <a:pt x="0" y="812800"/>
-                  </a:lnTo>
-                  <a:close/>
-                </a:path>
-              </a:pathLst>
-            </a:custGeom>
-            <a:solidFill>
-              <a:srgbClr val="CB74F7">
-                <a:alpha val="10588"/>
-              </a:srgbClr>
-            </a:solidFill>
-            <a:ln>
-              <a:noFill/>
-            </a:ln>
-          </p:spPr>
-        </p:sp>
-        <p:sp>
-          <p:nvSpPr>
-            <p:cNvPr id="86" name="Google Shape;86;p1"/>
-            <p:cNvSpPr txBox="1"/>
-            <p:nvPr/>
-          </p:nvSpPr>
-          <p:spPr>
-            <a:xfrm>
-              <a:off x="0" y="-9525"/>
-              <a:ext cx="812800" cy="822325"/>
-            </a:xfrm>
-            <a:prstGeom prst="rect">
-              <a:avLst/>
-            </a:prstGeom>
-            <a:noFill/>
-            <a:ln>
-              <a:noFill/>
-            </a:ln>
-          </p:spPr>
-          <p:txBody>
-            <a:bodyPr spcFirstLastPara="1" wrap="square" lIns="29875" tIns="29875" rIns="29875" bIns="29875" anchor="ctr" anchorCtr="0">
-              <a:noAutofit/>
-            </a:bodyPr>
-            <a:lstStyle/>
-            <a:p>
-              <a:pPr marL="0" marR="0" lvl="0" indent="0" algn="ctr" rtl="0">
-                <a:lnSpc>
-                  <a:spcPct val="68611"/>
-                </a:lnSpc>
-                <a:spcBef>
-                  <a:spcPts val="0"/>
-                </a:spcBef>
-                <a:spcAft>
-                  <a:spcPts val="0"/>
-                </a:spcAft>
-                <a:buClr>
-                  <a:srgbClr val="000000"/>
-                </a:buClr>
-                <a:buSzPts val="1800"/>
-                <a:buFont typeface="Arial"/>
-                <a:buNone/>
-              </a:pPr>
-              <a:endParaRPr sz="1800" b="0" i="0" u="none" strike="noStrike" cap="none">
-                <a:solidFill>
-                  <a:schemeClr val="dk1"/>
-                </a:solidFill>
-                <a:latin typeface="Calibri"/>
-                <a:ea typeface="Calibri"/>
-                <a:cs typeface="Calibri"/>
-                <a:sym typeface="Calibri"/>
-              </a:endParaRPr>
-            </a:p>
-          </p:txBody>
-        </p:sp>
-      </p:grpSp>
-      <p:grpSp>
-        <p:nvGrpSpPr>
-          <p:cNvPr id="87" name="Google Shape;87;p1"/>
-          <p:cNvGrpSpPr/>
-          <p:nvPr/>
-        </p:nvGrpSpPr>
-        <p:grpSpPr>
-          <a:xfrm rot="-2700000">
-            <a:off x="1292914" y="2202376"/>
-            <a:ext cx="6258649" cy="6331993"/>
-            <a:chOff x="0" y="-9525"/>
-            <a:chExt cx="812800" cy="822325"/>
-          </a:xfrm>
-        </p:grpSpPr>
-        <p:sp>
-          <p:nvSpPr>
-            <p:cNvPr id="88" name="Google Shape;88;p1"/>
-            <p:cNvSpPr/>
-            <p:nvPr/>
-          </p:nvSpPr>
-          <p:spPr>
-            <a:xfrm>
-              <a:off x="0" y="0"/>
-              <a:ext cx="812800" cy="812800"/>
-            </a:xfrm>
-            <a:custGeom>
-              <a:avLst/>
-              <a:gdLst/>
-              <a:ahLst/>
-              <a:cxnLst/>
-              <a:rect l="l" t="t" r="r" b="b"/>
-              <a:pathLst>
-                <a:path w="812800" h="812800" extrusionOk="0">
-                  <a:moveTo>
-                    <a:pt x="0" y="0"/>
-                  </a:moveTo>
-                  <a:lnTo>
-                    <a:pt x="812800" y="0"/>
-                  </a:lnTo>
-                  <a:lnTo>
-                    <a:pt x="812800" y="812800"/>
-                  </a:lnTo>
-                  <a:lnTo>
-                    <a:pt x="0" y="812800"/>
-                  </a:lnTo>
-                  <a:close/>
-                </a:path>
-              </a:pathLst>
-            </a:custGeom>
-            <a:solidFill>
-              <a:srgbClr val="CB74F7">
-                <a:alpha val="8235"/>
-              </a:srgbClr>
-            </a:solidFill>
-            <a:ln>
-              <a:noFill/>
-            </a:ln>
-          </p:spPr>
-        </p:sp>
-        <p:sp>
-          <p:nvSpPr>
-            <p:cNvPr id="89" name="Google Shape;89;p1"/>
-            <p:cNvSpPr txBox="1"/>
-            <p:nvPr/>
-          </p:nvSpPr>
-          <p:spPr>
-            <a:xfrm>
-              <a:off x="0" y="-9525"/>
-              <a:ext cx="812800" cy="822325"/>
-            </a:xfrm>
-            <a:prstGeom prst="rect">
-              <a:avLst/>
-            </a:prstGeom>
-            <a:noFill/>
-            <a:ln>
-              <a:noFill/>
-            </a:ln>
-          </p:spPr>
-          <p:txBody>
-            <a:bodyPr spcFirstLastPara="1" wrap="square" lIns="26950" tIns="26950" rIns="26950" bIns="26950" anchor="ctr" anchorCtr="0">
-              <a:noAutofit/>
-            </a:bodyPr>
-            <a:lstStyle/>
-            <a:p>
-              <a:pPr marL="0" marR="0" lvl="0" indent="0" algn="ctr" rtl="0">
-                <a:lnSpc>
-                  <a:spcPct val="68611"/>
-                </a:lnSpc>
-                <a:spcBef>
-                  <a:spcPts val="0"/>
-                </a:spcBef>
-                <a:spcAft>
-                  <a:spcPts val="0"/>
-                </a:spcAft>
-                <a:buClr>
-                  <a:srgbClr val="000000"/>
-                </a:buClr>
-                <a:buSzPts val="1623"/>
-                <a:buFont typeface="Arial"/>
-                <a:buNone/>
-              </a:pPr>
-              <a:endParaRPr sz="1623" b="0" i="0" u="none" strike="noStrike" cap="none">
-                <a:solidFill>
-                  <a:schemeClr val="dk1"/>
-                </a:solidFill>
-                <a:latin typeface="Calibri"/>
-                <a:ea typeface="Calibri"/>
-                <a:cs typeface="Calibri"/>
-                <a:sym typeface="Calibri"/>
-              </a:endParaRPr>
-            </a:p>
-          </p:txBody>
-        </p:sp>
-      </p:grpSp>
-      <p:grpSp>
-        <p:nvGrpSpPr>
-          <p:cNvPr id="90" name="Google Shape;90;p1"/>
-          <p:cNvGrpSpPr/>
-          <p:nvPr/>
-        </p:nvGrpSpPr>
-        <p:grpSpPr>
-          <a:xfrm rot="-2700000">
-            <a:off x="10206907" y="1061549"/>
-            <a:ext cx="6264627" cy="7439244"/>
-            <a:chOff x="0" y="-152400"/>
-            <a:chExt cx="812800" cy="965200"/>
-          </a:xfrm>
-        </p:grpSpPr>
-        <p:sp>
-          <p:nvSpPr>
-            <p:cNvPr id="91" name="Google Shape;91;p1"/>
-            <p:cNvSpPr/>
-            <p:nvPr/>
-          </p:nvSpPr>
-          <p:spPr>
-            <a:xfrm>
-              <a:off x="0" y="0"/>
-              <a:ext cx="812800" cy="812800"/>
-            </a:xfrm>
-            <a:custGeom>
-              <a:avLst/>
-              <a:gdLst/>
-              <a:ahLst/>
-              <a:cxnLst/>
-              <a:rect l="l" t="t" r="r" b="b"/>
-              <a:pathLst>
-                <a:path w="812800" h="812800" extrusionOk="0">
-                  <a:moveTo>
-                    <a:pt x="0" y="0"/>
-                  </a:moveTo>
-                  <a:lnTo>
-                    <a:pt x="812800" y="0"/>
-                  </a:lnTo>
-                  <a:lnTo>
-                    <a:pt x="812800" y="812800"/>
-                  </a:lnTo>
-                  <a:lnTo>
-                    <a:pt x="0" y="812800"/>
-                  </a:lnTo>
-                  <a:close/>
-                </a:path>
-              </a:pathLst>
-            </a:custGeom>
-            <a:solidFill>
-              <a:srgbClr val="CB74F7">
-                <a:alpha val="9803"/>
-              </a:srgbClr>
-            </a:solidFill>
-            <a:ln>
-              <a:noFill/>
-            </a:ln>
-          </p:spPr>
-        </p:sp>
-        <p:sp>
-          <p:nvSpPr>
-            <p:cNvPr id="92" name="Google Shape;92;p1"/>
-            <p:cNvSpPr txBox="1"/>
-            <p:nvPr/>
-          </p:nvSpPr>
-          <p:spPr>
-            <a:xfrm>
-              <a:off x="0" y="-152400"/>
-              <a:ext cx="812800" cy="965200"/>
-            </a:xfrm>
-            <a:prstGeom prst="rect">
-              <a:avLst/>
-            </a:prstGeom>
-            <a:noFill/>
-            <a:ln>
-              <a:noFill/>
-            </a:ln>
-          </p:spPr>
-          <p:txBody>
-            <a:bodyPr spcFirstLastPara="1" wrap="square" lIns="26975" tIns="26975" rIns="26975" bIns="26975" anchor="ctr" anchorCtr="0">
-              <a:noAutofit/>
-            </a:bodyPr>
-            <a:lstStyle/>
-            <a:p>
-              <a:pPr marL="0" marR="0" lvl="0" indent="0" algn="ctr" rtl="0">
-                <a:lnSpc>
-                  <a:spcPct val="653333"/>
-                </a:lnSpc>
-                <a:spcBef>
-                  <a:spcPts val="0"/>
-                </a:spcBef>
-                <a:spcAft>
-                  <a:spcPts val="0"/>
-                </a:spcAft>
-                <a:buClr>
-                  <a:srgbClr val="000000"/>
-                </a:buClr>
-                <a:buSzPts val="1625"/>
-                <a:buFont typeface="Arial"/>
-                <a:buNone/>
-              </a:pPr>
-              <a:endParaRPr sz="1624" b="0" i="0" u="none" strike="noStrike" cap="none">
-                <a:solidFill>
-                  <a:schemeClr val="dk1"/>
-                </a:solidFill>
-                <a:latin typeface="Calibri"/>
-                <a:ea typeface="Calibri"/>
-                <a:cs typeface="Calibri"/>
-                <a:sym typeface="Calibri"/>
-              </a:endParaRPr>
-            </a:p>
-          </p:txBody>
-        </p:sp>
-      </p:grpSp>
-      <p:grpSp>
-        <p:nvGrpSpPr>
-          <p:cNvPr id="93" name="Google Shape;93;p1"/>
-          <p:cNvGrpSpPr/>
-          <p:nvPr/>
-        </p:nvGrpSpPr>
-        <p:grpSpPr>
-          <a:xfrm rot="-2700000">
-            <a:off x="2447827" y="1776177"/>
-            <a:ext cx="6940602" cy="7021937"/>
-            <a:chOff x="0" y="-9525"/>
-            <a:chExt cx="812800" cy="822325"/>
-          </a:xfrm>
-        </p:grpSpPr>
-        <p:sp>
-          <p:nvSpPr>
-            <p:cNvPr id="94" name="Google Shape;94;p1"/>
-            <p:cNvSpPr/>
-            <p:nvPr/>
-          </p:nvSpPr>
-          <p:spPr>
-            <a:xfrm>
-              <a:off x="0" y="0"/>
-              <a:ext cx="812800" cy="812800"/>
-            </a:xfrm>
-            <a:custGeom>
-              <a:avLst/>
-              <a:gdLst/>
-              <a:ahLst/>
-              <a:cxnLst/>
-              <a:rect l="l" t="t" r="r" b="b"/>
-              <a:pathLst>
-                <a:path w="812800" h="812800" extrusionOk="0">
-                  <a:moveTo>
-                    <a:pt x="0" y="0"/>
-                  </a:moveTo>
-                  <a:lnTo>
-                    <a:pt x="812800" y="0"/>
-                  </a:lnTo>
-                  <a:lnTo>
-                    <a:pt x="812800" y="812800"/>
-                  </a:lnTo>
-                  <a:lnTo>
-                    <a:pt x="0" y="812800"/>
-                  </a:lnTo>
-                  <a:close/>
-                </a:path>
-              </a:pathLst>
-            </a:custGeom>
-            <a:solidFill>
-              <a:srgbClr val="CB74F7">
-                <a:alpha val="9803"/>
-              </a:srgbClr>
-            </a:solidFill>
-            <a:ln>
-              <a:noFill/>
-            </a:ln>
-          </p:spPr>
-        </p:sp>
-        <p:sp>
-          <p:nvSpPr>
-            <p:cNvPr id="95" name="Google Shape;95;p1"/>
-            <p:cNvSpPr txBox="1"/>
-            <p:nvPr/>
-          </p:nvSpPr>
-          <p:spPr>
-            <a:xfrm>
-              <a:off x="0" y="-9525"/>
-              <a:ext cx="812800" cy="822325"/>
-            </a:xfrm>
-            <a:prstGeom prst="rect">
-              <a:avLst/>
-            </a:prstGeom>
-            <a:noFill/>
-            <a:ln>
-              <a:noFill/>
-            </a:ln>
-          </p:spPr>
-          <p:txBody>
-            <a:bodyPr spcFirstLastPara="1" wrap="square" lIns="29875" tIns="29875" rIns="29875" bIns="29875" anchor="ctr" anchorCtr="0">
-              <a:noAutofit/>
-            </a:bodyPr>
-            <a:lstStyle/>
-            <a:p>
-              <a:pPr marL="0" marR="0" lvl="0" indent="0" algn="ctr" rtl="0">
-                <a:lnSpc>
-                  <a:spcPct val="68611"/>
-                </a:lnSpc>
-                <a:spcBef>
-                  <a:spcPts val="0"/>
-                </a:spcBef>
-                <a:spcAft>
-                  <a:spcPts val="0"/>
-                </a:spcAft>
-                <a:buClr>
-                  <a:srgbClr val="000000"/>
-                </a:buClr>
-                <a:buSzPts val="1800"/>
-                <a:buFont typeface="Arial"/>
-                <a:buNone/>
-              </a:pPr>
-              <a:endParaRPr sz="1800" b="0" i="0" u="none" strike="noStrike" cap="none">
-                <a:solidFill>
-                  <a:schemeClr val="dk1"/>
-                </a:solidFill>
-                <a:latin typeface="Calibri"/>
-                <a:ea typeface="Calibri"/>
-                <a:cs typeface="Calibri"/>
-                <a:sym typeface="Calibri"/>
-              </a:endParaRPr>
-            </a:p>
-          </p:txBody>
-        </p:sp>
-      </p:grpSp>
-      <p:sp>
-        <p:nvSpPr>
-          <p:cNvPr id="96" name="Google Shape;96;p1"/>
-          <p:cNvSpPr txBox="1"/>
-          <p:nvPr/>
-        </p:nvSpPr>
-        <p:spPr>
-          <a:xfrm>
-            <a:off x="9423338" y="7155825"/>
-            <a:ext cx="3370" cy="378437"/>
-          </a:xfrm>
-          <a:prstGeom prst="rect">
-            <a:avLst/>
-          </a:prstGeom>
-          <a:noFill/>
-          <a:ln>
-            <a:noFill/>
-          </a:ln>
-        </p:spPr>
-        <p:txBody>
-          <a:bodyPr spcFirstLastPara="1" wrap="square" lIns="0" tIns="0" rIns="0" bIns="0" anchor="t" anchorCtr="0">
-            <a:spAutoFit/>
-          </a:bodyPr>
-          <a:lstStyle/>
-          <a:p>
-            <a:pPr marL="0" marR="0" lvl="0" indent="0" algn="ctr" rtl="0">
-              <a:lnSpc>
-                <a:spcPct val="175333"/>
-              </a:lnSpc>
-              <a:spcBef>
-                <a:spcPts val="0"/>
-              </a:spcBef>
-              <a:spcAft>
-                <a:spcPts val="0"/>
-              </a:spcAft>
-              <a:buClr>
-                <a:srgbClr val="000000"/>
-              </a:buClr>
-              <a:buSzPts val="1800"/>
-              <a:buFont typeface="Arial"/>
-              <a:buNone/>
-            </a:pPr>
-            <a:endParaRPr sz="1800" b="0" i="0" u="none" strike="noStrike" cap="none">
-              <a:solidFill>
-                <a:schemeClr val="dk1"/>
-              </a:solidFill>
-              <a:latin typeface="Calibri"/>
-              <a:ea typeface="Calibri"/>
-              <a:cs typeface="Calibri"/>
-              <a:sym typeface="Calibri"/>
-            </a:endParaRPr>
-          </a:p>
-        </p:txBody>
-      </p:sp>
-      <p:sp>
-        <p:nvSpPr>
-          <p:cNvPr id="97" name="Google Shape;97;p1"/>
-          <p:cNvSpPr txBox="1"/>
-          <p:nvPr/>
-        </p:nvSpPr>
-        <p:spPr>
-          <a:xfrm>
-            <a:off x="4666100" y="1431400"/>
-            <a:ext cx="8777700" cy="339000"/>
-          </a:xfrm>
-          <a:prstGeom prst="rect">
-            <a:avLst/>
-          </a:prstGeom>
-          <a:noFill/>
-          <a:ln>
-            <a:noFill/>
-          </a:ln>
-        </p:spPr>
-        <p:txBody>
-          <a:bodyPr spcFirstLastPara="1" wrap="square" lIns="0" tIns="0" rIns="0" bIns="0" anchor="t" anchorCtr="0">
-            <a:spAutoFit/>
-          </a:bodyPr>
-          <a:lstStyle/>
-          <a:p>
-            <a:pPr marL="0" marR="0" lvl="0" indent="0" algn="ctr" rtl="0">
-              <a:lnSpc>
-                <a:spcPct val="147093"/>
-              </a:lnSpc>
-              <a:spcBef>
-                <a:spcPts val="0"/>
-              </a:spcBef>
-              <a:spcAft>
-                <a:spcPts val="0"/>
-              </a:spcAft>
-              <a:buClr>
-                <a:srgbClr val="000000"/>
-              </a:buClr>
-              <a:buSzPts val="2202"/>
-              <a:buFont typeface="Arial"/>
-              <a:buNone/>
-            </a:pPr>
-            <a:r>
-              <a:rPr lang="en-US" sz="2202" b="1" i="0" u="none" strike="noStrike" cap="none">
-                <a:solidFill>
-                  <a:srgbClr val="050A30"/>
-                </a:solidFill>
-                <a:latin typeface="Arapey"/>
-                <a:ea typeface="Arapey"/>
-                <a:cs typeface="Arapey"/>
-                <a:sym typeface="Arapey"/>
-              </a:rPr>
-              <a:t>(</a:t>
-            </a:r>
-            <a:r>
-              <a:rPr lang="en-US" sz="2202" b="1">
-                <a:solidFill>
-                  <a:srgbClr val="050A30"/>
-                </a:solidFill>
-                <a:latin typeface="Arapey"/>
-                <a:ea typeface="Arapey"/>
-                <a:cs typeface="Arapey"/>
-                <a:sym typeface="Arapey"/>
-              </a:rPr>
-              <a:t>AUTONOMOUS INSTITUTE </a:t>
-            </a:r>
-            <a:r>
-              <a:rPr lang="en-US" sz="2202" b="1" i="0" u="none" strike="noStrike" cap="none">
-                <a:solidFill>
-                  <a:srgbClr val="050A30"/>
-                </a:solidFill>
-                <a:latin typeface="Arapey"/>
-                <a:ea typeface="Arapey"/>
-                <a:cs typeface="Arapey"/>
-                <a:sym typeface="Arapey"/>
-              </a:rPr>
-              <a:t>AFFILIATED TO UNIVERSITY OF MUMBAI)</a:t>
-            </a:r>
-            <a:endParaRPr sz="1400" b="0" i="0" u="none" strike="noStrike" cap="none">
-              <a:solidFill>
-                <a:srgbClr val="000000"/>
-              </a:solidFill>
-              <a:latin typeface="Arial"/>
-              <a:ea typeface="Arial"/>
-              <a:cs typeface="Arial"/>
-              <a:sym typeface="Arial"/>
-            </a:endParaRPr>
-          </a:p>
-        </p:txBody>
-      </p:sp>
-      <p:sp>
-        <p:nvSpPr>
-          <p:cNvPr id="98" name="Google Shape;98;p1"/>
-          <p:cNvSpPr txBox="1"/>
-          <p:nvPr/>
-        </p:nvSpPr>
-        <p:spPr>
-          <a:xfrm>
-            <a:off x="2421012" y="500941"/>
-            <a:ext cx="13445976" cy="417595"/>
-          </a:xfrm>
-          <a:prstGeom prst="rect">
-            <a:avLst/>
-          </a:prstGeom>
-          <a:noFill/>
-          <a:ln>
-            <a:noFill/>
-          </a:ln>
-        </p:spPr>
-        <p:txBody>
-          <a:bodyPr spcFirstLastPara="1" wrap="square" lIns="0" tIns="0" rIns="0" bIns="0" anchor="t" anchorCtr="0">
-            <a:spAutoFit/>
-          </a:bodyPr>
-          <a:lstStyle/>
-          <a:p>
-            <a:pPr marL="0" marR="0" lvl="0" indent="0" algn="ctr" rtl="0">
-              <a:lnSpc>
-                <a:spcPct val="119977"/>
-              </a:lnSpc>
-              <a:spcBef>
-                <a:spcPts val="0"/>
-              </a:spcBef>
-              <a:spcAft>
-                <a:spcPts val="0"/>
-              </a:spcAft>
-              <a:buClr>
-                <a:srgbClr val="000000"/>
-              </a:buClr>
-              <a:buSzPts val="2683"/>
-              <a:buFont typeface="Arial"/>
-              <a:buNone/>
-            </a:pPr>
-            <a:r>
-              <a:rPr lang="en-US" sz="2683" b="1" i="0" u="none" strike="noStrike" cap="none">
-                <a:solidFill>
-                  <a:srgbClr val="050A30"/>
-                </a:solidFill>
-                <a:latin typeface="Alice"/>
-                <a:ea typeface="Alice"/>
-                <a:cs typeface="Alice"/>
-                <a:sym typeface="Alice"/>
-              </a:rPr>
-              <a:t>VIDYAVARDHINI’S COLLEGE OF ENGINEERING AND TECHNOLOGY</a:t>
-            </a:r>
-            <a:endParaRPr sz="1400" b="0" i="0" u="none" strike="noStrike" cap="none">
-              <a:solidFill>
-                <a:srgbClr val="000000"/>
-              </a:solidFill>
-              <a:latin typeface="Arial"/>
-              <a:ea typeface="Arial"/>
-              <a:cs typeface="Arial"/>
-              <a:sym typeface="Arial"/>
-            </a:endParaRPr>
-          </a:p>
-        </p:txBody>
-      </p:sp>
-      <p:sp>
-        <p:nvSpPr>
-          <p:cNvPr id="99" name="Google Shape;99;p1"/>
-          <p:cNvSpPr txBox="1"/>
-          <p:nvPr/>
-        </p:nvSpPr>
-        <p:spPr>
-          <a:xfrm>
-            <a:off x="550153" y="8895925"/>
-            <a:ext cx="3453900" cy="724500"/>
-          </a:xfrm>
-          <a:prstGeom prst="rect">
-            <a:avLst/>
-          </a:prstGeom>
-          <a:noFill/>
-          <a:ln>
-            <a:noFill/>
-          </a:ln>
-        </p:spPr>
-        <p:txBody>
-          <a:bodyPr spcFirstLastPara="1" wrap="square" lIns="0" tIns="0" rIns="0" bIns="0" anchor="t" anchorCtr="0">
-            <a:spAutoFit/>
-          </a:bodyPr>
-          <a:lstStyle/>
-          <a:p>
-            <a:pPr marL="0" marR="0" lvl="0" indent="0" algn="ctr" rtl="0">
-              <a:lnSpc>
-                <a:spcPct val="120009"/>
-              </a:lnSpc>
-              <a:spcBef>
-                <a:spcPts val="0"/>
-              </a:spcBef>
-              <a:spcAft>
-                <a:spcPts val="0"/>
-              </a:spcAft>
-              <a:buClr>
-                <a:srgbClr val="000000"/>
-              </a:buClr>
-              <a:buSzPts val="2139"/>
-              <a:buFont typeface="Arial"/>
-              <a:buNone/>
-            </a:pPr>
-            <a:r>
-              <a:rPr lang="en-US" sz="2139" b="1" i="0" u="none" strike="noStrike" cap="none">
-                <a:solidFill>
-                  <a:srgbClr val="050A30"/>
-                </a:solidFill>
-                <a:latin typeface="Anonymous Pro"/>
-                <a:ea typeface="Anonymous Pro"/>
-                <a:cs typeface="Anonymous Pro"/>
-                <a:sym typeface="Anonymous Pro"/>
-              </a:rPr>
-              <a:t>IN ASSOCIATION </a:t>
-            </a:r>
-            <a:endParaRPr sz="1400" b="0" i="0" u="none" strike="noStrike" cap="none">
-              <a:solidFill>
-                <a:srgbClr val="000000"/>
-              </a:solidFill>
-              <a:latin typeface="Arial"/>
-              <a:ea typeface="Arial"/>
-              <a:cs typeface="Arial"/>
-              <a:sym typeface="Arial"/>
-            </a:endParaRPr>
-          </a:p>
-          <a:p>
-            <a:pPr marL="0" marR="0" lvl="0" indent="0" algn="ctr" rtl="0">
-              <a:lnSpc>
-                <a:spcPct val="120009"/>
-              </a:lnSpc>
-              <a:spcBef>
-                <a:spcPts val="0"/>
-              </a:spcBef>
-              <a:spcAft>
-                <a:spcPts val="0"/>
-              </a:spcAft>
-              <a:buClr>
-                <a:srgbClr val="000000"/>
-              </a:buClr>
-              <a:buSzPts val="2139"/>
-              <a:buFont typeface="Arial"/>
-              <a:buNone/>
-            </a:pPr>
-            <a:r>
-              <a:rPr lang="en-US" sz="2139" b="1" i="0" u="none" strike="noStrike" cap="none">
-                <a:solidFill>
-                  <a:srgbClr val="050A30"/>
-                </a:solidFill>
-                <a:latin typeface="Anonymous Pro"/>
-                <a:ea typeface="Anonymous Pro"/>
-                <a:cs typeface="Anonymous Pro"/>
-                <a:sym typeface="Anonymous Pro"/>
-              </a:rPr>
-              <a:t>WITH </a:t>
-            </a:r>
-            <a:r>
-              <a:rPr lang="en-US" sz="2139" b="1">
-                <a:solidFill>
-                  <a:srgbClr val="050A30"/>
-                </a:solidFill>
-                <a:latin typeface="Anonymous Pro"/>
-                <a:ea typeface="Anonymous Pro"/>
-                <a:cs typeface="Anonymous Pro"/>
-                <a:sym typeface="Anonymous Pro"/>
-              </a:rPr>
-              <a:t>STUDENT CHAPTERS :</a:t>
-            </a:r>
-            <a:endParaRPr sz="1400" b="0" i="0" u="none" strike="noStrike" cap="none">
-              <a:solidFill>
-                <a:srgbClr val="000000"/>
-              </a:solidFill>
-              <a:latin typeface="Arial"/>
-              <a:ea typeface="Arial"/>
-              <a:cs typeface="Arial"/>
-              <a:sym typeface="Arial"/>
-            </a:endParaRPr>
-          </a:p>
-        </p:txBody>
-      </p:sp>
-      <p:sp>
-        <p:nvSpPr>
-          <p:cNvPr id="100" name="Google Shape;100;p1"/>
-          <p:cNvSpPr txBox="1"/>
-          <p:nvPr/>
-        </p:nvSpPr>
-        <p:spPr>
-          <a:xfrm>
-            <a:off x="406276" y="9706968"/>
-            <a:ext cx="2908500" cy="257100"/>
-          </a:xfrm>
-          <a:prstGeom prst="rect">
-            <a:avLst/>
-          </a:prstGeom>
-          <a:noFill/>
-          <a:ln>
-            <a:noFill/>
-          </a:ln>
-        </p:spPr>
-        <p:txBody>
-          <a:bodyPr spcFirstLastPara="1" wrap="square" lIns="0" tIns="0" rIns="0" bIns="0" anchor="t" anchorCtr="0">
-            <a:spAutoFit/>
-          </a:bodyPr>
-          <a:lstStyle/>
-          <a:p>
-            <a:pPr marL="0" marR="0" lvl="0" indent="0" algn="just" rtl="0">
-              <a:lnSpc>
-                <a:spcPct val="120059"/>
-              </a:lnSpc>
-              <a:spcBef>
-                <a:spcPts val="0"/>
-              </a:spcBef>
-              <a:spcAft>
-                <a:spcPts val="0"/>
-              </a:spcAft>
-              <a:buClr>
-                <a:srgbClr val="000000"/>
-              </a:buClr>
-              <a:buSzPts val="1670"/>
-              <a:buFont typeface="Arial"/>
-              <a:buNone/>
-            </a:pPr>
-            <a:r>
-              <a:rPr lang="en-US" sz="1670" b="1" i="0" u="none" strike="noStrike" cap="none">
-                <a:solidFill>
-                  <a:srgbClr val="050A30"/>
-                </a:solidFill>
-                <a:latin typeface="Arial"/>
-                <a:ea typeface="Arial"/>
-                <a:cs typeface="Arial"/>
-                <a:sym typeface="Arial"/>
-              </a:rPr>
-              <a:t>www.vcet.edu.in/VNPS202</a:t>
-            </a:r>
-            <a:r>
-              <a:rPr lang="en-US" sz="1670" b="1">
-                <a:solidFill>
-                  <a:srgbClr val="050A30"/>
-                </a:solidFill>
-              </a:rPr>
-              <a:t>6</a:t>
-            </a:r>
-            <a:endParaRPr sz="1400" b="0" i="0" u="none" strike="noStrike" cap="none">
-              <a:solidFill>
-                <a:srgbClr val="000000"/>
-              </a:solidFill>
-              <a:latin typeface="Arial"/>
-              <a:ea typeface="Arial"/>
-              <a:cs typeface="Arial"/>
-              <a:sym typeface="Arial"/>
-            </a:endParaRPr>
-          </a:p>
-        </p:txBody>
-      </p:sp>
-      <p:sp>
-        <p:nvSpPr>
-          <p:cNvPr id="101" name="Google Shape;101;p1"/>
-          <p:cNvSpPr/>
-          <p:nvPr/>
-        </p:nvSpPr>
-        <p:spPr>
-          <a:xfrm>
-            <a:off x="12532081" y="8653175"/>
-            <a:ext cx="1138542" cy="1119874"/>
-          </a:xfrm>
-          <a:custGeom>
-            <a:avLst/>
-            <a:gdLst/>
-            <a:ahLst/>
-            <a:cxnLst/>
-            <a:rect l="l" t="t" r="r" b="b"/>
-            <a:pathLst>
-              <a:path w="1138542" h="1119874" extrusionOk="0">
-                <a:moveTo>
-                  <a:pt x="0" y="0"/>
-                </a:moveTo>
-                <a:lnTo>
-                  <a:pt x="1138542" y="0"/>
-                </a:lnTo>
-                <a:lnTo>
-                  <a:pt x="1138542" y="1119874"/>
-                </a:lnTo>
-                <a:lnTo>
-                  <a:pt x="0" y="1119874"/>
-                </a:lnTo>
-                <a:lnTo>
-                  <a:pt x="0" y="0"/>
-                </a:lnTo>
-                <a:close/>
-              </a:path>
-            </a:pathLst>
-          </a:custGeom>
-          <a:blipFill rotWithShape="1">
-            <a:blip r:embed="rId3">
-              <a:alphaModFix/>
-            </a:blip>
-            <a:stretch>
-              <a:fillRect t="-830" b="-830"/>
-            </a:stretch>
-          </a:blipFill>
-          <a:ln>
-            <a:noFill/>
-          </a:ln>
-        </p:spPr>
-      </p:sp>
-      <p:sp>
-        <p:nvSpPr>
-          <p:cNvPr id="102" name="Google Shape;102;p1"/>
-          <p:cNvSpPr/>
-          <p:nvPr/>
-        </p:nvSpPr>
-        <p:spPr>
-          <a:xfrm>
-            <a:off x="10888086" y="8568422"/>
-            <a:ext cx="1163153" cy="1147690"/>
-          </a:xfrm>
-          <a:custGeom>
-            <a:avLst/>
-            <a:gdLst/>
-            <a:ahLst/>
-            <a:cxnLst/>
-            <a:rect l="l" t="t" r="r" b="b"/>
-            <a:pathLst>
-              <a:path w="1163153" h="1147690" extrusionOk="0">
-                <a:moveTo>
-                  <a:pt x="0" y="0"/>
-                </a:moveTo>
-                <a:lnTo>
-                  <a:pt x="1163153" y="0"/>
-                </a:lnTo>
-                <a:lnTo>
-                  <a:pt x="1163153" y="1147690"/>
-                </a:lnTo>
-                <a:lnTo>
-                  <a:pt x="0" y="1147690"/>
-                </a:lnTo>
-                <a:lnTo>
-                  <a:pt x="0" y="0"/>
-                </a:lnTo>
-                <a:close/>
-              </a:path>
-            </a:pathLst>
-          </a:custGeom>
-          <a:blipFill rotWithShape="1">
-            <a:blip r:embed="rId4">
-              <a:alphaModFix/>
-            </a:blip>
-            <a:stretch>
-              <a:fillRect t="-832" b="-831"/>
-            </a:stretch>
-          </a:blipFill>
-          <a:ln>
-            <a:noFill/>
-          </a:ln>
-        </p:spPr>
-      </p:sp>
-      <p:sp>
-        <p:nvSpPr>
-          <p:cNvPr id="103" name="Google Shape;103;p1"/>
-          <p:cNvSpPr/>
-          <p:nvPr/>
-        </p:nvSpPr>
-        <p:spPr>
-          <a:xfrm>
-            <a:off x="4080748" y="8568422"/>
-            <a:ext cx="1145726" cy="1123441"/>
-          </a:xfrm>
-          <a:custGeom>
-            <a:avLst/>
-            <a:gdLst/>
-            <a:ahLst/>
-            <a:cxnLst/>
-            <a:rect l="l" t="t" r="r" b="b"/>
-            <a:pathLst>
-              <a:path w="1145726" h="1123441" extrusionOk="0">
-                <a:moveTo>
-                  <a:pt x="0" y="0"/>
-                </a:moveTo>
-                <a:lnTo>
-                  <a:pt x="1145726" y="0"/>
-                </a:lnTo>
-                <a:lnTo>
-                  <a:pt x="1145726" y="1123441"/>
-                </a:lnTo>
-                <a:lnTo>
-                  <a:pt x="0" y="1123441"/>
-                </a:lnTo>
-                <a:lnTo>
-                  <a:pt x="0" y="0"/>
-                </a:lnTo>
-                <a:close/>
-              </a:path>
-            </a:pathLst>
-          </a:custGeom>
-          <a:blipFill rotWithShape="1">
-            <a:blip r:embed="rId5">
-              <a:alphaModFix/>
-            </a:blip>
-            <a:stretch>
-              <a:fillRect t="-832" b="-831"/>
-            </a:stretch>
-          </a:blipFill>
-          <a:ln>
-            <a:noFill/>
-          </a:ln>
-        </p:spPr>
-      </p:sp>
-      <p:sp>
-        <p:nvSpPr>
-          <p:cNvPr id="104" name="Google Shape;104;p1"/>
-          <p:cNvSpPr/>
-          <p:nvPr/>
-        </p:nvSpPr>
-        <p:spPr>
-          <a:xfrm>
-            <a:off x="5624887" y="8653175"/>
-            <a:ext cx="2289993" cy="827499"/>
-          </a:xfrm>
-          <a:custGeom>
-            <a:avLst/>
-            <a:gdLst/>
-            <a:ahLst/>
-            <a:cxnLst/>
-            <a:rect l="l" t="t" r="r" b="b"/>
-            <a:pathLst>
-              <a:path w="2289993" h="827499" extrusionOk="0">
-                <a:moveTo>
-                  <a:pt x="0" y="0"/>
-                </a:moveTo>
-                <a:lnTo>
-                  <a:pt x="2289994" y="0"/>
-                </a:lnTo>
-                <a:lnTo>
-                  <a:pt x="2289994" y="827499"/>
-                </a:lnTo>
-                <a:lnTo>
-                  <a:pt x="0" y="827499"/>
-                </a:lnTo>
-                <a:lnTo>
-                  <a:pt x="0" y="0"/>
-                </a:lnTo>
-                <a:close/>
-              </a:path>
-            </a:pathLst>
-          </a:custGeom>
-          <a:blipFill rotWithShape="1">
-            <a:blip r:embed="rId6">
-              <a:alphaModFix/>
-            </a:blip>
-            <a:stretch>
-              <a:fillRect l="-2689" r="-5210"/>
-            </a:stretch>
-          </a:blipFill>
-          <a:ln>
-            <a:noFill/>
-          </a:ln>
-        </p:spPr>
-      </p:sp>
-      <p:sp>
-        <p:nvSpPr>
-          <p:cNvPr id="105" name="Google Shape;105;p1"/>
-          <p:cNvSpPr/>
-          <p:nvPr/>
-        </p:nvSpPr>
-        <p:spPr>
-          <a:xfrm>
-            <a:off x="8362885" y="8653175"/>
-            <a:ext cx="2103914" cy="1185715"/>
-          </a:xfrm>
-          <a:custGeom>
-            <a:avLst/>
-            <a:gdLst/>
-            <a:ahLst/>
-            <a:cxnLst/>
-            <a:rect l="l" t="t" r="r" b="b"/>
-            <a:pathLst>
-              <a:path w="2103914" h="1185715" extrusionOk="0">
-                <a:moveTo>
-                  <a:pt x="0" y="0"/>
-                </a:moveTo>
-                <a:lnTo>
-                  <a:pt x="2103914" y="0"/>
-                </a:lnTo>
-                <a:lnTo>
-                  <a:pt x="2103914" y="1185715"/>
-                </a:lnTo>
-                <a:lnTo>
-                  <a:pt x="0" y="1185715"/>
-                </a:lnTo>
-                <a:lnTo>
-                  <a:pt x="0" y="0"/>
-                </a:lnTo>
-                <a:close/>
-              </a:path>
-            </a:pathLst>
-          </a:custGeom>
-          <a:blipFill rotWithShape="1">
-            <a:blip r:embed="rId7">
-              <a:alphaModFix/>
-            </a:blip>
-            <a:stretch>
-              <a:fillRect l="-156109" t="-142067" r="-157217" b="-181267"/>
-            </a:stretch>
-          </a:blipFill>
-          <a:ln>
-            <a:noFill/>
-          </a:ln>
-        </p:spPr>
-      </p:sp>
-      <p:sp>
-        <p:nvSpPr>
-          <p:cNvPr id="106" name="Google Shape;106;p1"/>
-          <p:cNvSpPr/>
-          <p:nvPr/>
-        </p:nvSpPr>
-        <p:spPr>
-          <a:xfrm>
-            <a:off x="16014069" y="8498177"/>
-            <a:ext cx="1146632" cy="1127831"/>
-          </a:xfrm>
-          <a:custGeom>
-            <a:avLst/>
-            <a:gdLst/>
-            <a:ahLst/>
-            <a:cxnLst/>
-            <a:rect l="l" t="t" r="r" b="b"/>
-            <a:pathLst>
-              <a:path w="1146632" h="1127831" extrusionOk="0">
-                <a:moveTo>
-                  <a:pt x="0" y="0"/>
-                </a:moveTo>
-                <a:lnTo>
-                  <a:pt x="1146632" y="0"/>
-                </a:lnTo>
-                <a:lnTo>
-                  <a:pt x="1146632" y="1127831"/>
-                </a:lnTo>
-                <a:lnTo>
-                  <a:pt x="0" y="1127831"/>
-                </a:lnTo>
-                <a:lnTo>
-                  <a:pt x="0" y="0"/>
-                </a:lnTo>
-                <a:close/>
-              </a:path>
-            </a:pathLst>
-          </a:custGeom>
-          <a:blipFill rotWithShape="1">
-            <a:blip r:embed="rId8">
-              <a:alphaModFix/>
-            </a:blip>
-            <a:stretch>
-              <a:fillRect t="-832" b="-831"/>
-            </a:stretch>
-          </a:blipFill>
-          <a:ln>
-            <a:noFill/>
-          </a:ln>
-        </p:spPr>
-      </p:sp>
-      <p:sp>
-        <p:nvSpPr>
-          <p:cNvPr id="107" name="Google Shape;107;p1"/>
-          <p:cNvSpPr txBox="1"/>
-          <p:nvPr/>
-        </p:nvSpPr>
-        <p:spPr>
-          <a:xfrm>
-            <a:off x="14332753" y="9902719"/>
-            <a:ext cx="1192110" cy="266700"/>
-          </a:xfrm>
-          <a:prstGeom prst="rect">
-            <a:avLst/>
-          </a:prstGeom>
-          <a:noFill/>
-          <a:ln>
-            <a:noFill/>
-          </a:ln>
-        </p:spPr>
-        <p:txBody>
-          <a:bodyPr spcFirstLastPara="1" wrap="square" lIns="0" tIns="0" rIns="0" bIns="0" anchor="t" anchorCtr="0">
-            <a:spAutoFit/>
-          </a:bodyPr>
-          <a:lstStyle/>
-          <a:p>
-            <a:pPr marL="0" marR="0" lvl="0" indent="0" algn="ctr" rtl="0">
-              <a:lnSpc>
-                <a:spcPct val="120000"/>
-              </a:lnSpc>
-              <a:spcBef>
-                <a:spcPts val="0"/>
-              </a:spcBef>
-              <a:spcAft>
-                <a:spcPts val="0"/>
-              </a:spcAft>
-              <a:buClr>
-                <a:srgbClr val="000000"/>
-              </a:buClr>
-              <a:buSzPts val="1800"/>
-              <a:buFont typeface="Arial"/>
-              <a:buNone/>
-            </a:pPr>
-            <a:r>
-              <a:rPr lang="en-US" sz="1800" b="1" i="0" u="none" strike="noStrike" cap="none">
-                <a:solidFill>
-                  <a:srgbClr val="050A30"/>
-                </a:solidFill>
-                <a:latin typeface="Arial"/>
-                <a:ea typeface="Arial"/>
-                <a:cs typeface="Arial"/>
-                <a:sym typeface="Arial"/>
-              </a:rPr>
-              <a:t>VCET - SC</a:t>
-            </a:r>
-            <a:endParaRPr sz="1400" b="0" i="0" u="none" strike="noStrike" cap="none">
-              <a:solidFill>
-                <a:srgbClr val="000000"/>
-              </a:solidFill>
-              <a:latin typeface="Arial"/>
-              <a:ea typeface="Arial"/>
-              <a:cs typeface="Arial"/>
-              <a:sym typeface="Arial"/>
-            </a:endParaRPr>
-          </a:p>
-        </p:txBody>
-      </p:sp>
-      <p:sp>
-        <p:nvSpPr>
-          <p:cNvPr id="108" name="Google Shape;108;p1"/>
-          <p:cNvSpPr txBox="1"/>
-          <p:nvPr/>
-        </p:nvSpPr>
-        <p:spPr>
-          <a:xfrm>
-            <a:off x="10878818" y="9863202"/>
-            <a:ext cx="1251939" cy="266700"/>
-          </a:xfrm>
-          <a:prstGeom prst="rect">
-            <a:avLst/>
-          </a:prstGeom>
-          <a:noFill/>
-          <a:ln>
-            <a:noFill/>
-          </a:ln>
-        </p:spPr>
-        <p:txBody>
-          <a:bodyPr spcFirstLastPara="1" wrap="square" lIns="0" tIns="0" rIns="0" bIns="0" anchor="t" anchorCtr="0">
-            <a:spAutoFit/>
-          </a:bodyPr>
-          <a:lstStyle/>
-          <a:p>
-            <a:pPr marL="0" marR="0" lvl="0" indent="0" algn="ctr" rtl="0">
-              <a:lnSpc>
-                <a:spcPct val="120000"/>
-              </a:lnSpc>
-              <a:spcBef>
-                <a:spcPts val="0"/>
-              </a:spcBef>
-              <a:spcAft>
-                <a:spcPts val="0"/>
-              </a:spcAft>
-              <a:buClr>
-                <a:srgbClr val="000000"/>
-              </a:buClr>
-              <a:buSzPts val="1800"/>
-              <a:buFont typeface="Arial"/>
-              <a:buNone/>
-            </a:pPr>
-            <a:r>
-              <a:rPr lang="en-US" sz="1800" b="1" i="0" u="none" strike="noStrike" cap="none">
-                <a:solidFill>
-                  <a:srgbClr val="050A30"/>
-                </a:solidFill>
-                <a:latin typeface="Arial"/>
-                <a:ea typeface="Arial"/>
-                <a:cs typeface="Arial"/>
-                <a:sym typeface="Arial"/>
-              </a:rPr>
-              <a:t>VCET - SF</a:t>
-            </a:r>
-            <a:endParaRPr sz="1400" b="0" i="0" u="none" strike="noStrike" cap="none">
-              <a:solidFill>
-                <a:srgbClr val="000000"/>
-              </a:solidFill>
-              <a:latin typeface="Arial"/>
-              <a:ea typeface="Arial"/>
-              <a:cs typeface="Arial"/>
-              <a:sym typeface="Arial"/>
-            </a:endParaRPr>
-          </a:p>
-        </p:txBody>
-      </p:sp>
-      <p:sp>
-        <p:nvSpPr>
-          <p:cNvPr id="109" name="Google Shape;109;p1"/>
-          <p:cNvSpPr txBox="1"/>
-          <p:nvPr/>
-        </p:nvSpPr>
-        <p:spPr>
-          <a:xfrm>
-            <a:off x="12532081" y="9892865"/>
-            <a:ext cx="1263600" cy="266700"/>
-          </a:xfrm>
-          <a:prstGeom prst="rect">
-            <a:avLst/>
-          </a:prstGeom>
-          <a:noFill/>
-          <a:ln>
-            <a:noFill/>
-          </a:ln>
-        </p:spPr>
-        <p:txBody>
-          <a:bodyPr spcFirstLastPara="1" wrap="square" lIns="0" tIns="0" rIns="0" bIns="0" anchor="t" anchorCtr="0">
-            <a:spAutoFit/>
-          </a:bodyPr>
-          <a:lstStyle/>
-          <a:p>
-            <a:pPr marL="0" marR="0" lvl="0" indent="0" algn="ctr" rtl="0">
-              <a:lnSpc>
-                <a:spcPct val="120000"/>
-              </a:lnSpc>
-              <a:spcBef>
-                <a:spcPts val="0"/>
-              </a:spcBef>
-              <a:spcAft>
-                <a:spcPts val="0"/>
-              </a:spcAft>
-              <a:buClr>
-                <a:srgbClr val="000000"/>
-              </a:buClr>
-              <a:buSzPts val="1800"/>
-              <a:buFont typeface="Arial"/>
-              <a:buNone/>
-            </a:pPr>
-            <a:r>
-              <a:rPr lang="en-US" sz="1800" b="1" i="0" u="none" strike="noStrike" cap="none">
-                <a:solidFill>
-                  <a:srgbClr val="050A30"/>
-                </a:solidFill>
-                <a:latin typeface="Arial"/>
-                <a:ea typeface="Arial"/>
-                <a:cs typeface="Arial"/>
-                <a:sym typeface="Arial"/>
-              </a:rPr>
-              <a:t>VCET - SC</a:t>
-            </a:r>
-            <a:endParaRPr sz="1400" b="0" i="0" u="none" strike="noStrike" cap="none">
-              <a:solidFill>
-                <a:srgbClr val="000000"/>
-              </a:solidFill>
-              <a:latin typeface="Arial"/>
-              <a:ea typeface="Arial"/>
-              <a:cs typeface="Arial"/>
-              <a:sym typeface="Arial"/>
-            </a:endParaRPr>
-          </a:p>
-        </p:txBody>
-      </p:sp>
-      <p:sp>
-        <p:nvSpPr>
-          <p:cNvPr id="110" name="Google Shape;110;p1"/>
-          <p:cNvSpPr txBox="1"/>
-          <p:nvPr/>
-        </p:nvSpPr>
-        <p:spPr>
-          <a:xfrm>
-            <a:off x="6410791" y="9863202"/>
-            <a:ext cx="1264995" cy="266700"/>
-          </a:xfrm>
-          <a:prstGeom prst="rect">
-            <a:avLst/>
-          </a:prstGeom>
-          <a:noFill/>
-          <a:ln>
-            <a:noFill/>
-          </a:ln>
-        </p:spPr>
-        <p:txBody>
-          <a:bodyPr spcFirstLastPara="1" wrap="square" lIns="0" tIns="0" rIns="0" bIns="0" anchor="t" anchorCtr="0">
-            <a:spAutoFit/>
-          </a:bodyPr>
-          <a:lstStyle/>
-          <a:p>
-            <a:pPr marL="0" marR="0" lvl="0" indent="0" algn="ctr" rtl="0">
-              <a:lnSpc>
-                <a:spcPct val="120000"/>
-              </a:lnSpc>
-              <a:spcBef>
-                <a:spcPts val="0"/>
-              </a:spcBef>
-              <a:spcAft>
-                <a:spcPts val="0"/>
-              </a:spcAft>
-              <a:buClr>
-                <a:srgbClr val="000000"/>
-              </a:buClr>
-              <a:buSzPts val="1800"/>
-              <a:buFont typeface="Arial"/>
-              <a:buNone/>
-            </a:pPr>
-            <a:r>
-              <a:rPr lang="en-US" sz="1800" b="1" i="0" u="none" strike="noStrike" cap="none">
-                <a:solidFill>
-                  <a:srgbClr val="050A30"/>
-                </a:solidFill>
-                <a:latin typeface="Arial"/>
-                <a:ea typeface="Arial"/>
-                <a:cs typeface="Arial"/>
-                <a:sym typeface="Arial"/>
-              </a:rPr>
-              <a:t>VCET - SC</a:t>
-            </a:r>
-            <a:endParaRPr sz="1400" b="0" i="0" u="none" strike="noStrike" cap="none">
-              <a:solidFill>
-                <a:srgbClr val="000000"/>
-              </a:solidFill>
-              <a:latin typeface="Arial"/>
-              <a:ea typeface="Arial"/>
-              <a:cs typeface="Arial"/>
-              <a:sym typeface="Arial"/>
-            </a:endParaRPr>
-          </a:p>
-        </p:txBody>
-      </p:sp>
-      <p:sp>
-        <p:nvSpPr>
-          <p:cNvPr id="111" name="Google Shape;111;p1"/>
-          <p:cNvSpPr txBox="1"/>
-          <p:nvPr/>
-        </p:nvSpPr>
-        <p:spPr>
-          <a:xfrm>
-            <a:off x="4071452" y="9892865"/>
-            <a:ext cx="1274415" cy="266700"/>
-          </a:xfrm>
-          <a:prstGeom prst="rect">
-            <a:avLst/>
-          </a:prstGeom>
-          <a:noFill/>
-          <a:ln>
-            <a:noFill/>
-          </a:ln>
-        </p:spPr>
-        <p:txBody>
-          <a:bodyPr spcFirstLastPara="1" wrap="square" lIns="0" tIns="0" rIns="0" bIns="0" anchor="t" anchorCtr="0">
-            <a:spAutoFit/>
-          </a:bodyPr>
-          <a:lstStyle/>
-          <a:p>
-            <a:pPr marL="0" marR="0" lvl="0" indent="0" algn="ctr" rtl="0">
-              <a:lnSpc>
-                <a:spcPct val="120000"/>
-              </a:lnSpc>
-              <a:spcBef>
-                <a:spcPts val="0"/>
-              </a:spcBef>
-              <a:spcAft>
-                <a:spcPts val="0"/>
-              </a:spcAft>
-              <a:buClr>
-                <a:srgbClr val="000000"/>
-              </a:buClr>
-              <a:buSzPts val="1800"/>
-              <a:buFont typeface="Arial"/>
-              <a:buNone/>
-            </a:pPr>
-            <a:r>
-              <a:rPr lang="en-US" sz="1800" b="1" i="0" u="none" strike="noStrike" cap="none">
-                <a:solidFill>
-                  <a:srgbClr val="050A30"/>
-                </a:solidFill>
-                <a:latin typeface="Arial"/>
-                <a:ea typeface="Arial"/>
-                <a:cs typeface="Arial"/>
-                <a:sym typeface="Arial"/>
-              </a:rPr>
-              <a:t>VCET - SB</a:t>
-            </a:r>
-            <a:endParaRPr sz="1400" b="0" i="0" u="none" strike="noStrike" cap="none">
-              <a:solidFill>
-                <a:srgbClr val="000000"/>
-              </a:solidFill>
-              <a:latin typeface="Arial"/>
-              <a:ea typeface="Arial"/>
-              <a:cs typeface="Arial"/>
-              <a:sym typeface="Arial"/>
-            </a:endParaRPr>
-          </a:p>
-        </p:txBody>
-      </p:sp>
-      <p:sp>
-        <p:nvSpPr>
-          <p:cNvPr id="112" name="Google Shape;112;p1"/>
-          <p:cNvSpPr txBox="1"/>
-          <p:nvPr/>
-        </p:nvSpPr>
-        <p:spPr>
-          <a:xfrm>
-            <a:off x="16032854" y="9863202"/>
-            <a:ext cx="1226446" cy="266700"/>
-          </a:xfrm>
-          <a:prstGeom prst="rect">
-            <a:avLst/>
-          </a:prstGeom>
-          <a:noFill/>
-          <a:ln>
-            <a:noFill/>
-          </a:ln>
-        </p:spPr>
-        <p:txBody>
-          <a:bodyPr spcFirstLastPara="1" wrap="square" lIns="0" tIns="0" rIns="0" bIns="0" anchor="t" anchorCtr="0">
-            <a:spAutoFit/>
-          </a:bodyPr>
-          <a:lstStyle/>
-          <a:p>
-            <a:pPr marL="0" marR="0" lvl="0" indent="0" algn="ctr" rtl="0">
-              <a:lnSpc>
-                <a:spcPct val="120000"/>
-              </a:lnSpc>
-              <a:spcBef>
-                <a:spcPts val="0"/>
-              </a:spcBef>
-              <a:spcAft>
-                <a:spcPts val="0"/>
-              </a:spcAft>
-              <a:buClr>
-                <a:srgbClr val="000000"/>
-              </a:buClr>
-              <a:buSzPts val="1800"/>
-              <a:buFont typeface="Arial"/>
-              <a:buNone/>
-            </a:pPr>
-            <a:r>
-              <a:rPr lang="en-US" sz="1800" b="1" i="0" u="none" strike="noStrike" cap="none">
-                <a:solidFill>
-                  <a:srgbClr val="050A30"/>
-                </a:solidFill>
-                <a:latin typeface="Arial"/>
-                <a:ea typeface="Arial"/>
-                <a:cs typeface="Arial"/>
-                <a:sym typeface="Arial"/>
-              </a:rPr>
-              <a:t>VCET - SB</a:t>
-            </a:r>
-            <a:endParaRPr sz="1400" b="0" i="0" u="none" strike="noStrike" cap="none">
-              <a:solidFill>
-                <a:srgbClr val="000000"/>
-              </a:solidFill>
-              <a:latin typeface="Arial"/>
-              <a:ea typeface="Arial"/>
-              <a:cs typeface="Arial"/>
-              <a:sym typeface="Arial"/>
-            </a:endParaRPr>
-          </a:p>
-        </p:txBody>
-      </p:sp>
-      <p:sp>
-        <p:nvSpPr>
-          <p:cNvPr id="113" name="Google Shape;113;p1"/>
-          <p:cNvSpPr txBox="1"/>
-          <p:nvPr/>
-        </p:nvSpPr>
-        <p:spPr>
-          <a:xfrm>
-            <a:off x="8893397" y="9863202"/>
-            <a:ext cx="1263511" cy="266700"/>
-          </a:xfrm>
-          <a:prstGeom prst="rect">
-            <a:avLst/>
-          </a:prstGeom>
-          <a:noFill/>
-          <a:ln>
-            <a:noFill/>
-          </a:ln>
-        </p:spPr>
-        <p:txBody>
-          <a:bodyPr spcFirstLastPara="1" wrap="square" lIns="0" tIns="0" rIns="0" bIns="0" anchor="t" anchorCtr="0">
-            <a:spAutoFit/>
-          </a:bodyPr>
-          <a:lstStyle/>
-          <a:p>
-            <a:pPr marL="0" marR="0" lvl="0" indent="0" algn="ctr" rtl="0">
-              <a:lnSpc>
-                <a:spcPct val="120000"/>
-              </a:lnSpc>
-              <a:spcBef>
-                <a:spcPts val="0"/>
-              </a:spcBef>
-              <a:spcAft>
-                <a:spcPts val="0"/>
-              </a:spcAft>
-              <a:buClr>
-                <a:srgbClr val="000000"/>
-              </a:buClr>
-              <a:buSzPts val="1800"/>
-              <a:buFont typeface="Arial"/>
-              <a:buNone/>
-            </a:pPr>
-            <a:r>
-              <a:rPr lang="en-US" sz="1800" b="1" i="0" u="none" strike="noStrike" cap="none">
-                <a:solidFill>
-                  <a:srgbClr val="050A30"/>
-                </a:solidFill>
-                <a:latin typeface="Arial"/>
-                <a:ea typeface="Arial"/>
-                <a:cs typeface="Arial"/>
-                <a:sym typeface="Arial"/>
-              </a:rPr>
-              <a:t>VCET - SC</a:t>
-            </a:r>
-            <a:endParaRPr sz="1400" b="0" i="0" u="none" strike="noStrike" cap="none">
-              <a:solidFill>
-                <a:srgbClr val="000000"/>
-              </a:solidFill>
-              <a:latin typeface="Arial"/>
-              <a:ea typeface="Arial"/>
-              <a:cs typeface="Arial"/>
-              <a:sym typeface="Arial"/>
-            </a:endParaRPr>
-          </a:p>
-        </p:txBody>
-      </p:sp>
-      <p:sp>
-        <p:nvSpPr>
-          <p:cNvPr id="114" name="Google Shape;114;p1"/>
-          <p:cNvSpPr/>
-          <p:nvPr/>
-        </p:nvSpPr>
-        <p:spPr>
-          <a:xfrm>
-            <a:off x="8039899" y="2470719"/>
-            <a:ext cx="2208203" cy="2417112"/>
-          </a:xfrm>
-          <a:custGeom>
-            <a:avLst/>
-            <a:gdLst/>
-            <a:ahLst/>
-            <a:cxnLst/>
-            <a:rect l="l" t="t" r="r" b="b"/>
-            <a:pathLst>
-              <a:path w="2208203" h="2417112" extrusionOk="0">
-                <a:moveTo>
-                  <a:pt x="0" y="0"/>
-                </a:moveTo>
-                <a:lnTo>
-                  <a:pt x="2208202" y="0"/>
-                </a:lnTo>
-                <a:lnTo>
-                  <a:pt x="2208202" y="2417112"/>
-                </a:lnTo>
-                <a:lnTo>
-                  <a:pt x="0" y="2417112"/>
-                </a:lnTo>
-                <a:lnTo>
-                  <a:pt x="0" y="0"/>
-                </a:lnTo>
-                <a:close/>
-              </a:path>
-            </a:pathLst>
-          </a:custGeom>
-          <a:blipFill rotWithShape="1">
-            <a:blip r:embed="rId9">
-              <a:alphaModFix/>
-            </a:blip>
-            <a:stretch>
-              <a:fillRect t="-832" b="-831"/>
-            </a:stretch>
-          </a:blipFill>
-          <a:ln>
-            <a:noFill/>
-          </a:ln>
-        </p:spPr>
-      </p:sp>
-      <p:sp>
-        <p:nvSpPr>
-          <p:cNvPr id="115" name="Google Shape;115;p1"/>
-          <p:cNvSpPr txBox="1"/>
-          <p:nvPr/>
-        </p:nvSpPr>
-        <p:spPr>
-          <a:xfrm>
-            <a:off x="3750369" y="5133975"/>
-            <a:ext cx="11090400" cy="1451400"/>
-          </a:xfrm>
-          <a:prstGeom prst="rect">
-            <a:avLst/>
-          </a:prstGeom>
-          <a:noFill/>
-          <a:ln>
-            <a:noFill/>
-          </a:ln>
-        </p:spPr>
-        <p:txBody>
-          <a:bodyPr spcFirstLastPara="1" wrap="square" lIns="0" tIns="0" rIns="0" bIns="0" anchor="t" anchorCtr="0">
-            <a:spAutoFit/>
-          </a:bodyPr>
-          <a:lstStyle/>
-          <a:p>
-            <a:pPr marL="0" marR="0" lvl="0" indent="0" algn="ctr" rtl="0">
-              <a:lnSpc>
-                <a:spcPct val="120000"/>
-              </a:lnSpc>
-              <a:spcBef>
-                <a:spcPts val="0"/>
-              </a:spcBef>
-              <a:spcAft>
-                <a:spcPts val="0"/>
-              </a:spcAft>
-              <a:buClr>
-                <a:srgbClr val="000000"/>
-              </a:buClr>
-              <a:buSzPts val="9430"/>
-              <a:buFont typeface="Arial"/>
-              <a:buNone/>
-            </a:pPr>
-            <a:r>
-              <a:rPr lang="en-US" sz="9430" b="0" i="0" u="none" strike="noStrike" cap="none">
-                <a:solidFill>
-                  <a:srgbClr val="000000"/>
-                </a:solidFill>
-                <a:latin typeface="NTR"/>
-                <a:ea typeface="NTR"/>
-                <a:cs typeface="NTR"/>
-                <a:sym typeface="NTR"/>
-              </a:rPr>
-              <a:t>OS</a:t>
-            </a:r>
-            <a:r>
-              <a:rPr lang="en-US" sz="9430">
-                <a:latin typeface="NTR"/>
-                <a:ea typeface="NTR"/>
-                <a:cs typeface="NTR"/>
-                <a:sym typeface="NTR"/>
-              </a:rPr>
-              <a:t>C</a:t>
-            </a:r>
-            <a:r>
-              <a:rPr lang="en-US" sz="9430" b="0" i="0" u="none" strike="noStrike" cap="none">
-                <a:solidFill>
-                  <a:srgbClr val="000000"/>
-                </a:solidFill>
-                <a:latin typeface="NTR"/>
-                <a:ea typeface="NTR"/>
-                <a:cs typeface="NTR"/>
-                <a:sym typeface="NTR"/>
-              </a:rPr>
-              <a:t>ILLATION</a:t>
-            </a:r>
-            <a:r>
-              <a:rPr lang="en-US" sz="9430">
-                <a:latin typeface="NTR"/>
-                <a:ea typeface="NTR"/>
-                <a:cs typeface="NTR"/>
-                <a:sym typeface="NTR"/>
-              </a:rPr>
-              <a:t>S</a:t>
-            </a:r>
-            <a:r>
-              <a:rPr lang="en-US" sz="9430" b="0" i="0" u="none" strike="noStrike" cap="none">
-                <a:solidFill>
-                  <a:srgbClr val="000000"/>
-                </a:solidFill>
-                <a:latin typeface="NTR"/>
-                <a:ea typeface="NTR"/>
-                <a:cs typeface="NTR"/>
-                <a:sym typeface="NTR"/>
-              </a:rPr>
-              <a:t>’2</a:t>
-            </a:r>
-            <a:r>
-              <a:rPr lang="en-US" sz="9430">
-                <a:latin typeface="NTR"/>
-                <a:ea typeface="NTR"/>
-                <a:cs typeface="NTR"/>
-                <a:sym typeface="NTR"/>
-              </a:rPr>
-              <a:t>6</a:t>
-            </a:r>
-            <a:endParaRPr sz="1400" b="0" i="0" u="none" strike="noStrike" cap="none">
-              <a:solidFill>
-                <a:srgbClr val="000000"/>
-              </a:solidFill>
-              <a:latin typeface="Arial"/>
-              <a:ea typeface="Arial"/>
-              <a:cs typeface="Arial"/>
-              <a:sym typeface="Arial"/>
-            </a:endParaRPr>
-          </a:p>
-        </p:txBody>
-      </p:sp>
-      <p:sp>
-        <p:nvSpPr>
-          <p:cNvPr id="116" name="Google Shape;116;p1"/>
-          <p:cNvSpPr/>
-          <p:nvPr/>
-        </p:nvSpPr>
-        <p:spPr>
-          <a:xfrm>
-            <a:off x="1006232" y="206854"/>
-            <a:ext cx="1713069" cy="1643692"/>
-          </a:xfrm>
-          <a:custGeom>
-            <a:avLst/>
-            <a:gdLst/>
-            <a:ahLst/>
-            <a:cxnLst/>
-            <a:rect l="l" t="t" r="r" b="b"/>
-            <a:pathLst>
-              <a:path w="1713069" h="1643692" extrusionOk="0">
-                <a:moveTo>
-                  <a:pt x="0" y="0"/>
-                </a:moveTo>
-                <a:lnTo>
-                  <a:pt x="1713068" y="0"/>
-                </a:lnTo>
-                <a:lnTo>
-                  <a:pt x="1713068" y="1643692"/>
-                </a:lnTo>
-                <a:lnTo>
-                  <a:pt x="0" y="1643692"/>
-                </a:lnTo>
-                <a:lnTo>
-                  <a:pt x="0" y="0"/>
-                </a:lnTo>
-                <a:close/>
-              </a:path>
-            </a:pathLst>
-          </a:custGeom>
-          <a:blipFill rotWithShape="1">
-            <a:blip r:embed="rId10">
-              <a:alphaModFix/>
-            </a:blip>
-            <a:stretch>
-              <a:fillRect/>
-            </a:stretch>
-          </a:blipFill>
-          <a:ln>
-            <a:noFill/>
-          </a:ln>
-        </p:spPr>
-      </p:sp>
-      <p:sp>
-        <p:nvSpPr>
-          <p:cNvPr id="117" name="Google Shape;117;p1"/>
-          <p:cNvSpPr txBox="1"/>
-          <p:nvPr/>
-        </p:nvSpPr>
-        <p:spPr>
-          <a:xfrm>
-            <a:off x="3075510" y="994736"/>
-            <a:ext cx="11596200" cy="409500"/>
-          </a:xfrm>
-          <a:prstGeom prst="rect">
-            <a:avLst/>
-          </a:prstGeom>
-          <a:noFill/>
-          <a:ln>
-            <a:noFill/>
-          </a:ln>
-        </p:spPr>
-        <p:txBody>
-          <a:bodyPr spcFirstLastPara="1" wrap="square" lIns="0" tIns="0" rIns="0" bIns="0" anchor="t" anchorCtr="0">
-            <a:spAutoFit/>
-          </a:bodyPr>
-          <a:lstStyle/>
-          <a:p>
-            <a:pPr marL="0" marR="0" lvl="0" indent="0" algn="ctr" rtl="0">
-              <a:lnSpc>
-                <a:spcPct val="120008"/>
-              </a:lnSpc>
-              <a:spcBef>
-                <a:spcPts val="0"/>
-              </a:spcBef>
-              <a:spcAft>
-                <a:spcPts val="0"/>
-              </a:spcAft>
-              <a:buClr>
-                <a:srgbClr val="000000"/>
-              </a:buClr>
-              <a:buSzPts val="2399"/>
-              <a:buFont typeface="Arial"/>
-              <a:buNone/>
-            </a:pPr>
-            <a:r>
-              <a:rPr lang="en-US" sz="2399" b="1" i="0" u="none" strike="noStrike" cap="none">
-                <a:solidFill>
-                  <a:srgbClr val="050A30"/>
-                </a:solidFill>
-                <a:latin typeface="Times"/>
-                <a:ea typeface="Times"/>
-                <a:cs typeface="Times"/>
-                <a:sym typeface="Times"/>
-              </a:rPr>
-              <a:t>(NBA &amp; NAAC Accredited)</a:t>
-            </a:r>
-            <a:endParaRPr sz="1400" b="0" i="0" u="none" strike="noStrike" cap="none">
-              <a:solidFill>
-                <a:srgbClr val="000000"/>
-              </a:solidFill>
-              <a:latin typeface="Arial"/>
-              <a:ea typeface="Arial"/>
-              <a:cs typeface="Arial"/>
-              <a:sym typeface="Arial"/>
-            </a:endParaRPr>
-          </a:p>
-        </p:txBody>
-      </p:sp>
-      <p:sp>
-        <p:nvSpPr>
-          <p:cNvPr id="118" name="Google Shape;118;p1"/>
-          <p:cNvSpPr/>
-          <p:nvPr/>
-        </p:nvSpPr>
-        <p:spPr>
-          <a:xfrm>
-            <a:off x="15524864" y="306959"/>
-            <a:ext cx="2432363" cy="1349047"/>
-          </a:xfrm>
-          <a:custGeom>
-            <a:avLst/>
-            <a:gdLst/>
-            <a:ahLst/>
-            <a:cxnLst/>
-            <a:rect l="l" t="t" r="r" b="b"/>
-            <a:pathLst>
-              <a:path w="2432363" h="1349047" extrusionOk="0">
-                <a:moveTo>
-                  <a:pt x="0" y="0"/>
-                </a:moveTo>
-                <a:lnTo>
-                  <a:pt x="2432363" y="0"/>
-                </a:lnTo>
-                <a:lnTo>
-                  <a:pt x="2432363" y="1349047"/>
-                </a:lnTo>
-                <a:lnTo>
-                  <a:pt x="0" y="1349047"/>
-                </a:lnTo>
-                <a:lnTo>
-                  <a:pt x="0" y="0"/>
-                </a:lnTo>
-                <a:close/>
-              </a:path>
-            </a:pathLst>
-          </a:custGeom>
-          <a:blipFill rotWithShape="1">
-            <a:blip r:embed="rId11">
-              <a:alphaModFix amt="85000"/>
-            </a:blip>
-            <a:stretch>
-              <a:fillRect t="-483" b="-482"/>
-            </a:stretch>
-          </a:blipFill>
-          <a:ln>
-            <a:noFill/>
-          </a:ln>
-        </p:spPr>
-      </p:sp>
-      <p:pic>
-        <p:nvPicPr>
-          <p:cNvPr id="119" name="Google Shape;119;p1" title="image-removebg-preview (7).png"/>
-          <p:cNvPicPr preferRelativeResize="0"/>
-          <p:nvPr/>
-        </p:nvPicPr>
-        <p:blipFill>
-          <a:blip r:embed="rId12">
-            <a:alphaModFix/>
-          </a:blip>
-          <a:stretch>
-            <a:fillRect/>
-          </a:stretch>
-        </p:blipFill>
-        <p:spPr>
-          <a:xfrm>
-            <a:off x="14016069" y="8780009"/>
-            <a:ext cx="1652563" cy="724500"/>
-          </a:xfrm>
-          <a:prstGeom prst="rect">
-            <a:avLst/>
-          </a:prstGeom>
-          <a:noFill/>
-          <a:ln>
-            <a:noFill/>
-          </a:ln>
-        </p:spPr>
-      </p:pic>
-    </p:spTree>
-  </p:cSld>
-  <p:clrMapOvr>
-    <a:masterClrMapping/>
-  </p:clrMapOvr>
-</p:sld>
-</file>
-
-<file path=ppt/slides/slide10.xml><?xml version="1.0" encoding="utf-8"?>
-<p:sld xmlns:a="http://schemas.openxmlformats.org/drawingml/2006/main" xmlns:r="http://schemas.openxmlformats.org/officeDocument/2006/relationships" xmlns:p="http://schemas.openxmlformats.org/presentationml/2006/main">
-  <p:cSld>
-    <p:bg>
-      <p:bgPr>
-        <a:solidFill>
-          <a:srgbClr val="F4EDFB"/>
-        </a:solidFill>
-        <a:effectLst/>
-      </p:bgPr>
-    </p:bg>
-    <p:spTree>
-      <p:nvGrpSpPr>
-        <p:cNvPr id="1" name="Shape 315"/>
+        <p:cNvPr id="1" name="Shape 123"/>
         <p:cNvGrpSpPr/>
         <p:nvPr/>
       </p:nvGrpSpPr>
@@ -17292,13 +15215,13 @@
       </p:grpSpPr>
       <p:sp>
         <p:nvSpPr>
-          <p:cNvPr id="316" name="Google Shape;316;p9"/>
+          <p:cNvPr id="124" name="Google Shape;124;p2"/>
           <p:cNvSpPr/>
           <p:nvPr/>
         </p:nvSpPr>
         <p:spPr>
           <a:xfrm rot="-5400000">
-            <a:off x="10693624" y="-3524350"/>
+            <a:off x="2915845" y="6786337"/>
             <a:ext cx="4729037" cy="7048700"/>
           </a:xfrm>
           <a:custGeom>
@@ -17343,14 +15266,14 @@
       </p:sp>
       <p:sp>
         <p:nvSpPr>
-          <p:cNvPr id="317" name="Google Shape;317;p9"/>
+          <p:cNvPr id="126" name="Google Shape;126;p2"/>
           <p:cNvSpPr/>
           <p:nvPr/>
         </p:nvSpPr>
         <p:spPr>
-          <a:xfrm rot="-5400000">
-            <a:off x="2915845" y="6786337"/>
-            <a:ext cx="4729037" cy="7048700"/>
+          <a:xfrm>
+            <a:off x="1028700" y="1028700"/>
+            <a:ext cx="16230707" cy="8229655"/>
           </a:xfrm>
           <a:custGeom>
             <a:avLst/>
@@ -17359,18 +15282,228 @@
             <a:cxnLst/>
             <a:rect l="l" t="t" r="r" b="b"/>
             <a:pathLst>
-              <a:path w="4729037" h="7048700" extrusionOk="0">
+              <a:path w="4274726" h="2167467" extrusionOk="0">
+                <a:moveTo>
+                  <a:pt x="24327" y="0"/>
+                </a:moveTo>
+                <a:lnTo>
+                  <a:pt x="4250399" y="0"/>
+                </a:lnTo>
+                <a:cubicBezTo>
+                  <a:pt x="4263834" y="0"/>
+                  <a:pt x="4274726" y="10891"/>
+                  <a:pt x="4274726" y="24327"/>
+                </a:cubicBezTo>
+                <a:lnTo>
+                  <a:pt x="4274726" y="2143140"/>
+                </a:lnTo>
+                <a:cubicBezTo>
+                  <a:pt x="4274726" y="2156575"/>
+                  <a:pt x="4263834" y="2167467"/>
+                  <a:pt x="4250399" y="2167467"/>
+                </a:cubicBezTo>
+                <a:lnTo>
+                  <a:pt x="24327" y="2167467"/>
+                </a:lnTo>
+                <a:cubicBezTo>
+                  <a:pt x="10891" y="2167467"/>
+                  <a:pt x="0" y="2156575"/>
+                  <a:pt x="0" y="2143140"/>
+                </a:cubicBezTo>
+                <a:lnTo>
+                  <a:pt x="0" y="24327"/>
+                </a:lnTo>
+                <a:cubicBezTo>
+                  <a:pt x="0" y="10891"/>
+                  <a:pt x="10891" y="0"/>
+                  <a:pt x="24327" y="0"/>
+                </a:cubicBezTo>
+                <a:close/>
+              </a:path>
+            </a:pathLst>
+          </a:custGeom>
+          <a:solidFill>
+            <a:srgbClr val="FDFBFF"/>
+          </a:solidFill>
+          <a:ln>
+            <a:noFill/>
+          </a:ln>
+        </p:spPr>
+        <p:txBody>
+          <a:bodyPr spcFirstLastPara="1" wrap="square" lIns="91425" tIns="91425" rIns="91425" bIns="91425" anchor="ctr" anchorCtr="0">
+            <a:noAutofit/>
+          </a:bodyPr>
+          <a:lstStyle/>
+          <a:p>
+            <a:pPr marL="0" marR="0" lvl="0" indent="0" algn="l" rtl="0">
+              <a:lnSpc>
+                <a:spcPct val="100000"/>
+              </a:lnSpc>
+              <a:spcBef>
+                <a:spcPts val="0"/>
+              </a:spcBef>
+              <a:spcAft>
+                <a:spcPts val="0"/>
+              </a:spcAft>
+              <a:buClr>
+                <a:srgbClr val="000000"/>
+              </a:buClr>
+              <a:buSzPts val="1400"/>
+              <a:buFont typeface="Arial"/>
+              <a:buNone/>
+            </a:pPr>
+            <a:endParaRPr sz="1400" b="0" i="0" u="none" strike="noStrike" cap="none">
+              <a:solidFill>
+                <a:srgbClr val="000000"/>
+              </a:solidFill>
+              <a:latin typeface="Arial"/>
+              <a:ea typeface="Arial"/>
+              <a:cs typeface="Arial"/>
+              <a:sym typeface="Arial"/>
+            </a:endParaRPr>
+          </a:p>
+        </p:txBody>
+      </p:sp>
+      <p:sp>
+        <p:nvSpPr>
+          <p:cNvPr id="127" name="Google Shape;127;p2"/>
+          <p:cNvSpPr txBox="1"/>
+          <p:nvPr/>
+        </p:nvSpPr>
+        <p:spPr>
+          <a:xfrm>
+            <a:off x="1028700" y="739376"/>
+            <a:ext cx="16230707" cy="8518979"/>
+          </a:xfrm>
+          <a:prstGeom prst="rect">
+            <a:avLst/>
+          </a:prstGeom>
+          <a:noFill/>
+          <a:ln>
+            <a:noFill/>
+          </a:ln>
+        </p:spPr>
+        <p:txBody>
+          <a:bodyPr spcFirstLastPara="1" wrap="square" lIns="50800" tIns="50800" rIns="50800" bIns="50800" anchor="ctr" anchorCtr="0">
+            <a:noAutofit/>
+          </a:bodyPr>
+          <a:lstStyle/>
+          <a:p>
+            <a:pPr marL="0" marR="0" lvl="0" indent="0" algn="ctr" rtl="0">
+              <a:lnSpc>
+                <a:spcPct val="147722"/>
+              </a:lnSpc>
+              <a:spcBef>
+                <a:spcPts val="0"/>
+              </a:spcBef>
+              <a:spcAft>
+                <a:spcPts val="0"/>
+              </a:spcAft>
+              <a:buClr>
+                <a:srgbClr val="000000"/>
+              </a:buClr>
+              <a:buSzPts val="1800"/>
+              <a:buFont typeface="Arial"/>
+              <a:buNone/>
+            </a:pPr>
+            <a:endParaRPr sz="1800" b="0" i="0" u="none" strike="noStrike" cap="none" dirty="0">
+              <a:solidFill>
+                <a:schemeClr val="dk1"/>
+              </a:solidFill>
+              <a:latin typeface="Calibri"/>
+              <a:ea typeface="Calibri"/>
+              <a:cs typeface="Calibri"/>
+              <a:sym typeface="Calibri"/>
+            </a:endParaRPr>
+          </a:p>
+          <a:p>
+            <a:pPr marL="0" marR="0" lvl="0" indent="0" algn="ctr" rtl="0">
+              <a:lnSpc>
+                <a:spcPct val="147722"/>
+              </a:lnSpc>
+              <a:spcBef>
+                <a:spcPts val="0"/>
+              </a:spcBef>
+              <a:spcAft>
+                <a:spcPts val="0"/>
+              </a:spcAft>
+              <a:buClr>
+                <a:srgbClr val="000000"/>
+              </a:buClr>
+              <a:buSzPts val="1800"/>
+              <a:buFont typeface="Arial"/>
+              <a:buNone/>
+            </a:pPr>
+            <a:endParaRPr sz="1800" b="0" i="0" u="none" strike="noStrike" cap="none" dirty="0">
+              <a:solidFill>
+                <a:schemeClr val="dk1"/>
+              </a:solidFill>
+              <a:latin typeface="Calibri"/>
+              <a:ea typeface="Calibri"/>
+              <a:cs typeface="Calibri"/>
+              <a:sym typeface="Calibri"/>
+            </a:endParaRPr>
+          </a:p>
+          <a:p>
+            <a:pPr marL="0" marR="0" lvl="0" indent="0" algn="ctr" rtl="0">
+              <a:lnSpc>
+                <a:spcPct val="147722"/>
+              </a:lnSpc>
+              <a:spcBef>
+                <a:spcPts val="0"/>
+              </a:spcBef>
+              <a:spcAft>
+                <a:spcPts val="0"/>
+              </a:spcAft>
+              <a:buClr>
+                <a:srgbClr val="000000"/>
+              </a:buClr>
+              <a:buSzPts val="1800"/>
+              <a:buFont typeface="Arial"/>
+              <a:buNone/>
+            </a:pPr>
+            <a:endParaRPr sz="1800" b="0" i="0" u="none" strike="noStrike" cap="none" dirty="0">
+              <a:solidFill>
+                <a:schemeClr val="dk1"/>
+              </a:solidFill>
+              <a:latin typeface="Calibri"/>
+              <a:ea typeface="Calibri"/>
+              <a:cs typeface="Calibri"/>
+              <a:sym typeface="Calibri"/>
+            </a:endParaRPr>
+          </a:p>
+        </p:txBody>
+      </p:sp>
+      <p:sp>
+        <p:nvSpPr>
+          <p:cNvPr id="128" name="Google Shape;128;p2"/>
+          <p:cNvSpPr/>
+          <p:nvPr/>
+        </p:nvSpPr>
+        <p:spPr>
+          <a:xfrm>
+            <a:off x="14083144" y="8450319"/>
+            <a:ext cx="2448843" cy="405172"/>
+          </a:xfrm>
+          <a:custGeom>
+            <a:avLst/>
+            <a:gdLst/>
+            <a:ahLst/>
+            <a:cxnLst/>
+            <a:rect l="l" t="t" r="r" b="b"/>
+            <a:pathLst>
+              <a:path w="2448843" h="405172" extrusionOk="0">
                 <a:moveTo>
                   <a:pt x="0" y="0"/>
                 </a:moveTo>
                 <a:lnTo>
-                  <a:pt x="4729037" y="0"/>
-                </a:lnTo>
-                <a:lnTo>
-                  <a:pt x="4729037" y="7048700"/>
-                </a:lnTo>
-                <a:lnTo>
-                  <a:pt x="0" y="7048700"/>
+                  <a:pt x="2448843" y="0"/>
+                </a:lnTo>
+                <a:lnTo>
+                  <a:pt x="2448843" y="405172"/>
+                </a:lnTo>
+                <a:lnTo>
+                  <a:pt x="0" y="405172"/>
                 </a:lnTo>
                 <a:lnTo>
                   <a:pt x="0" y="0"/>
@@ -17380,8 +15513,8 @@
             </a:pathLst>
           </a:custGeom>
           <a:blipFill rotWithShape="1">
-            <a:blip r:embed="rId3">
-              <a:alphaModFix amt="17000"/>
+            <a:blip r:embed="rId4">
+              <a:alphaModFix/>
             </a:blip>
             <a:stretch>
               <a:fillRect/>
@@ -17394,28 +15527,28 @@
       </p:sp>
       <p:grpSp>
         <p:nvGrpSpPr>
-          <p:cNvPr id="318" name="Google Shape;318;p9"/>
+          <p:cNvPr id="129" name="Google Shape;129;p2"/>
           <p:cNvGrpSpPr/>
           <p:nvPr/>
         </p:nvGrpSpPr>
         <p:grpSpPr>
           <a:xfrm>
-            <a:off x="1028700" y="739378"/>
-            <a:ext cx="16230600" cy="8518922"/>
+            <a:off x="4832658" y="2539782"/>
+            <a:ext cx="8282841" cy="1972834"/>
             <a:chOff x="0" y="-76200"/>
-            <a:chExt cx="4274726" cy="2243667"/>
+            <a:chExt cx="2092276" cy="405540"/>
           </a:xfrm>
         </p:grpSpPr>
         <p:sp>
           <p:nvSpPr>
-            <p:cNvPr id="319" name="Google Shape;319;p9"/>
+            <p:cNvPr id="130" name="Google Shape;130;p2"/>
             <p:cNvSpPr/>
             <p:nvPr/>
           </p:nvSpPr>
           <p:spPr>
             <a:xfrm>
               <a:off x="0" y="0"/>
-              <a:ext cx="4274726" cy="2167467"/>
+              <a:ext cx="2092276" cy="329340"/>
             </a:xfrm>
             <a:custGeom>
               <a:avLst/>
@@ -17424,98 +15557,41 @@
               <a:cxnLst/>
               <a:rect l="l" t="t" r="r" b="b"/>
               <a:pathLst>
-                <a:path w="4274726" h="2167467" extrusionOk="0">
+                <a:path w="2092276" h="329340" extrusionOk="0">
                   <a:moveTo>
-                    <a:pt x="24327" y="0"/>
+                    <a:pt x="0" y="0"/>
                   </a:moveTo>
                   <a:lnTo>
-                    <a:pt x="4250399" y="0"/>
+                    <a:pt x="2092276" y="0"/>
                   </a:lnTo>
-                  <a:cubicBezTo>
-                    <a:pt x="4263834" y="0"/>
-                    <a:pt x="4274726" y="10891"/>
-                    <a:pt x="4274726" y="24327"/>
-                  </a:cubicBezTo>
                   <a:lnTo>
-                    <a:pt x="4274726" y="2143140"/>
+                    <a:pt x="2092276" y="329340"/>
                   </a:lnTo>
-                  <a:cubicBezTo>
-                    <a:pt x="4274726" y="2156575"/>
-                    <a:pt x="4263834" y="2167467"/>
-                    <a:pt x="4250399" y="2167467"/>
-                  </a:cubicBezTo>
                   <a:lnTo>
-                    <a:pt x="24327" y="2167467"/>
+                    <a:pt x="0" y="329340"/>
                   </a:lnTo>
-                  <a:cubicBezTo>
-                    <a:pt x="10891" y="2167467"/>
-                    <a:pt x="0" y="2156575"/>
-                    <a:pt x="0" y="2143140"/>
-                  </a:cubicBezTo>
-                  <a:lnTo>
-                    <a:pt x="0" y="24327"/>
-                  </a:lnTo>
-                  <a:cubicBezTo>
-                    <a:pt x="0" y="10891"/>
-                    <a:pt x="10891" y="0"/>
-                    <a:pt x="24327" y="0"/>
-                  </a:cubicBezTo>
                   <a:close/>
                 </a:path>
               </a:pathLst>
             </a:custGeom>
             <a:solidFill>
-              <a:srgbClr val="FDFBFF"/>
+              <a:srgbClr val="EAD6FF"/>
             </a:solidFill>
             <a:ln>
               <a:noFill/>
             </a:ln>
           </p:spPr>
-          <p:txBody>
-            <a:bodyPr spcFirstLastPara="1" wrap="square" lIns="91425" tIns="91425" rIns="91425" bIns="91425" anchor="ctr" anchorCtr="0">
-              <a:noAutofit/>
-            </a:bodyPr>
-            <a:lstStyle/>
-            <a:p>
-              <a:pPr marL="0" marR="0" lvl="0" indent="0" algn="l" rtl="0">
-                <a:lnSpc>
-                  <a:spcPct val="100000"/>
-                </a:lnSpc>
-                <a:spcBef>
-                  <a:spcPts val="0"/>
-                </a:spcBef>
-                <a:spcAft>
-                  <a:spcPts val="0"/>
-                </a:spcAft>
-                <a:buClr>
-                  <a:srgbClr val="000000"/>
-                </a:buClr>
-                <a:buSzPts val="1400"/>
-                <a:buFont typeface="Arial"/>
-                <a:buNone/>
-              </a:pPr>
-              <a:endParaRPr sz="1400" b="0" i="0" u="none" strike="noStrike" cap="none">
-                <a:solidFill>
-                  <a:srgbClr val="000000"/>
-                </a:solidFill>
-                <a:latin typeface="Arial"/>
-                <a:ea typeface="Arial"/>
-                <a:cs typeface="Arial"/>
-                <a:sym typeface="Arial"/>
-              </a:endParaRPr>
-            </a:p>
-          </p:txBody>
         </p:sp>
         <p:sp>
           <p:nvSpPr>
-            <p:cNvPr id="320" name="Google Shape;320;p9"/>
+            <p:cNvPr id="131" name="Google Shape;131;p2"/>
             <p:cNvSpPr txBox="1"/>
             <p:nvPr/>
           </p:nvSpPr>
           <p:spPr>
             <a:xfrm>
               <a:off x="0" y="-76200"/>
-              <a:ext cx="4274726" cy="2243667"/>
+              <a:ext cx="2092276" cy="405540"/>
             </a:xfrm>
             <a:prstGeom prst="rect">
               <a:avLst/>
@@ -17548,7 +15624,7 @@
                 <a:buFont typeface="Arial"/>
                 <a:buNone/>
               </a:pPr>
-              <a:endParaRPr sz="1800" b="0" i="0" u="none" strike="noStrike" cap="none">
+              <a:endParaRPr sz="1800" b="0" i="0" u="none" strike="noStrike" cap="none" dirty="0">
                 <a:solidFill>
                   <a:schemeClr val="dk1"/>
                 </a:solidFill>
@@ -17563,450 +15639,14 @@
       </p:grpSp>
       <p:sp>
         <p:nvSpPr>
-          <p:cNvPr id="321" name="Google Shape;321;p9"/>
-          <p:cNvSpPr/>
-          <p:nvPr/>
-        </p:nvSpPr>
-        <p:spPr>
-          <a:xfrm>
-            <a:off x="1756013" y="1534701"/>
-            <a:ext cx="2448843" cy="405172"/>
-          </a:xfrm>
-          <a:custGeom>
-            <a:avLst/>
-            <a:gdLst/>
-            <a:ahLst/>
-            <a:cxnLst/>
-            <a:rect l="l" t="t" r="r" b="b"/>
-            <a:pathLst>
-              <a:path w="2448843" h="405172" extrusionOk="0">
-                <a:moveTo>
-                  <a:pt x="0" y="0"/>
-                </a:moveTo>
-                <a:lnTo>
-                  <a:pt x="2448843" y="0"/>
-                </a:lnTo>
-                <a:lnTo>
-                  <a:pt x="2448843" y="405172"/>
-                </a:lnTo>
-                <a:lnTo>
-                  <a:pt x="0" y="405172"/>
-                </a:lnTo>
-                <a:lnTo>
-                  <a:pt x="0" y="0"/>
-                </a:lnTo>
-                <a:close/>
-              </a:path>
-            </a:pathLst>
-          </a:custGeom>
-          <a:blipFill rotWithShape="1">
-            <a:blip r:embed="rId4">
-              <a:alphaModFix/>
-            </a:blip>
-            <a:stretch>
-              <a:fillRect/>
-            </a:stretch>
-          </a:blipFill>
-          <a:ln>
-            <a:noFill/>
-          </a:ln>
-        </p:spPr>
-      </p:sp>
-      <p:sp>
-        <p:nvSpPr>
-          <p:cNvPr id="322" name="Google Shape;322;p9"/>
-          <p:cNvSpPr/>
-          <p:nvPr/>
-        </p:nvSpPr>
-        <p:spPr>
-          <a:xfrm>
-            <a:off x="14083144" y="8450319"/>
-            <a:ext cx="2448843" cy="405172"/>
-          </a:xfrm>
-          <a:custGeom>
-            <a:avLst/>
-            <a:gdLst/>
-            <a:ahLst/>
-            <a:cxnLst/>
-            <a:rect l="l" t="t" r="r" b="b"/>
-            <a:pathLst>
-              <a:path w="2448843" h="405172" extrusionOk="0">
-                <a:moveTo>
-                  <a:pt x="0" y="0"/>
-                </a:moveTo>
-                <a:lnTo>
-                  <a:pt x="2448843" y="0"/>
-                </a:lnTo>
-                <a:lnTo>
-                  <a:pt x="2448843" y="405172"/>
-                </a:lnTo>
-                <a:lnTo>
-                  <a:pt x="0" y="405172"/>
-                </a:lnTo>
-                <a:lnTo>
-                  <a:pt x="0" y="0"/>
-                </a:lnTo>
-                <a:close/>
-              </a:path>
-            </a:pathLst>
-          </a:custGeom>
-          <a:blipFill rotWithShape="1">
-            <a:blip r:embed="rId4">
-              <a:alphaModFix/>
-            </a:blip>
-            <a:stretch>
-              <a:fillRect/>
-            </a:stretch>
-          </a:blipFill>
-          <a:ln>
-            <a:noFill/>
-          </a:ln>
-        </p:spPr>
-      </p:sp>
-      <p:sp>
-        <p:nvSpPr>
-          <p:cNvPr id="323" name="Google Shape;323;p9"/>
-          <p:cNvSpPr/>
-          <p:nvPr/>
-        </p:nvSpPr>
-        <p:spPr>
-          <a:xfrm rot="-5400000">
-            <a:off x="16076374" y="-2482323"/>
-            <a:ext cx="4423252" cy="6592923"/>
-          </a:xfrm>
-          <a:custGeom>
-            <a:avLst/>
-            <a:gdLst/>
-            <a:ahLst/>
-            <a:cxnLst/>
-            <a:rect l="l" t="t" r="r" b="b"/>
-            <a:pathLst>
-              <a:path w="4423252" h="6592923" extrusionOk="0">
-                <a:moveTo>
-                  <a:pt x="0" y="0"/>
-                </a:moveTo>
-                <a:lnTo>
-                  <a:pt x="4423252" y="0"/>
-                </a:lnTo>
-                <a:lnTo>
-                  <a:pt x="4423252" y="6592922"/>
-                </a:lnTo>
-                <a:lnTo>
-                  <a:pt x="0" y="6592922"/>
-                </a:lnTo>
-                <a:lnTo>
-                  <a:pt x="0" y="0"/>
-                </a:lnTo>
-                <a:close/>
-              </a:path>
-            </a:pathLst>
-          </a:custGeom>
-          <a:blipFill rotWithShape="1">
-            <a:blip r:embed="rId3">
-              <a:alphaModFix/>
-            </a:blip>
-            <a:stretch>
-              <a:fillRect/>
-            </a:stretch>
-          </a:blipFill>
-          <a:ln>
-            <a:noFill/>
-          </a:ln>
-        </p:spPr>
-      </p:sp>
-      <p:sp>
-        <p:nvSpPr>
-          <p:cNvPr id="324" name="Google Shape;324;p9"/>
-          <p:cNvSpPr/>
-          <p:nvPr/>
-        </p:nvSpPr>
-        <p:spPr>
-          <a:xfrm rot="-5400000">
-            <a:off x="-2250585" y="6195701"/>
-            <a:ext cx="4423252" cy="6592923"/>
-          </a:xfrm>
-          <a:custGeom>
-            <a:avLst/>
-            <a:gdLst/>
-            <a:ahLst/>
-            <a:cxnLst/>
-            <a:rect l="l" t="t" r="r" b="b"/>
-            <a:pathLst>
-              <a:path w="4423252" h="6592923" extrusionOk="0">
-                <a:moveTo>
-                  <a:pt x="0" y="0"/>
-                </a:moveTo>
-                <a:lnTo>
-                  <a:pt x="4423251" y="0"/>
-                </a:lnTo>
-                <a:lnTo>
-                  <a:pt x="4423251" y="6592923"/>
-                </a:lnTo>
-                <a:lnTo>
-                  <a:pt x="0" y="6592923"/>
-                </a:lnTo>
-                <a:lnTo>
-                  <a:pt x="0" y="0"/>
-                </a:lnTo>
-                <a:close/>
-              </a:path>
-            </a:pathLst>
-          </a:custGeom>
-          <a:blipFill rotWithShape="1">
-            <a:blip r:embed="rId3">
-              <a:alphaModFix/>
-            </a:blip>
-            <a:stretch>
-              <a:fillRect/>
-            </a:stretch>
-          </a:blipFill>
-          <a:ln>
-            <a:noFill/>
-          </a:ln>
-        </p:spPr>
-      </p:sp>
-      <p:grpSp>
-        <p:nvGrpSpPr>
-          <p:cNvPr id="325" name="Google Shape;325;p9"/>
-          <p:cNvGrpSpPr/>
-          <p:nvPr/>
-        </p:nvGrpSpPr>
-        <p:grpSpPr>
-          <a:xfrm>
-            <a:off x="6341594" y="1300762"/>
-            <a:ext cx="5481584" cy="1189501"/>
-            <a:chOff x="0" y="-76200"/>
-            <a:chExt cx="1785490" cy="387451"/>
-          </a:xfrm>
-        </p:grpSpPr>
-        <p:sp>
-          <p:nvSpPr>
-            <p:cNvPr id="326" name="Google Shape;326;p9"/>
-            <p:cNvSpPr/>
-            <p:nvPr/>
-          </p:nvSpPr>
-          <p:spPr>
-            <a:xfrm>
-              <a:off x="0" y="0"/>
-              <a:ext cx="1785490" cy="311251"/>
-            </a:xfrm>
-            <a:custGeom>
-              <a:avLst/>
-              <a:gdLst/>
-              <a:ahLst/>
-              <a:cxnLst/>
-              <a:rect l="l" t="t" r="r" b="b"/>
-              <a:pathLst>
-                <a:path w="1785490" h="311251" extrusionOk="0">
-                  <a:moveTo>
-                    <a:pt x="0" y="0"/>
-                  </a:moveTo>
-                  <a:lnTo>
-                    <a:pt x="1785490" y="0"/>
-                  </a:lnTo>
-                  <a:lnTo>
-                    <a:pt x="1785490" y="311251"/>
-                  </a:lnTo>
-                  <a:lnTo>
-                    <a:pt x="0" y="311251"/>
-                  </a:lnTo>
-                  <a:close/>
-                </a:path>
-              </a:pathLst>
-            </a:custGeom>
-            <a:solidFill>
-              <a:srgbClr val="EAD6FF"/>
-            </a:solidFill>
-            <a:ln>
-              <a:noFill/>
-            </a:ln>
-          </p:spPr>
-        </p:sp>
-        <p:sp>
-          <p:nvSpPr>
-            <p:cNvPr id="327" name="Google Shape;327;p9"/>
-            <p:cNvSpPr txBox="1"/>
-            <p:nvPr/>
-          </p:nvSpPr>
-          <p:spPr>
-            <a:xfrm>
-              <a:off x="0" y="-76200"/>
-              <a:ext cx="1785490" cy="387451"/>
-            </a:xfrm>
-            <a:prstGeom prst="rect">
-              <a:avLst/>
-            </a:prstGeom>
-            <a:noFill/>
-            <a:ln>
-              <a:noFill/>
-            </a:ln>
-          </p:spPr>
-          <p:txBody>
-            <a:bodyPr spcFirstLastPara="1" wrap="square" lIns="50800" tIns="50800" rIns="50800" bIns="50800" anchor="ctr" anchorCtr="0">
-              <a:noAutofit/>
-            </a:bodyPr>
-            <a:lstStyle/>
-            <a:p>
-              <a:pPr marL="0" marR="0" lvl="0" indent="0" algn="ctr" rtl="0">
-                <a:lnSpc>
-                  <a:spcPct val="147722"/>
-                </a:lnSpc>
-                <a:spcBef>
-                  <a:spcPts val="0"/>
-                </a:spcBef>
-                <a:spcAft>
-                  <a:spcPts val="0"/>
-                </a:spcAft>
-                <a:buClr>
-                  <a:srgbClr val="000000"/>
-                </a:buClr>
-                <a:buSzPts val="1800"/>
-                <a:buFont typeface="Arial"/>
-                <a:buNone/>
-              </a:pPr>
-              <a:endParaRPr sz="1800" b="0" i="0" u="none" strike="noStrike" cap="none">
-                <a:solidFill>
-                  <a:schemeClr val="dk1"/>
-                </a:solidFill>
-                <a:latin typeface="Calibri"/>
-                <a:ea typeface="Calibri"/>
-                <a:cs typeface="Calibri"/>
-                <a:sym typeface="Calibri"/>
-              </a:endParaRPr>
-            </a:p>
-          </p:txBody>
-        </p:sp>
-      </p:grpSp>
-      <p:grpSp>
-        <p:nvGrpSpPr>
-          <p:cNvPr id="328" name="Google Shape;328;p9"/>
-          <p:cNvGrpSpPr/>
-          <p:nvPr/>
-        </p:nvGrpSpPr>
-        <p:grpSpPr>
-          <a:xfrm>
-            <a:off x="6464822" y="1457785"/>
-            <a:ext cx="5481584" cy="1189501"/>
-            <a:chOff x="0" y="-76200"/>
-            <a:chExt cx="1785490" cy="387451"/>
-          </a:xfrm>
-        </p:grpSpPr>
-        <p:sp>
-          <p:nvSpPr>
-            <p:cNvPr id="329" name="Google Shape;329;p9"/>
-            <p:cNvSpPr/>
-            <p:nvPr/>
-          </p:nvSpPr>
-          <p:spPr>
-            <a:xfrm>
-              <a:off x="0" y="0"/>
-              <a:ext cx="1785490" cy="311251"/>
-            </a:xfrm>
-            <a:custGeom>
-              <a:avLst/>
-              <a:gdLst/>
-              <a:ahLst/>
-              <a:cxnLst/>
-              <a:rect l="l" t="t" r="r" b="b"/>
-              <a:pathLst>
-                <a:path w="1785490" h="311251" extrusionOk="0">
-                  <a:moveTo>
-                    <a:pt x="0" y="0"/>
-                  </a:moveTo>
-                  <a:lnTo>
-                    <a:pt x="1785490" y="0"/>
-                  </a:lnTo>
-                  <a:lnTo>
-                    <a:pt x="1785490" y="311251"/>
-                  </a:lnTo>
-                  <a:lnTo>
-                    <a:pt x="0" y="311251"/>
-                  </a:lnTo>
-                  <a:close/>
-                </a:path>
-              </a:pathLst>
-            </a:custGeom>
-            <a:solidFill>
-              <a:srgbClr val="000000">
-                <a:alpha val="0"/>
-              </a:srgbClr>
-            </a:solidFill>
-            <a:ln w="76200" cap="sq" cmpd="sng">
-              <a:solidFill>
-                <a:srgbClr val="CB74F7"/>
-              </a:solidFill>
-              <a:prstDash val="solid"/>
-              <a:miter lim="8000"/>
-              <a:headEnd type="none" w="sm" len="sm"/>
-              <a:tailEnd type="none" w="sm" len="sm"/>
-            </a:ln>
-          </p:spPr>
-        </p:sp>
-        <p:sp>
-          <p:nvSpPr>
-            <p:cNvPr id="330" name="Google Shape;330;p9"/>
-            <p:cNvSpPr txBox="1"/>
-            <p:nvPr/>
-          </p:nvSpPr>
-          <p:spPr>
-            <a:xfrm>
-              <a:off x="0" y="-76200"/>
-              <a:ext cx="1785490" cy="387451"/>
-            </a:xfrm>
-            <a:prstGeom prst="rect">
-              <a:avLst/>
-            </a:prstGeom>
-            <a:noFill/>
-            <a:ln>
-              <a:noFill/>
-            </a:ln>
-          </p:spPr>
-          <p:txBody>
-            <a:bodyPr spcFirstLastPara="1" wrap="square" lIns="50800" tIns="50800" rIns="50800" bIns="50800" anchor="ctr" anchorCtr="0">
-              <a:noAutofit/>
-            </a:bodyPr>
-            <a:lstStyle/>
-            <a:p>
-              <a:pPr marL="0" marR="0" lvl="0" indent="0" algn="ctr" rtl="0">
-                <a:lnSpc>
-                  <a:spcPct val="147722"/>
-                </a:lnSpc>
-                <a:spcBef>
-                  <a:spcPts val="0"/>
-                </a:spcBef>
-                <a:spcAft>
-                  <a:spcPts val="0"/>
-                </a:spcAft>
-                <a:buClr>
-                  <a:srgbClr val="000000"/>
-                </a:buClr>
-                <a:buSzPts val="1800"/>
-                <a:buFont typeface="Arial"/>
-                <a:buNone/>
-              </a:pPr>
-              <a:endParaRPr sz="1800" b="0" i="0" u="none" strike="noStrike" cap="none">
-                <a:solidFill>
-                  <a:schemeClr val="dk1"/>
-                </a:solidFill>
-                <a:latin typeface="Calibri"/>
-                <a:ea typeface="Calibri"/>
-                <a:cs typeface="Calibri"/>
-                <a:sym typeface="Calibri"/>
-              </a:endParaRPr>
-            </a:p>
-          </p:txBody>
-        </p:sp>
-      </p:grpSp>
-      <p:sp>
-        <p:nvSpPr>
-          <p:cNvPr id="331" name="Google Shape;331;p9"/>
+          <p:cNvPr id="132" name="Google Shape;132;p2"/>
           <p:cNvSpPr txBox="1"/>
           <p:nvPr/>
         </p:nvSpPr>
         <p:spPr>
           <a:xfrm>
-            <a:off x="7052555" y="1803903"/>
-            <a:ext cx="4182889" cy="655003"/>
+            <a:off x="689414" y="1334356"/>
+            <a:ext cx="16230600" cy="307800"/>
           </a:xfrm>
           <a:prstGeom prst="rect">
             <a:avLst/>
@@ -18024,7 +15664,7 @@
           <a:p>
             <a:pPr marL="0" marR="0" lvl="0" indent="0" algn="ctr" rtl="0">
               <a:lnSpc>
-                <a:spcPct val="140036"/>
+                <a:spcPct val="140000"/>
               </a:lnSpc>
               <a:spcBef>
                 <a:spcPts val="0"/>
@@ -18035,210 +15675,42 @@
               <a:buClr>
                 <a:srgbClr val="000000"/>
               </a:buClr>
-              <a:buSzPts val="3834"/>
+              <a:buSzPts val="2000"/>
               <a:buFont typeface="Arial"/>
               <a:buNone/>
             </a:pPr>
             <a:r>
-              <a:rPr lang="en-US" sz="3834" b="0" i="0" u="none" strike="noStrike" cap="none" dirty="0">
+              <a:rPr lang="en-US" sz="2000" b="0" i="0" u="none" strike="noStrike" cap="none">
                 <a:solidFill>
                   <a:srgbClr val="000000"/>
                 </a:solidFill>
-                <a:latin typeface="Arial"/>
-                <a:ea typeface="Arial"/>
-                <a:cs typeface="Arial"/>
-                <a:sym typeface="Arial"/>
+                <a:latin typeface="Times New Roman"/>
+                <a:ea typeface="Times New Roman"/>
+                <a:cs typeface="Times New Roman"/>
+                <a:sym typeface="Times New Roman"/>
               </a:rPr>
-              <a:t>CONCLUSION</a:t>
-            </a:r>
-            <a:endParaRPr sz="1400" b="0" i="0" u="none" strike="noStrike" cap="none" dirty="0">
-              <a:solidFill>
-                <a:srgbClr val="000000"/>
-              </a:solidFill>
-              <a:latin typeface="Arial"/>
-              <a:ea typeface="Arial"/>
-              <a:cs typeface="Arial"/>
-              <a:sym typeface="Arial"/>
-            </a:endParaRPr>
-          </a:p>
-        </p:txBody>
-      </p:sp>
-      <p:sp>
-        <p:nvSpPr>
-          <p:cNvPr id="332" name="Google Shape;332;p9"/>
-          <p:cNvSpPr/>
-          <p:nvPr/>
-        </p:nvSpPr>
-        <p:spPr>
-          <a:xfrm rot="-5400000">
-            <a:off x="17620984" y="1556567"/>
-            <a:ext cx="4423252" cy="6592923"/>
-          </a:xfrm>
-          <a:custGeom>
-            <a:avLst/>
-            <a:gdLst/>
-            <a:ahLst/>
-            <a:cxnLst/>
-            <a:rect l="l" t="t" r="r" b="b"/>
-            <a:pathLst>
-              <a:path w="4423252" h="6592923" extrusionOk="0">
-                <a:moveTo>
-                  <a:pt x="0" y="0"/>
-                </a:moveTo>
-                <a:lnTo>
-                  <a:pt x="4423252" y="0"/>
-                </a:lnTo>
-                <a:lnTo>
-                  <a:pt x="4423252" y="6592923"/>
-                </a:lnTo>
-                <a:lnTo>
-                  <a:pt x="0" y="6592923"/>
-                </a:lnTo>
-                <a:lnTo>
-                  <a:pt x="0" y="0"/>
-                </a:lnTo>
-                <a:close/>
-              </a:path>
-            </a:pathLst>
-          </a:custGeom>
-          <a:blipFill rotWithShape="1">
-            <a:blip r:embed="rId3">
-              <a:alphaModFix/>
-            </a:blip>
-            <a:stretch>
-              <a:fillRect/>
-            </a:stretch>
-          </a:blipFill>
-          <a:ln>
-            <a:noFill/>
-          </a:ln>
-        </p:spPr>
-      </p:sp>
-      <p:sp>
-        <p:nvSpPr>
-          <p:cNvPr id="333" name="Google Shape;333;p9"/>
-          <p:cNvSpPr/>
-          <p:nvPr/>
-        </p:nvSpPr>
-        <p:spPr>
-          <a:xfrm rot="-5400000" flipH="1">
-            <a:off x="-3752074" y="2286941"/>
-            <a:ext cx="4423252" cy="6592923"/>
-          </a:xfrm>
-          <a:custGeom>
-            <a:avLst/>
-            <a:gdLst/>
-            <a:ahLst/>
-            <a:cxnLst/>
-            <a:rect l="l" t="t" r="r" b="b"/>
-            <a:pathLst>
-              <a:path w="4423252" h="6592923" extrusionOk="0">
-                <a:moveTo>
-                  <a:pt x="4423252" y="0"/>
-                </a:moveTo>
-                <a:lnTo>
-                  <a:pt x="0" y="0"/>
-                </a:lnTo>
-                <a:lnTo>
-                  <a:pt x="0" y="6592923"/>
-                </a:lnTo>
-                <a:lnTo>
-                  <a:pt x="4423252" y="6592923"/>
-                </a:lnTo>
-                <a:lnTo>
-                  <a:pt x="4423252" y="0"/>
-                </a:lnTo>
-                <a:close/>
-              </a:path>
-            </a:pathLst>
-          </a:custGeom>
-          <a:blipFill rotWithShape="1">
-            <a:blip r:embed="rId3">
-              <a:alphaModFix/>
-            </a:blip>
-            <a:stretch>
-              <a:fillRect/>
-            </a:stretch>
-          </a:blipFill>
-          <a:ln>
-            <a:noFill/>
-          </a:ln>
-        </p:spPr>
-      </p:sp>
-      <p:sp>
-        <p:nvSpPr>
-          <p:cNvPr id="334" name="Google Shape;334;p9"/>
-          <p:cNvSpPr txBox="1"/>
-          <p:nvPr/>
-        </p:nvSpPr>
-        <p:spPr>
-          <a:xfrm>
-            <a:off x="14083144" y="9372600"/>
-            <a:ext cx="4044000" cy="461700"/>
-          </a:xfrm>
-          <a:prstGeom prst="rect">
-            <a:avLst/>
-          </a:prstGeom>
-          <a:noFill/>
-          <a:ln>
-            <a:noFill/>
-          </a:ln>
-        </p:spPr>
-        <p:txBody>
-          <a:bodyPr spcFirstLastPara="1" wrap="square" lIns="0" tIns="0" rIns="0" bIns="0" anchor="t" anchorCtr="0">
-            <a:spAutoFit/>
-          </a:bodyPr>
-          <a:lstStyle/>
-          <a:p>
-            <a:pPr marL="0" marR="0" lvl="0" indent="0" algn="ctr" rtl="0">
-              <a:lnSpc>
-                <a:spcPct val="140000"/>
-              </a:lnSpc>
-              <a:spcBef>
-                <a:spcPts val="0"/>
-              </a:spcBef>
-              <a:spcAft>
-                <a:spcPts val="0"/>
-              </a:spcAft>
-              <a:buClr>
-                <a:srgbClr val="000000"/>
-              </a:buClr>
-              <a:buSzPts val="3000"/>
-              <a:buFont typeface="Arial"/>
-              <a:buNone/>
-            </a:pPr>
-            <a:r>
-              <a:rPr lang="en-US" sz="3000" b="0" i="0" u="none" strike="noStrike" cap="none">
-                <a:solidFill>
-                  <a:srgbClr val="000000"/>
-                </a:solidFill>
-                <a:latin typeface="Times"/>
-                <a:ea typeface="Times"/>
-                <a:cs typeface="Times"/>
-                <a:sym typeface="Times"/>
-              </a:rPr>
-              <a:t>Oscillations'2</a:t>
+              <a:t> (Auto</a:t>
             </a:r>
             <a:r>
-              <a:rPr lang="en-US" sz="3000">
-                <a:latin typeface="Times"/>
-                <a:ea typeface="Times"/>
-                <a:cs typeface="Times"/>
-                <a:sym typeface="Times"/>
+              <a:rPr lang="en-US" sz="2000">
+                <a:latin typeface="Times New Roman"/>
+                <a:ea typeface="Times New Roman"/>
+                <a:cs typeface="Times New Roman"/>
+                <a:sym typeface="Times New Roman"/>
               </a:rPr>
-              <a:t>6</a:t>
+              <a:t>nomous Institute </a:t>
             </a:r>
             <a:r>
-              <a:rPr lang="en-US" sz="3000" b="0" i="0" u="none" strike="noStrike" cap="none">
+              <a:rPr lang="en-US" sz="2000" b="0" i="0" u="none" strike="noStrike" cap="none">
                 <a:solidFill>
                   <a:srgbClr val="000000"/>
                 </a:solidFill>
-                <a:latin typeface="Times"/>
-                <a:ea typeface="Times"/>
-                <a:cs typeface="Times"/>
-                <a:sym typeface="Times"/>
+                <a:latin typeface="Times New Roman"/>
+                <a:ea typeface="Times New Roman"/>
+                <a:cs typeface="Times New Roman"/>
+                <a:sym typeface="Times New Roman"/>
               </a:rPr>
-              <a:t>| VCET</a:t>
+              <a:t>Affiliated to University of Mumbai)</a:t>
             </a:r>
             <a:endParaRPr sz="1400" b="0" i="0" u="none" strike="noStrike" cap="none">
               <a:solidFill>
@@ -18254,13 +15726,13 @@
       </p:sp>
       <p:sp>
         <p:nvSpPr>
-          <p:cNvPr id="335" name="Google Shape;335;p9"/>
+          <p:cNvPr id="133" name="Google Shape;133;p2"/>
           <p:cNvSpPr/>
           <p:nvPr/>
         </p:nvSpPr>
         <p:spPr>
           <a:xfrm>
-            <a:off x="189876" y="296181"/>
+            <a:off x="689414" y="154282"/>
             <a:ext cx="1713069" cy="1643692"/>
           </a:xfrm>
           <a:custGeom>
@@ -18305,301 +15777,566 @@
       </p:sp>
       <p:sp>
         <p:nvSpPr>
-          <p:cNvPr id="336" name="Google Shape;336;p9"/>
-          <p:cNvSpPr/>
-          <p:nvPr/>
-        </p:nvSpPr>
-        <p:spPr>
-          <a:xfrm>
-            <a:off x="15678323" y="306959"/>
-            <a:ext cx="2278904" cy="1263935"/>
-          </a:xfrm>
-          <a:custGeom>
-            <a:avLst/>
-            <a:gdLst/>
-            <a:ahLst/>
-            <a:cxnLst/>
-            <a:rect l="l" t="t" r="r" b="b"/>
-            <a:pathLst>
-              <a:path w="2278904" h="1263935" extrusionOk="0">
-                <a:moveTo>
-                  <a:pt x="0" y="0"/>
-                </a:moveTo>
-                <a:lnTo>
-                  <a:pt x="2278904" y="0"/>
-                </a:lnTo>
-                <a:lnTo>
-                  <a:pt x="2278904" y="1263935"/>
-                </a:lnTo>
-                <a:lnTo>
-                  <a:pt x="0" y="1263935"/>
-                </a:lnTo>
-                <a:lnTo>
-                  <a:pt x="0" y="0"/>
-                </a:lnTo>
-                <a:close/>
-              </a:path>
-            </a:pathLst>
-          </a:custGeom>
-          <a:blipFill rotWithShape="1">
-            <a:blip r:embed="rId6">
-              <a:alphaModFix amt="85000"/>
-            </a:blip>
-            <a:stretch>
-              <a:fillRect t="-483" b="-482"/>
-            </a:stretch>
-          </a:blipFill>
-          <a:ln>
-            <a:noFill/>
-          </a:ln>
-        </p:spPr>
-      </p:sp>
-      <p:sp>
-        <p:nvSpPr>
-          <p:cNvPr id="4" name="TextBox 3">
-            <a:extLst>
-              <a:ext uri="{FF2B5EF4-FFF2-40B4-BE49-F238E27FC236}">
-                <a16:creationId xmlns:a16="http://schemas.microsoft.com/office/drawing/2014/main" id="{378305F1-FF05-4288-F3C9-295C56C5FE58}"/>
-              </a:ext>
-            </a:extLst>
-          </p:cNvPr>
+          <p:cNvPr id="136" name="Google Shape;136;p2"/>
           <p:cNvSpPr txBox="1"/>
           <p:nvPr/>
         </p:nvSpPr>
         <p:spPr>
           <a:xfrm>
-            <a:off x="2300695" y="2919348"/>
-            <a:ext cx="12537524" cy="5170646"/>
+            <a:off x="2631082" y="523875"/>
+            <a:ext cx="13025835" cy="504825"/>
           </a:xfrm>
           <a:prstGeom prst="rect">
             <a:avLst/>
           </a:prstGeom>
           <a:noFill/>
+          <a:ln>
+            <a:noFill/>
+          </a:ln>
         </p:spPr>
         <p:txBody>
-          <a:bodyPr wrap="square" rtlCol="0">
+          <a:bodyPr spcFirstLastPara="1" wrap="square" lIns="0" tIns="0" rIns="0" bIns="0" anchor="t" anchorCtr="0">
             <a:spAutoFit/>
           </a:bodyPr>
           <a:lstStyle/>
           <a:p>
-            <a:pPr lvl="0" eaLnBrk="0" fontAlgn="base" hangingPunct="0">
-              <a:spcBef>
-                <a:spcPct val="0"/>
-              </a:spcBef>
-              <a:spcAft>
-                <a:spcPct val="0"/>
-              </a:spcAft>
-              <a:buClrTx/>
+            <a:pPr marL="0" marR="0" lvl="0" indent="0" algn="ctr" rtl="0">
+              <a:lnSpc>
+                <a:spcPct val="120006"/>
+              </a:lnSpc>
+              <a:spcBef>
+                <a:spcPts val="0"/>
+              </a:spcBef>
+              <a:spcAft>
+                <a:spcPts val="0"/>
+              </a:spcAft>
+              <a:buClr>
+                <a:srgbClr val="000000"/>
+              </a:buClr>
+              <a:buSzPts val="2999"/>
+              <a:buFont typeface="Arial"/>
+              <a:buNone/>
             </a:pPr>
-            <a:endParaRPr lang="en-US" altLang="en-US" sz="3000" dirty="0">
+            <a:r>
+              <a:rPr lang="en-US" sz="2999" b="1" i="0" u="none" strike="noStrike" cap="none">
+                <a:solidFill>
+                  <a:srgbClr val="000000"/>
+                </a:solidFill>
+                <a:latin typeface="Times"/>
+                <a:ea typeface="Times"/>
+                <a:cs typeface="Times"/>
+                <a:sym typeface="Times"/>
+              </a:rPr>
+              <a:t>VIDYAVARDHINI’S COLLEGE OF ENGINEERING AND TECHNOLOGY</a:t>
+            </a:r>
+            <a:endParaRPr sz="1400" b="0" i="0" u="none" strike="noStrike" cap="none">
               <a:solidFill>
-                <a:schemeClr val="tx1"/>
+                <a:srgbClr val="000000"/>
+              </a:solidFill>
+              <a:latin typeface="Arial"/>
+              <a:ea typeface="Arial"/>
+              <a:cs typeface="Arial"/>
+              <a:sym typeface="Arial"/>
+            </a:endParaRPr>
+          </a:p>
+        </p:txBody>
+      </p:sp>
+      <p:sp>
+        <p:nvSpPr>
+          <p:cNvPr id="137" name="Google Shape;137;p2"/>
+          <p:cNvSpPr txBox="1"/>
+          <p:nvPr/>
+        </p:nvSpPr>
+        <p:spPr>
+          <a:xfrm>
+            <a:off x="3006604" y="928503"/>
+            <a:ext cx="11596219" cy="409575"/>
+          </a:xfrm>
+          <a:prstGeom prst="rect">
+            <a:avLst/>
+          </a:prstGeom>
+          <a:noFill/>
+          <a:ln>
+            <a:noFill/>
+          </a:ln>
+        </p:spPr>
+        <p:txBody>
+          <a:bodyPr spcFirstLastPara="1" wrap="square" lIns="0" tIns="0" rIns="0" bIns="0" anchor="t" anchorCtr="0">
+            <a:spAutoFit/>
+          </a:bodyPr>
+          <a:lstStyle/>
+          <a:p>
+            <a:pPr marL="0" marR="0" lvl="0" indent="0" algn="ctr" rtl="0">
+              <a:lnSpc>
+                <a:spcPct val="120008"/>
+              </a:lnSpc>
+              <a:spcBef>
+                <a:spcPts val="0"/>
+              </a:spcBef>
+              <a:spcAft>
+                <a:spcPts val="0"/>
+              </a:spcAft>
+              <a:buClr>
+                <a:srgbClr val="000000"/>
+              </a:buClr>
+              <a:buSzPts val="2399"/>
+              <a:buFont typeface="Arial"/>
+              <a:buNone/>
+            </a:pPr>
+            <a:r>
+              <a:rPr lang="en-US" sz="2399" b="1" i="0" u="none" strike="noStrike" cap="none">
+                <a:solidFill>
+                  <a:srgbClr val="050A30"/>
+                </a:solidFill>
+                <a:latin typeface="Times"/>
+                <a:ea typeface="Times"/>
+                <a:cs typeface="Times"/>
+                <a:sym typeface="Times"/>
+              </a:rPr>
+              <a:t>(NBA &amp; NAAC Accredited)</a:t>
+            </a:r>
+            <a:endParaRPr sz="1400" b="0" i="0" u="none" strike="noStrike" cap="none">
+              <a:solidFill>
+                <a:srgbClr val="000000"/>
+              </a:solidFill>
+              <a:latin typeface="Arial"/>
+              <a:ea typeface="Arial"/>
+              <a:cs typeface="Arial"/>
+              <a:sym typeface="Arial"/>
+            </a:endParaRPr>
+          </a:p>
+        </p:txBody>
+      </p:sp>
+      <p:sp>
+        <p:nvSpPr>
+          <p:cNvPr id="138" name="Google Shape;138;p2"/>
+          <p:cNvSpPr txBox="1"/>
+          <p:nvPr/>
+        </p:nvSpPr>
+        <p:spPr>
+          <a:xfrm>
+            <a:off x="3383283" y="5521509"/>
+            <a:ext cx="7435925" cy="3231654"/>
+          </a:xfrm>
+          <a:prstGeom prst="rect">
+            <a:avLst/>
+          </a:prstGeom>
+          <a:noFill/>
+          <a:ln>
+            <a:noFill/>
+          </a:ln>
+        </p:spPr>
+        <p:txBody>
+          <a:bodyPr spcFirstLastPara="1" wrap="square" lIns="0" tIns="0" rIns="0" bIns="0" anchor="t" anchorCtr="0">
+            <a:spAutoFit/>
+          </a:bodyPr>
+          <a:lstStyle/>
+          <a:p>
+            <a:pPr lvl="0">
+              <a:lnSpc>
+                <a:spcPct val="140000"/>
+              </a:lnSpc>
+              <a:buSzPts val="2600"/>
+            </a:pPr>
+            <a:r>
+              <a:rPr lang="en-US" sz="3000" b="0" i="0" u="none" strike="noStrike" cap="none" dirty="0">
+                <a:solidFill>
+                  <a:srgbClr val="000000"/>
+                </a:solidFill>
+                <a:latin typeface="Times New Roman" panose="02020603050405020304" pitchFamily="18" charset="0"/>
+                <a:ea typeface="Times New Roman"/>
+                <a:cs typeface="Times New Roman" panose="02020603050405020304" pitchFamily="18" charset="0"/>
+                <a:sym typeface="Times New Roman"/>
+              </a:rPr>
+              <a:t>Group Member: </a:t>
+            </a:r>
+            <a:r>
+              <a:rPr lang="en-IN" sz="3000" b="0" i="0" u="none" strike="noStrike" cap="none" dirty="0">
+                <a:solidFill>
+                  <a:srgbClr val="000000"/>
+                </a:solidFill>
+                <a:latin typeface="Times New Roman" panose="02020603050405020304" pitchFamily="18" charset="0"/>
+                <a:ea typeface="Times New Roman"/>
+                <a:cs typeface="Times New Roman" panose="02020603050405020304" pitchFamily="18" charset="0"/>
+                <a:sym typeface="Times New Roman"/>
+              </a:rPr>
+              <a:t>46</a:t>
+            </a:r>
+            <a:r>
+              <a:rPr lang="en-IN" sz="3000" dirty="0">
+                <a:latin typeface="Times New Roman" panose="02020603050405020304" pitchFamily="18" charset="0"/>
+                <a:cs typeface="Times New Roman" panose="02020603050405020304" pitchFamily="18" charset="0"/>
+              </a:rPr>
+              <a:t>- </a:t>
+            </a:r>
+            <a:r>
+              <a:rPr lang="en-IN" sz="3000" dirty="0" err="1">
+                <a:latin typeface="Times New Roman" panose="02020603050405020304" pitchFamily="18" charset="0"/>
+                <a:cs typeface="Times New Roman" panose="02020603050405020304" pitchFamily="18" charset="0"/>
+              </a:rPr>
+              <a:t>Aklesh</a:t>
+            </a:r>
+            <a:r>
+              <a:rPr lang="en-IN" sz="3000" dirty="0">
+                <a:latin typeface="Times New Roman" panose="02020603050405020304" pitchFamily="18" charset="0"/>
+                <a:cs typeface="Times New Roman" panose="02020603050405020304" pitchFamily="18" charset="0"/>
+              </a:rPr>
+              <a:t> Harijan</a:t>
+            </a:r>
+          </a:p>
+          <a:p>
+            <a:pPr lvl="0">
+              <a:lnSpc>
+                <a:spcPct val="140000"/>
+              </a:lnSpc>
+              <a:buSzPts val="2600"/>
+            </a:pPr>
+            <a:r>
+              <a:rPr lang="en-IN" sz="3000" dirty="0">
+                <a:latin typeface="Times New Roman" panose="02020603050405020304" pitchFamily="18" charset="0"/>
+                <a:cs typeface="Times New Roman" panose="02020603050405020304" pitchFamily="18" charset="0"/>
+              </a:rPr>
+              <a:t>		        49- Sanskar Jadhav </a:t>
+            </a:r>
+          </a:p>
+          <a:p>
+            <a:pPr lvl="1">
+              <a:lnSpc>
+                <a:spcPct val="140000"/>
+              </a:lnSpc>
+              <a:buSzPts val="2600"/>
+            </a:pPr>
+            <a:r>
+              <a:rPr lang="en-IN" sz="3000" dirty="0">
+                <a:latin typeface="Times New Roman" panose="02020603050405020304" pitchFamily="18" charset="0"/>
+                <a:cs typeface="Times New Roman" panose="02020603050405020304" pitchFamily="18" charset="0"/>
+              </a:rPr>
+              <a:t>		        50- Samyak Jagtap </a:t>
+            </a:r>
+          </a:p>
+          <a:p>
+            <a:pPr lvl="1">
+              <a:lnSpc>
+                <a:spcPct val="140000"/>
+              </a:lnSpc>
+              <a:buSzPts val="2600"/>
+            </a:pPr>
+            <a:r>
+              <a:rPr lang="en-IN" sz="3000" dirty="0">
+                <a:latin typeface="Times New Roman" panose="02020603050405020304" pitchFamily="18" charset="0"/>
+                <a:cs typeface="Times New Roman" panose="02020603050405020304" pitchFamily="18" charset="0"/>
+              </a:rPr>
+              <a:t>		        52- Abhishek </a:t>
+            </a:r>
+            <a:r>
+              <a:rPr lang="en-IN" sz="3000" dirty="0" err="1">
+                <a:latin typeface="Times New Roman" panose="02020603050405020304" pitchFamily="18" charset="0"/>
+                <a:cs typeface="Times New Roman" panose="02020603050405020304" pitchFamily="18" charset="0"/>
+              </a:rPr>
+              <a:t>Jambhale</a:t>
+            </a:r>
+            <a:endParaRPr lang="en-US" sz="3000" b="0" i="0" u="none" strike="noStrike" cap="none" dirty="0">
+              <a:solidFill>
+                <a:srgbClr val="000000"/>
               </a:solidFill>
               <a:latin typeface="Times New Roman" panose="02020603050405020304" pitchFamily="18" charset="0"/>
+              <a:ea typeface="Times New Roman"/>
               <a:cs typeface="Times New Roman" panose="02020603050405020304" pitchFamily="18" charset="0"/>
+              <a:sym typeface="Times New Roman"/>
             </a:endParaRPr>
           </a:p>
           <a:p>
-            <a:pPr lvl="0" eaLnBrk="0" fontAlgn="base" hangingPunct="0">
-              <a:spcBef>
-                <a:spcPct val="0"/>
-              </a:spcBef>
-              <a:spcAft>
-                <a:spcPct val="0"/>
-              </a:spcAft>
-              <a:buClrTx/>
-              <a:buFontTx/>
-              <a:buChar char="•"/>
+            <a:pPr lvl="0">
+              <a:lnSpc>
+                <a:spcPct val="140000"/>
+              </a:lnSpc>
+              <a:buSzPts val="2600"/>
+            </a:pPr>
+            <a:endParaRPr sz="3000" b="0" i="0" u="none" strike="noStrike" cap="none" dirty="0">
+              <a:solidFill>
+                <a:srgbClr val="000000"/>
+              </a:solidFill>
+              <a:latin typeface="Arial"/>
+              <a:ea typeface="Arial"/>
+              <a:cs typeface="Arial"/>
+              <a:sym typeface="Arial"/>
+            </a:endParaRPr>
+          </a:p>
+        </p:txBody>
+      </p:sp>
+      <p:sp>
+        <p:nvSpPr>
+          <p:cNvPr id="139" name="Google Shape;139;p2"/>
+          <p:cNvSpPr txBox="1"/>
+          <p:nvPr/>
+        </p:nvSpPr>
+        <p:spPr>
+          <a:xfrm>
+            <a:off x="5256115" y="3124311"/>
+            <a:ext cx="7435925" cy="1141659"/>
+          </a:xfrm>
+          <a:prstGeom prst="rect">
+            <a:avLst/>
+          </a:prstGeom>
+          <a:noFill/>
+          <a:ln>
+            <a:noFill/>
+          </a:ln>
+        </p:spPr>
+        <p:txBody>
+          <a:bodyPr spcFirstLastPara="1" wrap="square" lIns="0" tIns="0" rIns="0" bIns="0" anchor="t" anchorCtr="0">
+            <a:spAutoFit/>
+          </a:bodyPr>
+          <a:lstStyle/>
+          <a:p>
+            <a:pPr marL="0" marR="0" lvl="0" indent="0" algn="ctr" rtl="0">
+              <a:lnSpc>
+                <a:spcPct val="140011"/>
+              </a:lnSpc>
+              <a:spcBef>
+                <a:spcPts val="0"/>
+              </a:spcBef>
+              <a:spcAft>
+                <a:spcPts val="0"/>
+              </a:spcAft>
+              <a:buClr>
+                <a:srgbClr val="000000"/>
+              </a:buClr>
+              <a:buSzPts val="3499"/>
+              <a:buFont typeface="Arial"/>
+              <a:buNone/>
             </a:pPr>
             <a:r>
-              <a:rPr lang="en-US" altLang="en-US" sz="3000" b="1" dirty="0">
-                <a:solidFill>
-                  <a:schemeClr val="tx1"/>
-                </a:solidFill>
-                <a:latin typeface="Times New Roman" panose="02020603050405020304" pitchFamily="18" charset="0"/>
-                <a:cs typeface="Times New Roman" panose="02020603050405020304" pitchFamily="18" charset="0"/>
+              <a:rPr lang="en-US" sz="3499" b="0" i="0" u="none" strike="noStrike" cap="none" dirty="0">
+                <a:solidFill>
+                  <a:srgbClr val="000000"/>
+                </a:solidFill>
+                <a:latin typeface="Times New Roman"/>
+                <a:ea typeface="Times New Roman"/>
+                <a:cs typeface="Times New Roman"/>
+                <a:sym typeface="Times New Roman"/>
               </a:rPr>
-              <a:t>Achievement:</a:t>
+              <a:t>Title : </a:t>
             </a:r>
             <a:r>
-              <a:rPr lang="en-US" altLang="en-US" sz="3000" dirty="0">
-                <a:solidFill>
-                  <a:schemeClr val="tx1"/>
-                </a:solidFill>
-                <a:latin typeface="Times New Roman" panose="02020603050405020304" pitchFamily="18" charset="0"/>
-                <a:cs typeface="Times New Roman" panose="02020603050405020304" pitchFamily="18" charset="0"/>
+              <a:rPr lang="en-US" sz="3499" b="0" i="0" u="none" strike="noStrike" cap="none" dirty="0" err="1">
+                <a:solidFill>
+                  <a:srgbClr val="000000"/>
+                </a:solidFill>
+                <a:latin typeface="Times New Roman"/>
+                <a:ea typeface="Times New Roman"/>
+                <a:cs typeface="Times New Roman"/>
+                <a:sym typeface="Times New Roman"/>
+              </a:rPr>
+              <a:t>InveXa</a:t>
+            </a:r>
+            <a:r>
+              <a:rPr lang="en-US" sz="3499" b="0" i="0" u="none" strike="noStrike" cap="none" dirty="0">
+                <a:solidFill>
+                  <a:srgbClr val="000000"/>
+                </a:solidFill>
+                <a:latin typeface="Times New Roman"/>
+                <a:ea typeface="Times New Roman"/>
+                <a:cs typeface="Times New Roman"/>
+                <a:sym typeface="Times New Roman"/>
               </a:rPr>
               <a:t> </a:t>
             </a:r>
             <a:r>
-              <a:rPr lang="en-US" altLang="en-US" sz="3000" i="1" dirty="0" err="1">
-                <a:solidFill>
-                  <a:schemeClr val="tx1"/>
-                </a:solidFill>
+              <a:rPr lang="en-US" sz="3499" b="0" i="0" u="none" strike="noStrike" cap="none" dirty="0" err="1">
+                <a:solidFill>
+                  <a:srgbClr val="000000"/>
+                </a:solidFill>
+                <a:latin typeface="Times New Roman"/>
+                <a:ea typeface="Times New Roman"/>
+                <a:cs typeface="Times New Roman"/>
+                <a:sym typeface="Times New Roman"/>
+              </a:rPr>
+              <a:t>STacK</a:t>
+            </a:r>
+            <a:r>
+              <a:rPr lang="en-US" sz="3499" b="0" i="0" u="none" strike="noStrike" cap="none" dirty="0">
+                <a:solidFill>
+                  <a:srgbClr val="000000"/>
+                </a:solidFill>
+                <a:latin typeface="Times New Roman"/>
+                <a:ea typeface="Times New Roman"/>
+                <a:cs typeface="Times New Roman"/>
+                <a:sym typeface="Times New Roman"/>
+              </a:rPr>
+              <a:t>  </a:t>
+            </a:r>
+          </a:p>
+          <a:p>
+            <a:pPr marL="0" marR="0" lvl="0" indent="0" algn="ctr" rtl="0">
+              <a:lnSpc>
+                <a:spcPct val="140011"/>
+              </a:lnSpc>
+              <a:spcBef>
+                <a:spcPts val="0"/>
+              </a:spcBef>
+              <a:spcAft>
+                <a:spcPts val="0"/>
+              </a:spcAft>
+              <a:buClr>
+                <a:srgbClr val="000000"/>
+              </a:buClr>
+              <a:buSzPts val="3499"/>
+              <a:buFont typeface="Arial"/>
+              <a:buNone/>
+            </a:pPr>
+            <a:r>
+              <a:rPr lang="en-IN" dirty="0"/>
+              <a:t> </a:t>
+            </a:r>
+            <a:r>
+              <a:rPr lang="en-IN" sz="1800" b="1" dirty="0"/>
+              <a:t>A multistore  Grocery- Inventory  system  with  Demand  prediction</a:t>
+            </a:r>
+            <a:endParaRPr sz="1800" b="1" i="0" u="none" strike="noStrike" cap="none" dirty="0">
+              <a:solidFill>
+                <a:srgbClr val="000000"/>
+              </a:solidFill>
+              <a:latin typeface="Arial"/>
+              <a:ea typeface="Arial"/>
+              <a:cs typeface="Arial"/>
+              <a:sym typeface="Arial"/>
+            </a:endParaRPr>
+          </a:p>
+        </p:txBody>
+      </p:sp>
+      <p:sp>
+        <p:nvSpPr>
+          <p:cNvPr id="140" name="Google Shape;140;p2"/>
+          <p:cNvSpPr txBox="1"/>
+          <p:nvPr/>
+        </p:nvSpPr>
+        <p:spPr>
+          <a:xfrm>
+            <a:off x="3383283" y="4818070"/>
+            <a:ext cx="6879832" cy="646331"/>
+          </a:xfrm>
+          <a:prstGeom prst="rect">
+            <a:avLst/>
+          </a:prstGeom>
+          <a:noFill/>
+          <a:ln>
+            <a:noFill/>
+          </a:ln>
+        </p:spPr>
+        <p:txBody>
+          <a:bodyPr spcFirstLastPara="1" wrap="square" lIns="0" tIns="0" rIns="0" bIns="0" anchor="t" anchorCtr="0">
+            <a:spAutoFit/>
+          </a:bodyPr>
+          <a:lstStyle/>
+          <a:p>
+            <a:pPr lvl="0">
+              <a:lnSpc>
+                <a:spcPct val="140000"/>
+              </a:lnSpc>
+              <a:buSzPts val="2600"/>
+            </a:pPr>
+            <a:r>
+              <a:rPr lang="en-US" sz="3000" b="0" i="0" u="none" strike="noStrike" cap="none" dirty="0">
+                <a:solidFill>
+                  <a:srgbClr val="000000"/>
+                </a:solidFill>
+                <a:latin typeface="Times New Roman"/>
+                <a:ea typeface="Times New Roman"/>
+                <a:cs typeface="Times New Roman"/>
+                <a:sym typeface="Times New Roman"/>
+              </a:rPr>
+              <a:t>Track No. : </a:t>
+            </a:r>
+            <a:r>
+              <a:rPr lang="en-IN" sz="3000" dirty="0">
                 <a:latin typeface="Times New Roman" panose="02020603050405020304" pitchFamily="18" charset="0"/>
                 <a:cs typeface="Times New Roman" panose="02020603050405020304" pitchFamily="18" charset="0"/>
               </a:rPr>
-              <a:t>InveXa</a:t>
+              <a:t>4 – Mobile &amp; Web Application</a:t>
             </a:r>
-            <a:r>
-              <a:rPr lang="en-US" altLang="en-US" sz="3000" i="1" dirty="0">
-                <a:solidFill>
-                  <a:schemeClr val="tx1"/>
-                </a:solidFill>
-                <a:latin typeface="Times New Roman" panose="02020603050405020304" pitchFamily="18" charset="0"/>
-                <a:cs typeface="Times New Roman" panose="02020603050405020304" pitchFamily="18" charset="0"/>
-              </a:rPr>
-              <a:t> </a:t>
-            </a:r>
-            <a:r>
-              <a:rPr lang="en-US" altLang="en-US" sz="3000" i="1" dirty="0" err="1">
-                <a:solidFill>
-                  <a:schemeClr val="tx1"/>
-                </a:solidFill>
-                <a:latin typeface="Times New Roman" panose="02020603050405020304" pitchFamily="18" charset="0"/>
-                <a:cs typeface="Times New Roman" panose="02020603050405020304" pitchFamily="18" charset="0"/>
-              </a:rPr>
-              <a:t>sTacK</a:t>
-            </a:r>
-            <a:r>
-              <a:rPr lang="en-US" altLang="en-US" sz="3000" dirty="0">
-                <a:solidFill>
-                  <a:schemeClr val="tx1"/>
-                </a:solidFill>
-                <a:latin typeface="Times New Roman" panose="02020603050405020304" pitchFamily="18" charset="0"/>
-                <a:cs typeface="Times New Roman" panose="02020603050405020304" pitchFamily="18" charset="0"/>
-              </a:rPr>
-              <a:t> delivers low-cost, AI-powered inventory management using a lean Node.js architecture.</a:t>
-            </a:r>
-          </a:p>
-          <a:p>
-            <a:pPr lvl="0" eaLnBrk="0" fontAlgn="base" hangingPunct="0">
-              <a:spcBef>
-                <a:spcPct val="0"/>
-              </a:spcBef>
-              <a:spcAft>
-                <a:spcPct val="0"/>
-              </a:spcAft>
-              <a:buClrTx/>
-              <a:buFontTx/>
-              <a:buChar char="•"/>
-            </a:pPr>
-            <a:endParaRPr lang="en-US" altLang="en-US" sz="3000" dirty="0">
+            <a:endParaRPr sz="3000" b="0" i="0" u="none" strike="noStrike" cap="none" dirty="0">
               <a:solidFill>
-                <a:schemeClr val="tx1"/>
+                <a:srgbClr val="000000"/>
               </a:solidFill>
               <a:latin typeface="Times New Roman" panose="02020603050405020304" pitchFamily="18" charset="0"/>
               <a:cs typeface="Times New Roman" panose="02020603050405020304" pitchFamily="18" charset="0"/>
+              <a:sym typeface="Arial"/>
             </a:endParaRPr>
           </a:p>
+        </p:txBody>
+      </p:sp>
+      <p:sp>
+        <p:nvSpPr>
+          <p:cNvPr id="141" name="Google Shape;141;p2"/>
+          <p:cNvSpPr txBox="1"/>
+          <p:nvPr/>
+        </p:nvSpPr>
+        <p:spPr>
+          <a:xfrm>
+            <a:off x="10733855" y="4816694"/>
+            <a:ext cx="2750133" cy="646331"/>
+          </a:xfrm>
+          <a:prstGeom prst="rect">
+            <a:avLst/>
+          </a:prstGeom>
+          <a:noFill/>
+          <a:ln>
+            <a:noFill/>
+          </a:ln>
+        </p:spPr>
+        <p:txBody>
+          <a:bodyPr spcFirstLastPara="1" wrap="square" lIns="0" tIns="0" rIns="0" bIns="0" anchor="t" anchorCtr="0">
+            <a:spAutoFit/>
+          </a:bodyPr>
+          <a:lstStyle/>
           <a:p>
-            <a:pPr lvl="0" eaLnBrk="0" fontAlgn="base" hangingPunct="0">
-              <a:spcBef>
-                <a:spcPct val="0"/>
-              </a:spcBef>
-              <a:spcAft>
-                <a:spcPct val="0"/>
-              </a:spcAft>
-              <a:buClrTx/>
-              <a:buFontTx/>
-              <a:buChar char="•"/>
+            <a:pPr marL="0" marR="0" lvl="0" indent="0" algn="ctr" rtl="0">
+              <a:lnSpc>
+                <a:spcPct val="140000"/>
+              </a:lnSpc>
+              <a:spcBef>
+                <a:spcPts val="0"/>
+              </a:spcBef>
+              <a:spcAft>
+                <a:spcPts val="0"/>
+              </a:spcAft>
+              <a:buClr>
+                <a:srgbClr val="000000"/>
+              </a:buClr>
+              <a:buSzPts val="2600"/>
+              <a:buFont typeface="Arial"/>
+              <a:buNone/>
             </a:pPr>
             <a:r>
-              <a:rPr lang="en-US" altLang="en-US" sz="3000" b="1" dirty="0">
-                <a:solidFill>
-                  <a:schemeClr val="tx1"/>
-                </a:solidFill>
-                <a:latin typeface="Times New Roman" panose="02020603050405020304" pitchFamily="18" charset="0"/>
-                <a:cs typeface="Times New Roman" panose="02020603050405020304" pitchFamily="18" charset="0"/>
+              <a:rPr lang="en-US" sz="3000" b="0" i="0" u="none" strike="noStrike" cap="none" dirty="0">
+                <a:solidFill>
+                  <a:srgbClr val="000000"/>
+                </a:solidFill>
+                <a:latin typeface="Times New Roman"/>
+                <a:ea typeface="Times New Roman"/>
+                <a:cs typeface="Times New Roman"/>
+                <a:sym typeface="Times New Roman"/>
               </a:rPr>
-              <a:t>Core Strengths:</a:t>
+              <a:t>Group No:</a:t>
             </a:r>
             <a:r>
-              <a:rPr lang="en-US" altLang="en-US" sz="3000" dirty="0">
-                <a:solidFill>
-                  <a:schemeClr val="tx1"/>
-                </a:solidFill>
-                <a:latin typeface="Times New Roman" panose="02020603050405020304" pitchFamily="18" charset="0"/>
-                <a:cs typeface="Times New Roman" panose="02020603050405020304" pitchFamily="18" charset="0"/>
+              <a:rPr lang="en-US" sz="3000" dirty="0">
+                <a:latin typeface="Times New Roman"/>
+                <a:ea typeface="Times New Roman"/>
+                <a:cs typeface="Times New Roman"/>
+                <a:sym typeface="Times New Roman"/>
               </a:rPr>
-              <a:t> Secure multi-tenant design with database isolation, JWT-based RBAC, OTP verification, and demand prediction without heavy ML.</a:t>
+              <a:t>13</a:t>
             </a:r>
-          </a:p>
-          <a:p>
-            <a:pPr lvl="0" eaLnBrk="0" fontAlgn="base" hangingPunct="0">
-              <a:spcBef>
-                <a:spcPct val="0"/>
-              </a:spcBef>
-              <a:spcAft>
-                <a:spcPct val="0"/>
-              </a:spcAft>
-              <a:buClrTx/>
-              <a:buFontTx/>
-              <a:buChar char="•"/>
-            </a:pPr>
-            <a:endParaRPr lang="en-US" altLang="en-US" sz="3000" dirty="0">
+            <a:endParaRPr sz="3000" b="0" i="0" u="none" strike="noStrike" cap="none" dirty="0">
               <a:solidFill>
-                <a:schemeClr val="tx1"/>
+                <a:srgbClr val="000000"/>
               </a:solidFill>
-              <a:latin typeface="Times New Roman" panose="02020603050405020304" pitchFamily="18" charset="0"/>
-              <a:cs typeface="Times New Roman" panose="02020603050405020304" pitchFamily="18" charset="0"/>
-            </a:endParaRPr>
-          </a:p>
-          <a:p>
-            <a:pPr lvl="0" eaLnBrk="0" fontAlgn="base" hangingPunct="0">
-              <a:spcBef>
-                <a:spcPct val="0"/>
-              </a:spcBef>
-              <a:spcAft>
-                <a:spcPct val="0"/>
-              </a:spcAft>
-              <a:buClrTx/>
-              <a:buFontTx/>
-              <a:buChar char="•"/>
-            </a:pPr>
-            <a:r>
-              <a:rPr lang="en-US" altLang="en-US" sz="3000" b="1" dirty="0">
-                <a:solidFill>
-                  <a:schemeClr val="tx1"/>
-                </a:solidFill>
-                <a:latin typeface="Times New Roman" panose="02020603050405020304" pitchFamily="18" charset="0"/>
-                <a:cs typeface="Times New Roman" panose="02020603050405020304" pitchFamily="18" charset="0"/>
-              </a:rPr>
-              <a:t>Impact &amp; Future:</a:t>
-            </a:r>
-            <a:r>
-              <a:rPr lang="en-US" altLang="en-US" sz="3000" dirty="0">
-                <a:solidFill>
-                  <a:schemeClr val="tx1"/>
-                </a:solidFill>
-                <a:latin typeface="Times New Roman" panose="02020603050405020304" pitchFamily="18" charset="0"/>
-                <a:cs typeface="Times New Roman" panose="02020603050405020304" pitchFamily="18" charset="0"/>
-              </a:rPr>
-              <a:t> Fully implemented system with scope for advanced forecasting, mobile (PWA) support, and barcode-based management.</a:t>
-            </a:r>
-          </a:p>
-          <a:p>
-            <a:pPr lvl="0" eaLnBrk="0" fontAlgn="base" hangingPunct="0">
-              <a:spcBef>
-                <a:spcPct val="0"/>
-              </a:spcBef>
-              <a:spcAft>
-                <a:spcPct val="0"/>
-              </a:spcAft>
-              <a:buClrTx/>
-            </a:pPr>
-            <a:endParaRPr lang="en-US" altLang="en-US" sz="3000" dirty="0">
-              <a:solidFill>
-                <a:schemeClr val="tx1"/>
-              </a:solidFill>
-              <a:latin typeface="Times New Roman" panose="02020603050405020304" pitchFamily="18" charset="0"/>
-              <a:cs typeface="Times New Roman" panose="02020603050405020304" pitchFamily="18" charset="0"/>
-            </a:endParaRPr>
-          </a:p>
-          <a:p>
-            <a:endParaRPr lang="en-IN" sz="3000" dirty="0">
-              <a:latin typeface="Times New Roman" panose="02020603050405020304" pitchFamily="18" charset="0"/>
-              <a:cs typeface="Times New Roman" panose="02020603050405020304" pitchFamily="18" charset="0"/>
+              <a:latin typeface="Arial"/>
+              <a:ea typeface="Arial"/>
+              <a:cs typeface="Arial"/>
+              <a:sym typeface="Arial"/>
             </a:endParaRPr>
           </a:p>
         </p:txBody>
@@ -18612,7 +16349,7 @@
 </p:sld>
 </file>
 
-<file path=ppt/slides/slide11.xml><?xml version="1.0" encoding="utf-8"?>
+<file path=ppt/slides/slide10.xml><?xml version="1.0" encoding="utf-8"?>
 <p:sld xmlns:a="http://schemas.openxmlformats.org/drawingml/2006/main" xmlns:r="http://schemas.openxmlformats.org/officeDocument/2006/relationships" xmlns:p="http://schemas.openxmlformats.org/presentationml/2006/main">
   <p:cSld>
     <p:spTree>
@@ -19584,78 +17321,6 @@
       </p:sp>
       <p:sp>
         <p:nvSpPr>
-          <p:cNvPr id="359" name="Google Shape;359;p10">
-            <a:extLst>
-              <a:ext uri="{FF2B5EF4-FFF2-40B4-BE49-F238E27FC236}">
-                <a16:creationId xmlns:a16="http://schemas.microsoft.com/office/drawing/2014/main" id="{2207C8FC-4015-9F74-5666-63B4EF1C5511}"/>
-              </a:ext>
-            </a:extLst>
-          </p:cNvPr>
-          <p:cNvSpPr txBox="1"/>
-          <p:nvPr/>
-        </p:nvSpPr>
-        <p:spPr>
-          <a:xfrm>
-            <a:off x="14083144" y="9372600"/>
-            <a:ext cx="4044000" cy="461700"/>
-          </a:xfrm>
-          <a:prstGeom prst="rect">
-            <a:avLst/>
-          </a:prstGeom>
-          <a:noFill/>
-          <a:ln>
-            <a:noFill/>
-          </a:ln>
-        </p:spPr>
-        <p:txBody>
-          <a:bodyPr spcFirstLastPara="1" wrap="square" lIns="0" tIns="0" rIns="0" bIns="0" anchor="t" anchorCtr="0">
-            <a:spAutoFit/>
-          </a:bodyPr>
-          <a:lstStyle/>
-          <a:p>
-            <a:pPr marL="0" marR="0" lvl="0" indent="0" algn="ctr" rtl="0">
-              <a:lnSpc>
-                <a:spcPct val="140000"/>
-              </a:lnSpc>
-              <a:spcBef>
-                <a:spcPts val="0"/>
-              </a:spcBef>
-              <a:spcAft>
-                <a:spcPts val="0"/>
-              </a:spcAft>
-              <a:buClr>
-                <a:srgbClr val="000000"/>
-              </a:buClr>
-              <a:buSzPts val="3000"/>
-              <a:buFont typeface="Arial"/>
-              <a:buNone/>
-            </a:pPr>
-            <a:r>
-              <a:rPr lang="en-US" sz="3000" b="0" i="0" u="none" strike="noStrike" cap="none">
-                <a:solidFill>
-                  <a:srgbClr val="000000"/>
-                </a:solidFill>
-                <a:latin typeface="Times"/>
-                <a:ea typeface="Times"/>
-                <a:cs typeface="Times"/>
-                <a:sym typeface="Times"/>
-              </a:rPr>
-              <a:t>Oscillations'26| VCET</a:t>
-            </a:r>
-            <a:endParaRPr sz="1400" b="0" i="0" u="none" strike="noStrike" cap="none">
-              <a:solidFill>
-                <a:srgbClr val="000000"/>
-              </a:solidFill>
-              <a:latin typeface="Arial"/>
-              <a:ea typeface="Arial"/>
-              <a:cs typeface="Arial"/>
-              <a:sym typeface="Arial"/>
-            </a:endParaRPr>
-          </a:p>
-        </p:txBody>
-      </p:sp>
-      <p:sp>
-        <p:nvSpPr>
           <p:cNvPr id="360" name="Google Shape;360;p10">
             <a:extLst>
               <a:ext uri="{FF2B5EF4-FFF2-40B4-BE49-F238E27FC236}">
@@ -19711,63 +17376,6 @@
           </a:ln>
         </p:spPr>
       </p:sp>
-      <p:sp>
-        <p:nvSpPr>
-          <p:cNvPr id="361" name="Google Shape;361;p10">
-            <a:extLst>
-              <a:ext uri="{FF2B5EF4-FFF2-40B4-BE49-F238E27FC236}">
-                <a16:creationId xmlns:a16="http://schemas.microsoft.com/office/drawing/2014/main" id="{59FB9EAE-A981-AD93-C98E-7A8CF5B19DB9}"/>
-              </a:ext>
-            </a:extLst>
-          </p:cNvPr>
-          <p:cNvSpPr/>
-          <p:nvPr/>
-        </p:nvSpPr>
-        <p:spPr>
-          <a:xfrm>
-            <a:off x="15678323" y="306959"/>
-            <a:ext cx="2278904" cy="1263935"/>
-          </a:xfrm>
-          <a:custGeom>
-            <a:avLst/>
-            <a:gdLst/>
-            <a:ahLst/>
-            <a:cxnLst/>
-            <a:rect l="l" t="t" r="r" b="b"/>
-            <a:pathLst>
-              <a:path w="2278904" h="1263935" extrusionOk="0">
-                <a:moveTo>
-                  <a:pt x="0" y="0"/>
-                </a:moveTo>
-                <a:lnTo>
-                  <a:pt x="2278904" y="0"/>
-                </a:lnTo>
-                <a:lnTo>
-                  <a:pt x="2278904" y="1263935"/>
-                </a:lnTo>
-                <a:lnTo>
-                  <a:pt x="0" y="1263935"/>
-                </a:lnTo>
-                <a:lnTo>
-                  <a:pt x="0" y="0"/>
-                </a:lnTo>
-                <a:close/>
-              </a:path>
-            </a:pathLst>
-          </a:custGeom>
-          <a:blipFill rotWithShape="1">
-            <a:blip r:embed="rId6">
-              <a:alphaModFix amt="85000"/>
-            </a:blip>
-            <a:stretch>
-              <a:fillRect t="-483" b="-482"/>
-            </a:stretch>
-          </a:blipFill>
-          <a:ln>
-            <a:noFill/>
-          </a:ln>
-        </p:spPr>
-      </p:sp>
       <p:pic>
         <p:nvPicPr>
           <p:cNvPr id="4" name="Picture 3">
@@ -19783,7 +17391,7 @@
           <p:nvPr/>
         </p:nvPicPr>
         <p:blipFill>
-          <a:blip r:embed="rId7"/>
+          <a:blip r:embed="rId6"/>
           <a:stretch>
             <a:fillRect/>
           </a:stretch>
@@ -19813,7 +17421,7 @@
           <p:nvPr/>
         </p:nvPicPr>
         <p:blipFill>
-          <a:blip r:embed="rId8"/>
+          <a:blip r:embed="rId7"/>
           <a:stretch>
             <a:fillRect/>
           </a:stretch>
@@ -19841,7 +17449,7 @@
 </p:sld>
 </file>
 
-<file path=ppt/slides/slide12.xml><?xml version="1.0" encoding="utf-8"?>
+<file path=ppt/slides/slide11.xml><?xml version="1.0" encoding="utf-8"?>
 <p:sld xmlns:a="http://schemas.openxmlformats.org/drawingml/2006/main" xmlns:r="http://schemas.openxmlformats.org/officeDocument/2006/relationships" xmlns:p="http://schemas.openxmlformats.org/presentationml/2006/main">
   <p:cSld>
     <p:bg>
@@ -20743,72 +18351,6 @@
       </p:sp>
       <p:sp>
         <p:nvSpPr>
-          <p:cNvPr id="359" name="Google Shape;359;p10"/>
-          <p:cNvSpPr txBox="1"/>
-          <p:nvPr/>
-        </p:nvSpPr>
-        <p:spPr>
-          <a:xfrm>
-            <a:off x="14083144" y="9372600"/>
-            <a:ext cx="4044000" cy="461700"/>
-          </a:xfrm>
-          <a:prstGeom prst="rect">
-            <a:avLst/>
-          </a:prstGeom>
-          <a:noFill/>
-          <a:ln>
-            <a:noFill/>
-          </a:ln>
-        </p:spPr>
-        <p:txBody>
-          <a:bodyPr spcFirstLastPara="1" wrap="square" lIns="0" tIns="0" rIns="0" bIns="0" anchor="t" anchorCtr="0">
-            <a:spAutoFit/>
-          </a:bodyPr>
-          <a:lstStyle/>
-          <a:p>
-            <a:pPr marL="0" marR="0" lvl="0" indent="0" algn="ctr" rtl="0">
-              <a:lnSpc>
-                <a:spcPct val="140000"/>
-              </a:lnSpc>
-              <a:spcBef>
-                <a:spcPts val="0"/>
-              </a:spcBef>
-              <a:spcAft>
-                <a:spcPts val="0"/>
-              </a:spcAft>
-              <a:buClr>
-                <a:srgbClr val="000000"/>
-              </a:buClr>
-              <a:buSzPts val="3000"/>
-              <a:buFont typeface="Arial"/>
-              <a:buNone/>
-            </a:pPr>
-            <a:r>
-              <a:rPr lang="en-US" sz="3000" b="0" i="0" u="none" strike="noStrike" cap="none">
-                <a:solidFill>
-                  <a:srgbClr val="000000"/>
-                </a:solidFill>
-                <a:latin typeface="Times"/>
-                <a:ea typeface="Times"/>
-                <a:cs typeface="Times"/>
-                <a:sym typeface="Times"/>
-              </a:rPr>
-              <a:t>Oscillations'26| VCET</a:t>
-            </a:r>
-            <a:endParaRPr sz="1400" b="0" i="0" u="none" strike="noStrike" cap="none">
-              <a:solidFill>
-                <a:srgbClr val="000000"/>
-              </a:solidFill>
-              <a:latin typeface="Arial"/>
-              <a:ea typeface="Arial"/>
-              <a:cs typeface="Arial"/>
-              <a:sym typeface="Arial"/>
-            </a:endParaRPr>
-          </a:p>
-        </p:txBody>
-      </p:sp>
-      <p:sp>
-        <p:nvSpPr>
           <p:cNvPr id="360" name="Google Shape;360;p10"/>
           <p:cNvSpPr/>
           <p:nvPr/>
@@ -20851,57 +18393,6 @@
             </a:blip>
             <a:stretch>
               <a:fillRect/>
-            </a:stretch>
-          </a:blipFill>
-          <a:ln>
-            <a:noFill/>
-          </a:ln>
-        </p:spPr>
-      </p:sp>
-      <p:sp>
-        <p:nvSpPr>
-          <p:cNvPr id="361" name="Google Shape;361;p10"/>
-          <p:cNvSpPr/>
-          <p:nvPr/>
-        </p:nvSpPr>
-        <p:spPr>
-          <a:xfrm>
-            <a:off x="15678323" y="306959"/>
-            <a:ext cx="2278904" cy="1263935"/>
-          </a:xfrm>
-          <a:custGeom>
-            <a:avLst/>
-            <a:gdLst/>
-            <a:ahLst/>
-            <a:cxnLst/>
-            <a:rect l="l" t="t" r="r" b="b"/>
-            <a:pathLst>
-              <a:path w="2278904" h="1263935" extrusionOk="0">
-                <a:moveTo>
-                  <a:pt x="0" y="0"/>
-                </a:moveTo>
-                <a:lnTo>
-                  <a:pt x="2278904" y="0"/>
-                </a:lnTo>
-                <a:lnTo>
-                  <a:pt x="2278904" y="1263935"/>
-                </a:lnTo>
-                <a:lnTo>
-                  <a:pt x="0" y="1263935"/>
-                </a:lnTo>
-                <a:lnTo>
-                  <a:pt x="0" y="0"/>
-                </a:lnTo>
-                <a:close/>
-              </a:path>
-            </a:pathLst>
-          </a:custGeom>
-          <a:blipFill rotWithShape="1">
-            <a:blip r:embed="rId6">
-              <a:alphaModFix amt="85000"/>
-            </a:blip>
-            <a:stretch>
-              <a:fillRect t="-483" b="-482"/>
             </a:stretch>
           </a:blipFill>
           <a:ln>
@@ -20952,7 +18443,7 @@
               <a:rPr lang="en-US" sz="3000" dirty="0">
                 <a:latin typeface="Times New Roman" panose="02020603050405020304" pitchFamily="18" charset="0"/>
                 <a:cs typeface="Times New Roman" panose="02020603050405020304" pitchFamily="18" charset="0"/>
-                <a:hlinkClick r:id="rId7"/>
+                <a:hlinkClick r:id="rId6"/>
               </a:rPr>
               <a:t>Read on MongoDB</a:t>
             </a:r>
@@ -20987,7 +18478,7 @@
               <a:rPr lang="en-US" sz="3000" dirty="0">
                 <a:latin typeface="Times New Roman" panose="02020603050405020304" pitchFamily="18" charset="0"/>
                 <a:cs typeface="Times New Roman" panose="02020603050405020304" pitchFamily="18" charset="0"/>
-                <a:hlinkClick r:id="rId8"/>
+                <a:hlinkClick r:id="rId7"/>
               </a:rPr>
               <a:t>Read on OWASP</a:t>
             </a:r>
@@ -21022,7 +18513,7 @@
               <a:rPr lang="en-US" sz="3000" dirty="0">
                 <a:latin typeface="Times New Roman" panose="02020603050405020304" pitchFamily="18" charset="0"/>
                 <a:cs typeface="Times New Roman" panose="02020603050405020304" pitchFamily="18" charset="0"/>
-                <a:hlinkClick r:id="rId9"/>
+                <a:hlinkClick r:id="rId8"/>
               </a:rPr>
               <a:t>Read on Nodejs</a:t>
             </a:r>
@@ -21057,7 +18548,7 @@
               <a:rPr lang="en-US" sz="3000" dirty="0">
                 <a:latin typeface="Times New Roman" panose="02020603050405020304" pitchFamily="18" charset="0"/>
                 <a:cs typeface="Times New Roman" panose="02020603050405020304" pitchFamily="18" charset="0"/>
-                <a:hlinkClick r:id="rId10"/>
+                <a:hlinkClick r:id="rId9"/>
               </a:rPr>
               <a:t>Read on JWT</a:t>
             </a:r>
@@ -21077,1339 +18568,6 @@
 </file>
 
 <file path=ppt/slides/slide2.xml><?xml version="1.0" encoding="utf-8"?>
-<p:sld xmlns:a="http://schemas.openxmlformats.org/drawingml/2006/main" xmlns:r="http://schemas.openxmlformats.org/officeDocument/2006/relationships" xmlns:p="http://schemas.openxmlformats.org/presentationml/2006/main">
-  <p:cSld>
-    <p:bg>
-      <p:bgPr>
-        <a:solidFill>
-          <a:srgbClr val="F4EDFB"/>
-        </a:solidFill>
-        <a:effectLst/>
-      </p:bgPr>
-    </p:bg>
-    <p:spTree>
-      <p:nvGrpSpPr>
-        <p:cNvPr id="1" name="Shape 123"/>
-        <p:cNvGrpSpPr/>
-        <p:nvPr/>
-      </p:nvGrpSpPr>
-      <p:grpSpPr>
-        <a:xfrm>
-          <a:off x="0" y="0"/>
-          <a:ext cx="0" cy="0"/>
-          <a:chOff x="0" y="0"/>
-          <a:chExt cx="0" cy="0"/>
-        </a:xfrm>
-      </p:grpSpPr>
-      <p:sp>
-        <p:nvSpPr>
-          <p:cNvPr id="124" name="Google Shape;124;p2"/>
-          <p:cNvSpPr/>
-          <p:nvPr/>
-        </p:nvSpPr>
-        <p:spPr>
-          <a:xfrm rot="-5400000">
-            <a:off x="2915845" y="6786337"/>
-            <a:ext cx="4729037" cy="7048700"/>
-          </a:xfrm>
-          <a:custGeom>
-            <a:avLst/>
-            <a:gdLst/>
-            <a:ahLst/>
-            <a:cxnLst/>
-            <a:rect l="l" t="t" r="r" b="b"/>
-            <a:pathLst>
-              <a:path w="4729037" h="7048700" extrusionOk="0">
-                <a:moveTo>
-                  <a:pt x="0" y="0"/>
-                </a:moveTo>
-                <a:lnTo>
-                  <a:pt x="4729037" y="0"/>
-                </a:lnTo>
-                <a:lnTo>
-                  <a:pt x="4729037" y="7048700"/>
-                </a:lnTo>
-                <a:lnTo>
-                  <a:pt x="0" y="7048700"/>
-                </a:lnTo>
-                <a:lnTo>
-                  <a:pt x="0" y="0"/>
-                </a:lnTo>
-                <a:close/>
-              </a:path>
-            </a:pathLst>
-          </a:custGeom>
-          <a:blipFill rotWithShape="1">
-            <a:blip r:embed="rId3">
-              <a:alphaModFix amt="17000"/>
-            </a:blip>
-            <a:stretch>
-              <a:fillRect/>
-            </a:stretch>
-          </a:blipFill>
-          <a:ln>
-            <a:noFill/>
-          </a:ln>
-        </p:spPr>
-      </p:sp>
-      <p:grpSp>
-        <p:nvGrpSpPr>
-          <p:cNvPr id="125" name="Google Shape;125;p2"/>
-          <p:cNvGrpSpPr/>
-          <p:nvPr/>
-        </p:nvGrpSpPr>
-        <p:grpSpPr>
-          <a:xfrm>
-            <a:off x="1028700" y="739376"/>
-            <a:ext cx="16230707" cy="8518979"/>
-            <a:chOff x="0" y="-76200"/>
-            <a:chExt cx="4274726" cy="2243667"/>
-          </a:xfrm>
-        </p:grpSpPr>
-        <p:sp>
-          <p:nvSpPr>
-            <p:cNvPr id="126" name="Google Shape;126;p2"/>
-            <p:cNvSpPr/>
-            <p:nvPr/>
-          </p:nvSpPr>
-          <p:spPr>
-            <a:xfrm>
-              <a:off x="0" y="0"/>
-              <a:ext cx="4274726" cy="2167467"/>
-            </a:xfrm>
-            <a:custGeom>
-              <a:avLst/>
-              <a:gdLst/>
-              <a:ahLst/>
-              <a:cxnLst/>
-              <a:rect l="l" t="t" r="r" b="b"/>
-              <a:pathLst>
-                <a:path w="4274726" h="2167467" extrusionOk="0">
-                  <a:moveTo>
-                    <a:pt x="24327" y="0"/>
-                  </a:moveTo>
-                  <a:lnTo>
-                    <a:pt x="4250399" y="0"/>
-                  </a:lnTo>
-                  <a:cubicBezTo>
-                    <a:pt x="4263834" y="0"/>
-                    <a:pt x="4274726" y="10891"/>
-                    <a:pt x="4274726" y="24327"/>
-                  </a:cubicBezTo>
-                  <a:lnTo>
-                    <a:pt x="4274726" y="2143140"/>
-                  </a:lnTo>
-                  <a:cubicBezTo>
-                    <a:pt x="4274726" y="2156575"/>
-                    <a:pt x="4263834" y="2167467"/>
-                    <a:pt x="4250399" y="2167467"/>
-                  </a:cubicBezTo>
-                  <a:lnTo>
-                    <a:pt x="24327" y="2167467"/>
-                  </a:lnTo>
-                  <a:cubicBezTo>
-                    <a:pt x="10891" y="2167467"/>
-                    <a:pt x="0" y="2156575"/>
-                    <a:pt x="0" y="2143140"/>
-                  </a:cubicBezTo>
-                  <a:lnTo>
-                    <a:pt x="0" y="24327"/>
-                  </a:lnTo>
-                  <a:cubicBezTo>
-                    <a:pt x="0" y="10891"/>
-                    <a:pt x="10891" y="0"/>
-                    <a:pt x="24327" y="0"/>
-                  </a:cubicBezTo>
-                  <a:close/>
-                </a:path>
-              </a:pathLst>
-            </a:custGeom>
-            <a:solidFill>
-              <a:srgbClr val="FDFBFF"/>
-            </a:solidFill>
-            <a:ln>
-              <a:noFill/>
-            </a:ln>
-          </p:spPr>
-          <p:txBody>
-            <a:bodyPr spcFirstLastPara="1" wrap="square" lIns="91425" tIns="91425" rIns="91425" bIns="91425" anchor="ctr" anchorCtr="0">
-              <a:noAutofit/>
-            </a:bodyPr>
-            <a:lstStyle/>
-            <a:p>
-              <a:pPr marL="0" marR="0" lvl="0" indent="0" algn="l" rtl="0">
-                <a:lnSpc>
-                  <a:spcPct val="100000"/>
-                </a:lnSpc>
-                <a:spcBef>
-                  <a:spcPts val="0"/>
-                </a:spcBef>
-                <a:spcAft>
-                  <a:spcPts val="0"/>
-                </a:spcAft>
-                <a:buClr>
-                  <a:srgbClr val="000000"/>
-                </a:buClr>
-                <a:buSzPts val="1400"/>
-                <a:buFont typeface="Arial"/>
-                <a:buNone/>
-              </a:pPr>
-              <a:endParaRPr sz="1400" b="0" i="0" u="none" strike="noStrike" cap="none">
-                <a:solidFill>
-                  <a:srgbClr val="000000"/>
-                </a:solidFill>
-                <a:latin typeface="Arial"/>
-                <a:ea typeface="Arial"/>
-                <a:cs typeface="Arial"/>
-                <a:sym typeface="Arial"/>
-              </a:endParaRPr>
-            </a:p>
-          </p:txBody>
-        </p:sp>
-        <p:sp>
-          <p:nvSpPr>
-            <p:cNvPr id="127" name="Google Shape;127;p2"/>
-            <p:cNvSpPr txBox="1"/>
-            <p:nvPr/>
-          </p:nvSpPr>
-          <p:spPr>
-            <a:xfrm>
-              <a:off x="0" y="-76200"/>
-              <a:ext cx="4274726" cy="2243667"/>
-            </a:xfrm>
-            <a:prstGeom prst="rect">
-              <a:avLst/>
-            </a:prstGeom>
-            <a:noFill/>
-            <a:ln>
-              <a:noFill/>
-            </a:ln>
-          </p:spPr>
-          <p:txBody>
-            <a:bodyPr spcFirstLastPara="1" wrap="square" lIns="50800" tIns="50800" rIns="50800" bIns="50800" anchor="ctr" anchorCtr="0">
-              <a:noAutofit/>
-            </a:bodyPr>
-            <a:lstStyle/>
-            <a:p>
-              <a:pPr marL="0" marR="0" lvl="0" indent="0" algn="ctr" rtl="0">
-                <a:lnSpc>
-                  <a:spcPct val="147722"/>
-                </a:lnSpc>
-                <a:spcBef>
-                  <a:spcPts val="0"/>
-                </a:spcBef>
-                <a:spcAft>
-                  <a:spcPts val="0"/>
-                </a:spcAft>
-                <a:buClr>
-                  <a:srgbClr val="000000"/>
-                </a:buClr>
-                <a:buSzPts val="1800"/>
-                <a:buFont typeface="Arial"/>
-                <a:buNone/>
-              </a:pPr>
-              <a:endParaRPr sz="1800" b="0" i="0" u="none" strike="noStrike" cap="none" dirty="0">
-                <a:solidFill>
-                  <a:schemeClr val="dk1"/>
-                </a:solidFill>
-                <a:latin typeface="Calibri"/>
-                <a:ea typeface="Calibri"/>
-                <a:cs typeface="Calibri"/>
-                <a:sym typeface="Calibri"/>
-              </a:endParaRPr>
-            </a:p>
-            <a:p>
-              <a:pPr marL="0" marR="0" lvl="0" indent="0" algn="ctr" rtl="0">
-                <a:lnSpc>
-                  <a:spcPct val="147722"/>
-                </a:lnSpc>
-                <a:spcBef>
-                  <a:spcPts val="0"/>
-                </a:spcBef>
-                <a:spcAft>
-                  <a:spcPts val="0"/>
-                </a:spcAft>
-                <a:buClr>
-                  <a:srgbClr val="000000"/>
-                </a:buClr>
-                <a:buSzPts val="1800"/>
-                <a:buFont typeface="Arial"/>
-                <a:buNone/>
-              </a:pPr>
-              <a:endParaRPr sz="1800" b="0" i="0" u="none" strike="noStrike" cap="none" dirty="0">
-                <a:solidFill>
-                  <a:schemeClr val="dk1"/>
-                </a:solidFill>
-                <a:latin typeface="Calibri"/>
-                <a:ea typeface="Calibri"/>
-                <a:cs typeface="Calibri"/>
-                <a:sym typeface="Calibri"/>
-              </a:endParaRPr>
-            </a:p>
-            <a:p>
-              <a:pPr marL="0" marR="0" lvl="0" indent="0" algn="ctr" rtl="0">
-                <a:lnSpc>
-                  <a:spcPct val="147722"/>
-                </a:lnSpc>
-                <a:spcBef>
-                  <a:spcPts val="0"/>
-                </a:spcBef>
-                <a:spcAft>
-                  <a:spcPts val="0"/>
-                </a:spcAft>
-                <a:buClr>
-                  <a:srgbClr val="000000"/>
-                </a:buClr>
-                <a:buSzPts val="1800"/>
-                <a:buFont typeface="Arial"/>
-                <a:buNone/>
-              </a:pPr>
-              <a:endParaRPr sz="1800" b="0" i="0" u="none" strike="noStrike" cap="none" dirty="0">
-                <a:solidFill>
-                  <a:schemeClr val="dk1"/>
-                </a:solidFill>
-                <a:latin typeface="Calibri"/>
-                <a:ea typeface="Calibri"/>
-                <a:cs typeface="Calibri"/>
-                <a:sym typeface="Calibri"/>
-              </a:endParaRPr>
-            </a:p>
-          </p:txBody>
-        </p:sp>
-      </p:grpSp>
-      <p:sp>
-        <p:nvSpPr>
-          <p:cNvPr id="128" name="Google Shape;128;p2"/>
-          <p:cNvSpPr/>
-          <p:nvPr/>
-        </p:nvSpPr>
-        <p:spPr>
-          <a:xfrm>
-            <a:off x="14083144" y="8450319"/>
-            <a:ext cx="2448843" cy="405172"/>
-          </a:xfrm>
-          <a:custGeom>
-            <a:avLst/>
-            <a:gdLst/>
-            <a:ahLst/>
-            <a:cxnLst/>
-            <a:rect l="l" t="t" r="r" b="b"/>
-            <a:pathLst>
-              <a:path w="2448843" h="405172" extrusionOk="0">
-                <a:moveTo>
-                  <a:pt x="0" y="0"/>
-                </a:moveTo>
-                <a:lnTo>
-                  <a:pt x="2448843" y="0"/>
-                </a:lnTo>
-                <a:lnTo>
-                  <a:pt x="2448843" y="405172"/>
-                </a:lnTo>
-                <a:lnTo>
-                  <a:pt x="0" y="405172"/>
-                </a:lnTo>
-                <a:lnTo>
-                  <a:pt x="0" y="0"/>
-                </a:lnTo>
-                <a:close/>
-              </a:path>
-            </a:pathLst>
-          </a:custGeom>
-          <a:blipFill rotWithShape="1">
-            <a:blip r:embed="rId4">
-              <a:alphaModFix/>
-            </a:blip>
-            <a:stretch>
-              <a:fillRect/>
-            </a:stretch>
-          </a:blipFill>
-          <a:ln>
-            <a:noFill/>
-          </a:ln>
-        </p:spPr>
-      </p:sp>
-      <p:grpSp>
-        <p:nvGrpSpPr>
-          <p:cNvPr id="129" name="Google Shape;129;p2"/>
-          <p:cNvGrpSpPr/>
-          <p:nvPr/>
-        </p:nvGrpSpPr>
-        <p:grpSpPr>
-          <a:xfrm>
-            <a:off x="4832659" y="4543737"/>
-            <a:ext cx="7944109" cy="1539784"/>
-            <a:chOff x="0" y="-76200"/>
-            <a:chExt cx="2092276" cy="405540"/>
-          </a:xfrm>
-        </p:grpSpPr>
-        <p:sp>
-          <p:nvSpPr>
-            <p:cNvPr id="130" name="Google Shape;130;p2"/>
-            <p:cNvSpPr/>
-            <p:nvPr/>
-          </p:nvSpPr>
-          <p:spPr>
-            <a:xfrm>
-              <a:off x="0" y="0"/>
-              <a:ext cx="2092276" cy="329340"/>
-            </a:xfrm>
-            <a:custGeom>
-              <a:avLst/>
-              <a:gdLst/>
-              <a:ahLst/>
-              <a:cxnLst/>
-              <a:rect l="l" t="t" r="r" b="b"/>
-              <a:pathLst>
-                <a:path w="2092276" h="329340" extrusionOk="0">
-                  <a:moveTo>
-                    <a:pt x="0" y="0"/>
-                  </a:moveTo>
-                  <a:lnTo>
-                    <a:pt x="2092276" y="0"/>
-                  </a:lnTo>
-                  <a:lnTo>
-                    <a:pt x="2092276" y="329340"/>
-                  </a:lnTo>
-                  <a:lnTo>
-                    <a:pt x="0" y="329340"/>
-                  </a:lnTo>
-                  <a:close/>
-                </a:path>
-              </a:pathLst>
-            </a:custGeom>
-            <a:solidFill>
-              <a:srgbClr val="EAD6FF"/>
-            </a:solidFill>
-            <a:ln>
-              <a:noFill/>
-            </a:ln>
-          </p:spPr>
-        </p:sp>
-        <p:sp>
-          <p:nvSpPr>
-            <p:cNvPr id="131" name="Google Shape;131;p2"/>
-            <p:cNvSpPr txBox="1"/>
-            <p:nvPr/>
-          </p:nvSpPr>
-          <p:spPr>
-            <a:xfrm>
-              <a:off x="0" y="-76200"/>
-              <a:ext cx="2092276" cy="405540"/>
-            </a:xfrm>
-            <a:prstGeom prst="rect">
-              <a:avLst/>
-            </a:prstGeom>
-            <a:noFill/>
-            <a:ln>
-              <a:noFill/>
-            </a:ln>
-          </p:spPr>
-          <p:txBody>
-            <a:bodyPr spcFirstLastPara="1" wrap="square" lIns="50800" tIns="50800" rIns="50800" bIns="50800" anchor="ctr" anchorCtr="0">
-              <a:noAutofit/>
-            </a:bodyPr>
-            <a:lstStyle/>
-            <a:p>
-              <a:pPr marL="0" marR="0" lvl="0" indent="0" algn="ctr" rtl="0">
-                <a:lnSpc>
-                  <a:spcPct val="147722"/>
-                </a:lnSpc>
-                <a:spcBef>
-                  <a:spcPts val="0"/>
-                </a:spcBef>
-                <a:spcAft>
-                  <a:spcPts val="0"/>
-                </a:spcAft>
-                <a:buClr>
-                  <a:srgbClr val="000000"/>
-                </a:buClr>
-                <a:buSzPts val="1800"/>
-                <a:buFont typeface="Arial"/>
-                <a:buNone/>
-              </a:pPr>
-              <a:endParaRPr sz="1800" b="0" i="0" u="none" strike="noStrike" cap="none">
-                <a:solidFill>
-                  <a:schemeClr val="dk1"/>
-                </a:solidFill>
-                <a:latin typeface="Calibri"/>
-                <a:ea typeface="Calibri"/>
-                <a:cs typeface="Calibri"/>
-                <a:sym typeface="Calibri"/>
-              </a:endParaRPr>
-            </a:p>
-          </p:txBody>
-        </p:sp>
-      </p:grpSp>
-      <p:sp>
-        <p:nvSpPr>
-          <p:cNvPr id="132" name="Google Shape;132;p2"/>
-          <p:cNvSpPr txBox="1"/>
-          <p:nvPr/>
-        </p:nvSpPr>
-        <p:spPr>
-          <a:xfrm>
-            <a:off x="689414" y="1334356"/>
-            <a:ext cx="16230600" cy="307800"/>
-          </a:xfrm>
-          <a:prstGeom prst="rect">
-            <a:avLst/>
-          </a:prstGeom>
-          <a:noFill/>
-          <a:ln>
-            <a:noFill/>
-          </a:ln>
-        </p:spPr>
-        <p:txBody>
-          <a:bodyPr spcFirstLastPara="1" wrap="square" lIns="0" tIns="0" rIns="0" bIns="0" anchor="t" anchorCtr="0">
-            <a:spAutoFit/>
-          </a:bodyPr>
-          <a:lstStyle/>
-          <a:p>
-            <a:pPr marL="0" marR="0" lvl="0" indent="0" algn="ctr" rtl="0">
-              <a:lnSpc>
-                <a:spcPct val="140000"/>
-              </a:lnSpc>
-              <a:spcBef>
-                <a:spcPts val="0"/>
-              </a:spcBef>
-              <a:spcAft>
-                <a:spcPts val="0"/>
-              </a:spcAft>
-              <a:buClr>
-                <a:srgbClr val="000000"/>
-              </a:buClr>
-              <a:buSzPts val="2000"/>
-              <a:buFont typeface="Arial"/>
-              <a:buNone/>
-            </a:pPr>
-            <a:r>
-              <a:rPr lang="en-US" sz="2000" b="0" i="0" u="none" strike="noStrike" cap="none">
-                <a:solidFill>
-                  <a:srgbClr val="000000"/>
-                </a:solidFill>
-                <a:latin typeface="Times New Roman"/>
-                <a:ea typeface="Times New Roman"/>
-                <a:cs typeface="Times New Roman"/>
-                <a:sym typeface="Times New Roman"/>
-              </a:rPr>
-              <a:t> (Auto</a:t>
-            </a:r>
-            <a:r>
-              <a:rPr lang="en-US" sz="2000">
-                <a:latin typeface="Times New Roman"/>
-                <a:ea typeface="Times New Roman"/>
-                <a:cs typeface="Times New Roman"/>
-                <a:sym typeface="Times New Roman"/>
-              </a:rPr>
-              <a:t>nomous Institute </a:t>
-            </a:r>
-            <a:r>
-              <a:rPr lang="en-US" sz="2000" b="0" i="0" u="none" strike="noStrike" cap="none">
-                <a:solidFill>
-                  <a:srgbClr val="000000"/>
-                </a:solidFill>
-                <a:latin typeface="Times New Roman"/>
-                <a:ea typeface="Times New Roman"/>
-                <a:cs typeface="Times New Roman"/>
-                <a:sym typeface="Times New Roman"/>
-              </a:rPr>
-              <a:t>Affiliated to University of Mumbai)</a:t>
-            </a:r>
-            <a:endParaRPr sz="1400" b="0" i="0" u="none" strike="noStrike" cap="none">
-              <a:solidFill>
-                <a:srgbClr val="000000"/>
-              </a:solidFill>
-              <a:latin typeface="Arial"/>
-              <a:ea typeface="Arial"/>
-              <a:cs typeface="Arial"/>
-              <a:sym typeface="Arial"/>
-            </a:endParaRPr>
-          </a:p>
-        </p:txBody>
-      </p:sp>
-      <p:sp>
-        <p:nvSpPr>
-          <p:cNvPr id="133" name="Google Shape;133;p2"/>
-          <p:cNvSpPr/>
-          <p:nvPr/>
-        </p:nvSpPr>
-        <p:spPr>
-          <a:xfrm>
-            <a:off x="689414" y="154282"/>
-            <a:ext cx="1713069" cy="1643692"/>
-          </a:xfrm>
-          <a:custGeom>
-            <a:avLst/>
-            <a:gdLst/>
-            <a:ahLst/>
-            <a:cxnLst/>
-            <a:rect l="l" t="t" r="r" b="b"/>
-            <a:pathLst>
-              <a:path w="1713069" h="1643692" extrusionOk="0">
-                <a:moveTo>
-                  <a:pt x="0" y="0"/>
-                </a:moveTo>
-                <a:lnTo>
-                  <a:pt x="1713068" y="0"/>
-                </a:lnTo>
-                <a:lnTo>
-                  <a:pt x="1713068" y="1643692"/>
-                </a:lnTo>
-                <a:lnTo>
-                  <a:pt x="0" y="1643692"/>
-                </a:lnTo>
-                <a:lnTo>
-                  <a:pt x="0" y="0"/>
-                </a:lnTo>
-                <a:close/>
-              </a:path>
-            </a:pathLst>
-          </a:custGeom>
-          <a:blipFill rotWithShape="1">
-            <a:blip r:embed="rId5">
-              <a:alphaModFix/>
-            </a:blip>
-            <a:stretch>
-              <a:fillRect/>
-            </a:stretch>
-          </a:blipFill>
-          <a:ln>
-            <a:noFill/>
-          </a:ln>
-        </p:spPr>
-      </p:sp>
-      <p:sp>
-        <p:nvSpPr>
-          <p:cNvPr id="134" name="Google Shape;134;p2"/>
-          <p:cNvSpPr/>
-          <p:nvPr/>
-        </p:nvSpPr>
-        <p:spPr>
-          <a:xfrm>
-            <a:off x="15678323" y="306959"/>
-            <a:ext cx="2278904" cy="1263935"/>
-          </a:xfrm>
-          <a:custGeom>
-            <a:avLst/>
-            <a:gdLst/>
-            <a:ahLst/>
-            <a:cxnLst/>
-            <a:rect l="l" t="t" r="r" b="b"/>
-            <a:pathLst>
-              <a:path w="2278904" h="1263935" extrusionOk="0">
-                <a:moveTo>
-                  <a:pt x="0" y="0"/>
-                </a:moveTo>
-                <a:lnTo>
-                  <a:pt x="2278904" y="0"/>
-                </a:lnTo>
-                <a:lnTo>
-                  <a:pt x="2278904" y="1263935"/>
-                </a:lnTo>
-                <a:lnTo>
-                  <a:pt x="0" y="1263935"/>
-                </a:lnTo>
-                <a:lnTo>
-                  <a:pt x="0" y="0"/>
-                </a:lnTo>
-                <a:close/>
-              </a:path>
-            </a:pathLst>
-          </a:custGeom>
-          <a:blipFill rotWithShape="1">
-            <a:blip r:embed="rId6">
-              <a:alphaModFix amt="85000"/>
-            </a:blip>
-            <a:stretch>
-              <a:fillRect t="-483" b="-482"/>
-            </a:stretch>
-          </a:blipFill>
-          <a:ln>
-            <a:noFill/>
-          </a:ln>
-        </p:spPr>
-      </p:sp>
-      <p:sp>
-        <p:nvSpPr>
-          <p:cNvPr id="135" name="Google Shape;135;p2"/>
-          <p:cNvSpPr txBox="1"/>
-          <p:nvPr/>
-        </p:nvSpPr>
-        <p:spPr>
-          <a:xfrm>
-            <a:off x="14083144" y="9372600"/>
-            <a:ext cx="4044000" cy="461700"/>
-          </a:xfrm>
-          <a:prstGeom prst="rect">
-            <a:avLst/>
-          </a:prstGeom>
-          <a:noFill/>
-          <a:ln>
-            <a:noFill/>
-          </a:ln>
-        </p:spPr>
-        <p:txBody>
-          <a:bodyPr spcFirstLastPara="1" wrap="square" lIns="0" tIns="0" rIns="0" bIns="0" anchor="t" anchorCtr="0">
-            <a:spAutoFit/>
-          </a:bodyPr>
-          <a:lstStyle/>
-          <a:p>
-            <a:pPr marL="0" marR="0" lvl="0" indent="0" algn="ctr" rtl="0">
-              <a:lnSpc>
-                <a:spcPct val="140000"/>
-              </a:lnSpc>
-              <a:spcBef>
-                <a:spcPts val="0"/>
-              </a:spcBef>
-              <a:spcAft>
-                <a:spcPts val="0"/>
-              </a:spcAft>
-              <a:buClr>
-                <a:srgbClr val="000000"/>
-              </a:buClr>
-              <a:buSzPts val="3000"/>
-              <a:buFont typeface="Arial"/>
-              <a:buNone/>
-            </a:pPr>
-            <a:r>
-              <a:rPr lang="en-US" sz="3000" b="0" i="0" u="none" strike="noStrike" cap="none">
-                <a:solidFill>
-                  <a:srgbClr val="000000"/>
-                </a:solidFill>
-                <a:latin typeface="Times"/>
-                <a:ea typeface="Times"/>
-                <a:cs typeface="Times"/>
-                <a:sym typeface="Times"/>
-              </a:rPr>
-              <a:t>Oscillations'2</a:t>
-            </a:r>
-            <a:r>
-              <a:rPr lang="en-US" sz="3000">
-                <a:latin typeface="Times"/>
-                <a:ea typeface="Times"/>
-                <a:cs typeface="Times"/>
-                <a:sym typeface="Times"/>
-              </a:rPr>
-              <a:t>6</a:t>
-            </a:r>
-            <a:r>
-              <a:rPr lang="en-US" sz="3000" b="0" i="0" u="none" strike="noStrike" cap="none">
-                <a:solidFill>
-                  <a:srgbClr val="000000"/>
-                </a:solidFill>
-                <a:latin typeface="Times"/>
-                <a:ea typeface="Times"/>
-                <a:cs typeface="Times"/>
-                <a:sym typeface="Times"/>
-              </a:rPr>
-              <a:t>| VCET</a:t>
-            </a:r>
-            <a:endParaRPr sz="1400" b="0" i="0" u="none" strike="noStrike" cap="none">
-              <a:solidFill>
-                <a:srgbClr val="000000"/>
-              </a:solidFill>
-              <a:latin typeface="Arial"/>
-              <a:ea typeface="Arial"/>
-              <a:cs typeface="Arial"/>
-              <a:sym typeface="Arial"/>
-            </a:endParaRPr>
-          </a:p>
-        </p:txBody>
-      </p:sp>
-      <p:sp>
-        <p:nvSpPr>
-          <p:cNvPr id="136" name="Google Shape;136;p2"/>
-          <p:cNvSpPr txBox="1"/>
-          <p:nvPr/>
-        </p:nvSpPr>
-        <p:spPr>
-          <a:xfrm>
-            <a:off x="2631082" y="523875"/>
-            <a:ext cx="13025835" cy="504825"/>
-          </a:xfrm>
-          <a:prstGeom prst="rect">
-            <a:avLst/>
-          </a:prstGeom>
-          <a:noFill/>
-          <a:ln>
-            <a:noFill/>
-          </a:ln>
-        </p:spPr>
-        <p:txBody>
-          <a:bodyPr spcFirstLastPara="1" wrap="square" lIns="0" tIns="0" rIns="0" bIns="0" anchor="t" anchorCtr="0">
-            <a:spAutoFit/>
-          </a:bodyPr>
-          <a:lstStyle/>
-          <a:p>
-            <a:pPr marL="0" marR="0" lvl="0" indent="0" algn="ctr" rtl="0">
-              <a:lnSpc>
-                <a:spcPct val="120006"/>
-              </a:lnSpc>
-              <a:spcBef>
-                <a:spcPts val="0"/>
-              </a:spcBef>
-              <a:spcAft>
-                <a:spcPts val="0"/>
-              </a:spcAft>
-              <a:buClr>
-                <a:srgbClr val="000000"/>
-              </a:buClr>
-              <a:buSzPts val="2999"/>
-              <a:buFont typeface="Arial"/>
-              <a:buNone/>
-            </a:pPr>
-            <a:r>
-              <a:rPr lang="en-US" sz="2999" b="1" i="0" u="none" strike="noStrike" cap="none">
-                <a:solidFill>
-                  <a:srgbClr val="000000"/>
-                </a:solidFill>
-                <a:latin typeface="Times"/>
-                <a:ea typeface="Times"/>
-                <a:cs typeface="Times"/>
-                <a:sym typeface="Times"/>
-              </a:rPr>
-              <a:t>VIDYAVARDHINI’S COLLEGE OF ENGINEERING AND TECHNOLOGY</a:t>
-            </a:r>
-            <a:endParaRPr sz="1400" b="0" i="0" u="none" strike="noStrike" cap="none">
-              <a:solidFill>
-                <a:srgbClr val="000000"/>
-              </a:solidFill>
-              <a:latin typeface="Arial"/>
-              <a:ea typeface="Arial"/>
-              <a:cs typeface="Arial"/>
-              <a:sym typeface="Arial"/>
-            </a:endParaRPr>
-          </a:p>
-        </p:txBody>
-      </p:sp>
-      <p:sp>
-        <p:nvSpPr>
-          <p:cNvPr id="137" name="Google Shape;137;p2"/>
-          <p:cNvSpPr txBox="1"/>
-          <p:nvPr/>
-        </p:nvSpPr>
-        <p:spPr>
-          <a:xfrm>
-            <a:off x="3006604" y="928503"/>
-            <a:ext cx="11596219" cy="409575"/>
-          </a:xfrm>
-          <a:prstGeom prst="rect">
-            <a:avLst/>
-          </a:prstGeom>
-          <a:noFill/>
-          <a:ln>
-            <a:noFill/>
-          </a:ln>
-        </p:spPr>
-        <p:txBody>
-          <a:bodyPr spcFirstLastPara="1" wrap="square" lIns="0" tIns="0" rIns="0" bIns="0" anchor="t" anchorCtr="0">
-            <a:spAutoFit/>
-          </a:bodyPr>
-          <a:lstStyle/>
-          <a:p>
-            <a:pPr marL="0" marR="0" lvl="0" indent="0" algn="ctr" rtl="0">
-              <a:lnSpc>
-                <a:spcPct val="120008"/>
-              </a:lnSpc>
-              <a:spcBef>
-                <a:spcPts val="0"/>
-              </a:spcBef>
-              <a:spcAft>
-                <a:spcPts val="0"/>
-              </a:spcAft>
-              <a:buClr>
-                <a:srgbClr val="000000"/>
-              </a:buClr>
-              <a:buSzPts val="2399"/>
-              <a:buFont typeface="Arial"/>
-              <a:buNone/>
-            </a:pPr>
-            <a:r>
-              <a:rPr lang="en-US" sz="2399" b="1" i="0" u="none" strike="noStrike" cap="none">
-                <a:solidFill>
-                  <a:srgbClr val="050A30"/>
-                </a:solidFill>
-                <a:latin typeface="Times"/>
-                <a:ea typeface="Times"/>
-                <a:cs typeface="Times"/>
-                <a:sym typeface="Times"/>
-              </a:rPr>
-              <a:t>(NBA &amp; NAAC Accredited)</a:t>
-            </a:r>
-            <a:endParaRPr sz="1400" b="0" i="0" u="none" strike="noStrike" cap="none">
-              <a:solidFill>
-                <a:srgbClr val="000000"/>
-              </a:solidFill>
-              <a:latin typeface="Arial"/>
-              <a:ea typeface="Arial"/>
-              <a:cs typeface="Arial"/>
-              <a:sym typeface="Arial"/>
-            </a:endParaRPr>
-          </a:p>
-        </p:txBody>
-      </p:sp>
-      <p:sp>
-        <p:nvSpPr>
-          <p:cNvPr id="138" name="Google Shape;138;p2"/>
-          <p:cNvSpPr txBox="1"/>
-          <p:nvPr/>
-        </p:nvSpPr>
-        <p:spPr>
-          <a:xfrm>
-            <a:off x="2827190" y="7207664"/>
-            <a:ext cx="7435925" cy="2714589"/>
-          </a:xfrm>
-          <a:prstGeom prst="rect">
-            <a:avLst/>
-          </a:prstGeom>
-          <a:noFill/>
-          <a:ln>
-            <a:noFill/>
-          </a:ln>
-        </p:spPr>
-        <p:txBody>
-          <a:bodyPr spcFirstLastPara="1" wrap="square" lIns="0" tIns="0" rIns="0" bIns="0" anchor="t" anchorCtr="0">
-            <a:spAutoFit/>
-          </a:bodyPr>
-          <a:lstStyle/>
-          <a:p>
-            <a:pPr lvl="0">
-              <a:lnSpc>
-                <a:spcPct val="140000"/>
-              </a:lnSpc>
-              <a:buSzPts val="2600"/>
-            </a:pPr>
-            <a:r>
-              <a:rPr lang="en-US" sz="2600" b="0" i="0" u="none" strike="noStrike" cap="none" dirty="0">
-                <a:solidFill>
-                  <a:srgbClr val="000000"/>
-                </a:solidFill>
-                <a:latin typeface="Times New Roman" panose="02020603050405020304" pitchFamily="18" charset="0"/>
-                <a:ea typeface="Times New Roman"/>
-                <a:cs typeface="Times New Roman" panose="02020603050405020304" pitchFamily="18" charset="0"/>
-                <a:sym typeface="Times New Roman"/>
-              </a:rPr>
-              <a:t>Group Member: </a:t>
-            </a:r>
-            <a:r>
-              <a:rPr lang="en-IN" sz="2400" b="0" i="0" u="none" strike="noStrike" cap="none" dirty="0">
-                <a:solidFill>
-                  <a:srgbClr val="000000"/>
-                </a:solidFill>
-                <a:latin typeface="Times New Roman" panose="02020603050405020304" pitchFamily="18" charset="0"/>
-                <a:ea typeface="Times New Roman"/>
-                <a:cs typeface="Times New Roman" panose="02020603050405020304" pitchFamily="18" charset="0"/>
-                <a:sym typeface="Times New Roman"/>
-              </a:rPr>
-              <a:t>46</a:t>
-            </a:r>
-            <a:r>
-              <a:rPr lang="en-IN" sz="2400" dirty="0">
-                <a:latin typeface="Times New Roman" panose="02020603050405020304" pitchFamily="18" charset="0"/>
-                <a:cs typeface="Times New Roman" panose="02020603050405020304" pitchFamily="18" charset="0"/>
-              </a:rPr>
-              <a:t>- </a:t>
-            </a:r>
-            <a:r>
-              <a:rPr lang="en-IN" sz="2400" dirty="0" err="1">
-                <a:latin typeface="Times New Roman" panose="02020603050405020304" pitchFamily="18" charset="0"/>
-                <a:cs typeface="Times New Roman" panose="02020603050405020304" pitchFamily="18" charset="0"/>
-              </a:rPr>
-              <a:t>Aklesh</a:t>
-            </a:r>
-            <a:r>
-              <a:rPr lang="en-IN" sz="2400" dirty="0">
-                <a:latin typeface="Times New Roman" panose="02020603050405020304" pitchFamily="18" charset="0"/>
-                <a:cs typeface="Times New Roman" panose="02020603050405020304" pitchFamily="18" charset="0"/>
-              </a:rPr>
-              <a:t> Harijan</a:t>
-            </a:r>
-          </a:p>
-          <a:p>
-            <a:pPr lvl="0">
-              <a:lnSpc>
-                <a:spcPct val="140000"/>
-              </a:lnSpc>
-              <a:buSzPts val="2600"/>
-            </a:pPr>
-            <a:r>
-              <a:rPr lang="en-IN" sz="2400" dirty="0">
-                <a:latin typeface="Times New Roman" panose="02020603050405020304" pitchFamily="18" charset="0"/>
-                <a:cs typeface="Times New Roman" panose="02020603050405020304" pitchFamily="18" charset="0"/>
-              </a:rPr>
-              <a:t>		     49- Sanskar Jadhav </a:t>
-            </a:r>
-          </a:p>
-          <a:p>
-            <a:pPr lvl="1">
-              <a:lnSpc>
-                <a:spcPct val="140000"/>
-              </a:lnSpc>
-              <a:buSzPts val="2600"/>
-            </a:pPr>
-            <a:r>
-              <a:rPr lang="en-IN" sz="2400" dirty="0">
-                <a:latin typeface="Times New Roman" panose="02020603050405020304" pitchFamily="18" charset="0"/>
-                <a:cs typeface="Times New Roman" panose="02020603050405020304" pitchFamily="18" charset="0"/>
-              </a:rPr>
-              <a:t>		     50- Samyak Jagtap </a:t>
-            </a:r>
-          </a:p>
-          <a:p>
-            <a:pPr lvl="1">
-              <a:lnSpc>
-                <a:spcPct val="140000"/>
-              </a:lnSpc>
-              <a:buSzPts val="2600"/>
-            </a:pPr>
-            <a:r>
-              <a:rPr lang="en-IN" sz="2400" dirty="0">
-                <a:latin typeface="Times New Roman" panose="02020603050405020304" pitchFamily="18" charset="0"/>
-                <a:cs typeface="Times New Roman" panose="02020603050405020304" pitchFamily="18" charset="0"/>
-              </a:rPr>
-              <a:t>		     52- Abhishek </a:t>
-            </a:r>
-            <a:r>
-              <a:rPr lang="en-IN" sz="2400" dirty="0" err="1">
-                <a:latin typeface="Times New Roman" panose="02020603050405020304" pitchFamily="18" charset="0"/>
-                <a:cs typeface="Times New Roman" panose="02020603050405020304" pitchFamily="18" charset="0"/>
-              </a:rPr>
-              <a:t>Jambhale</a:t>
-            </a:r>
-            <a:endParaRPr lang="en-US" sz="2600" b="0" i="0" u="none" strike="noStrike" cap="none" dirty="0">
-              <a:solidFill>
-                <a:srgbClr val="000000"/>
-              </a:solidFill>
-              <a:latin typeface="Times New Roman" panose="02020603050405020304" pitchFamily="18" charset="0"/>
-              <a:ea typeface="Times New Roman"/>
-              <a:cs typeface="Times New Roman" panose="02020603050405020304" pitchFamily="18" charset="0"/>
-              <a:sym typeface="Times New Roman"/>
-            </a:endParaRPr>
-          </a:p>
-          <a:p>
-            <a:pPr lvl="0">
-              <a:lnSpc>
-                <a:spcPct val="140000"/>
-              </a:lnSpc>
-              <a:buSzPts val="2600"/>
-            </a:pPr>
-            <a:endParaRPr sz="2800" b="0" i="0" u="none" strike="noStrike" cap="none" dirty="0">
-              <a:solidFill>
-                <a:srgbClr val="000000"/>
-              </a:solidFill>
-              <a:latin typeface="Arial"/>
-              <a:ea typeface="Arial"/>
-              <a:cs typeface="Arial"/>
-              <a:sym typeface="Arial"/>
-            </a:endParaRPr>
-          </a:p>
-        </p:txBody>
-      </p:sp>
-      <p:sp>
-        <p:nvSpPr>
-          <p:cNvPr id="139" name="Google Shape;139;p2"/>
-          <p:cNvSpPr txBox="1"/>
-          <p:nvPr/>
-        </p:nvSpPr>
-        <p:spPr>
-          <a:xfrm>
-            <a:off x="5147585" y="4930025"/>
-            <a:ext cx="6825200" cy="1098570"/>
-          </a:xfrm>
-          <a:prstGeom prst="rect">
-            <a:avLst/>
-          </a:prstGeom>
-          <a:noFill/>
-          <a:ln>
-            <a:noFill/>
-          </a:ln>
-        </p:spPr>
-        <p:txBody>
-          <a:bodyPr spcFirstLastPara="1" wrap="square" lIns="0" tIns="0" rIns="0" bIns="0" anchor="t" anchorCtr="0">
-            <a:spAutoFit/>
-          </a:bodyPr>
-          <a:lstStyle/>
-          <a:p>
-            <a:pPr marL="0" marR="0" lvl="0" indent="0" algn="ctr" rtl="0">
-              <a:lnSpc>
-                <a:spcPct val="140011"/>
-              </a:lnSpc>
-              <a:spcBef>
-                <a:spcPts val="0"/>
-              </a:spcBef>
-              <a:spcAft>
-                <a:spcPts val="0"/>
-              </a:spcAft>
-              <a:buClr>
-                <a:srgbClr val="000000"/>
-              </a:buClr>
-              <a:buSzPts val="3499"/>
-              <a:buFont typeface="Arial"/>
-              <a:buNone/>
-            </a:pPr>
-            <a:r>
-              <a:rPr lang="en-US" sz="3499" b="0" i="0" u="none" strike="noStrike" cap="none" dirty="0">
-                <a:solidFill>
-                  <a:srgbClr val="000000"/>
-                </a:solidFill>
-                <a:latin typeface="Times New Roman"/>
-                <a:ea typeface="Times New Roman"/>
-                <a:cs typeface="Times New Roman"/>
-                <a:sym typeface="Times New Roman"/>
-              </a:rPr>
-              <a:t>Title : </a:t>
-            </a:r>
-            <a:r>
-              <a:rPr lang="en-US" sz="3499" b="0" i="0" u="none" strike="noStrike" cap="none" dirty="0" err="1">
-                <a:solidFill>
-                  <a:srgbClr val="000000"/>
-                </a:solidFill>
-                <a:latin typeface="Times New Roman"/>
-                <a:ea typeface="Times New Roman"/>
-                <a:cs typeface="Times New Roman"/>
-                <a:sym typeface="Times New Roman"/>
-              </a:rPr>
-              <a:t>InveXa</a:t>
-            </a:r>
-            <a:r>
-              <a:rPr lang="en-US" sz="3499" b="0" i="0" u="none" strike="noStrike" cap="none" dirty="0">
-                <a:solidFill>
-                  <a:srgbClr val="000000"/>
-                </a:solidFill>
-                <a:latin typeface="Times New Roman"/>
-                <a:ea typeface="Times New Roman"/>
-                <a:cs typeface="Times New Roman"/>
-                <a:sym typeface="Times New Roman"/>
-              </a:rPr>
-              <a:t> </a:t>
-            </a:r>
-            <a:r>
-              <a:rPr lang="en-US" sz="3499" b="0" i="0" u="none" strike="noStrike" cap="none" dirty="0" err="1">
-                <a:solidFill>
-                  <a:srgbClr val="000000"/>
-                </a:solidFill>
-                <a:latin typeface="Times New Roman"/>
-                <a:ea typeface="Times New Roman"/>
-                <a:cs typeface="Times New Roman"/>
-                <a:sym typeface="Times New Roman"/>
-              </a:rPr>
-              <a:t>STacK</a:t>
-            </a:r>
-            <a:r>
-              <a:rPr lang="en-US" sz="3499" b="0" i="0" u="none" strike="noStrike" cap="none" dirty="0">
-                <a:solidFill>
-                  <a:srgbClr val="000000"/>
-                </a:solidFill>
-                <a:latin typeface="Times New Roman"/>
-                <a:ea typeface="Times New Roman"/>
-                <a:cs typeface="Times New Roman"/>
-                <a:sym typeface="Times New Roman"/>
-              </a:rPr>
-              <a:t>  </a:t>
-            </a:r>
-          </a:p>
-          <a:p>
-            <a:pPr marL="0" marR="0" lvl="0" indent="0" algn="ctr" rtl="0">
-              <a:lnSpc>
-                <a:spcPct val="140011"/>
-              </a:lnSpc>
-              <a:spcBef>
-                <a:spcPts val="0"/>
-              </a:spcBef>
-              <a:spcAft>
-                <a:spcPts val="0"/>
-              </a:spcAft>
-              <a:buClr>
-                <a:srgbClr val="000000"/>
-              </a:buClr>
-              <a:buSzPts val="3499"/>
-              <a:buFont typeface="Arial"/>
-              <a:buNone/>
-            </a:pPr>
-            <a:r>
-              <a:rPr lang="en-IN" dirty="0"/>
-              <a:t> </a:t>
-            </a:r>
-            <a:r>
-              <a:rPr lang="en-IN" sz="1600" b="1" dirty="0"/>
-              <a:t>A multistore  Grocery- Inventory  system  with  Demand  prediction</a:t>
-            </a:r>
-            <a:endParaRPr sz="1400" b="1" i="0" u="none" strike="noStrike" cap="none" dirty="0">
-              <a:solidFill>
-                <a:srgbClr val="000000"/>
-              </a:solidFill>
-              <a:latin typeface="Arial"/>
-              <a:ea typeface="Arial"/>
-              <a:cs typeface="Arial"/>
-              <a:sym typeface="Arial"/>
-            </a:endParaRPr>
-          </a:p>
-        </p:txBody>
-      </p:sp>
-      <p:sp>
-        <p:nvSpPr>
-          <p:cNvPr id="140" name="Google Shape;140;p2"/>
-          <p:cNvSpPr txBox="1"/>
-          <p:nvPr/>
-        </p:nvSpPr>
-        <p:spPr>
-          <a:xfrm>
-            <a:off x="3504754" y="6397847"/>
-            <a:ext cx="6879832" cy="603242"/>
-          </a:xfrm>
-          <a:prstGeom prst="rect">
-            <a:avLst/>
-          </a:prstGeom>
-          <a:noFill/>
-          <a:ln>
-            <a:noFill/>
-          </a:ln>
-        </p:spPr>
-        <p:txBody>
-          <a:bodyPr spcFirstLastPara="1" wrap="square" lIns="0" tIns="0" rIns="0" bIns="0" anchor="t" anchorCtr="0">
-            <a:spAutoFit/>
-          </a:bodyPr>
-          <a:lstStyle/>
-          <a:p>
-            <a:pPr lvl="0">
-              <a:lnSpc>
-                <a:spcPct val="140000"/>
-              </a:lnSpc>
-              <a:buSzPts val="2600"/>
-            </a:pPr>
-            <a:r>
-              <a:rPr lang="en-US" sz="2600" b="0" i="0" u="none" strike="noStrike" cap="none" dirty="0">
-                <a:solidFill>
-                  <a:srgbClr val="000000"/>
-                </a:solidFill>
-                <a:latin typeface="Times New Roman"/>
-                <a:ea typeface="Times New Roman"/>
-                <a:cs typeface="Times New Roman"/>
-                <a:sym typeface="Times New Roman"/>
-              </a:rPr>
-              <a:t>Track No. : </a:t>
-            </a:r>
-            <a:r>
-              <a:rPr lang="en-IN" sz="2800" dirty="0">
-                <a:latin typeface="Times New Roman" panose="02020603050405020304" pitchFamily="18" charset="0"/>
-                <a:cs typeface="Times New Roman" panose="02020603050405020304" pitchFamily="18" charset="0"/>
-              </a:rPr>
-              <a:t>4 – Mobile &amp; Web Application</a:t>
-            </a:r>
-            <a:endParaRPr sz="1400" b="0" i="0" u="none" strike="noStrike" cap="none" dirty="0">
-              <a:solidFill>
-                <a:srgbClr val="000000"/>
-              </a:solidFill>
-              <a:latin typeface="Times New Roman" panose="02020603050405020304" pitchFamily="18" charset="0"/>
-              <a:cs typeface="Times New Roman" panose="02020603050405020304" pitchFamily="18" charset="0"/>
-              <a:sym typeface="Arial"/>
-            </a:endParaRPr>
-          </a:p>
-        </p:txBody>
-      </p:sp>
-      <p:sp>
-        <p:nvSpPr>
-          <p:cNvPr id="141" name="Google Shape;141;p2"/>
-          <p:cNvSpPr txBox="1"/>
-          <p:nvPr/>
-        </p:nvSpPr>
-        <p:spPr>
-          <a:xfrm>
-            <a:off x="10384585" y="6397847"/>
-            <a:ext cx="1988751" cy="560153"/>
-          </a:xfrm>
-          <a:prstGeom prst="rect">
-            <a:avLst/>
-          </a:prstGeom>
-          <a:noFill/>
-          <a:ln>
-            <a:noFill/>
-          </a:ln>
-        </p:spPr>
-        <p:txBody>
-          <a:bodyPr spcFirstLastPara="1" wrap="square" lIns="0" tIns="0" rIns="0" bIns="0" anchor="t" anchorCtr="0">
-            <a:spAutoFit/>
-          </a:bodyPr>
-          <a:lstStyle/>
-          <a:p>
-            <a:pPr marL="0" marR="0" lvl="0" indent="0" algn="ctr" rtl="0">
-              <a:lnSpc>
-                <a:spcPct val="140000"/>
-              </a:lnSpc>
-              <a:spcBef>
-                <a:spcPts val="0"/>
-              </a:spcBef>
-              <a:spcAft>
-                <a:spcPts val="0"/>
-              </a:spcAft>
-              <a:buClr>
-                <a:srgbClr val="000000"/>
-              </a:buClr>
-              <a:buSzPts val="2600"/>
-              <a:buFont typeface="Arial"/>
-              <a:buNone/>
-            </a:pPr>
-            <a:r>
-              <a:rPr lang="en-US" sz="2600" b="0" i="0" u="none" strike="noStrike" cap="none" dirty="0">
-                <a:solidFill>
-                  <a:srgbClr val="000000"/>
-                </a:solidFill>
-                <a:latin typeface="Times New Roman"/>
-                <a:ea typeface="Times New Roman"/>
-                <a:cs typeface="Times New Roman"/>
-                <a:sym typeface="Times New Roman"/>
-              </a:rPr>
-              <a:t>Group No:05</a:t>
-            </a:r>
-            <a:endParaRPr sz="1400" b="0" i="0" u="none" strike="noStrike" cap="none" dirty="0">
-              <a:solidFill>
-                <a:srgbClr val="000000"/>
-              </a:solidFill>
-              <a:latin typeface="Arial"/>
-              <a:ea typeface="Arial"/>
-              <a:cs typeface="Arial"/>
-              <a:sym typeface="Arial"/>
-            </a:endParaRPr>
-          </a:p>
-        </p:txBody>
-      </p:sp>
-      <p:pic>
-        <p:nvPicPr>
-          <p:cNvPr id="142" name="Google Shape;142;p2"/>
-          <p:cNvPicPr preferRelativeResize="0"/>
-          <p:nvPr/>
-        </p:nvPicPr>
-        <p:blipFill>
-          <a:blip r:embed="rId7">
-            <a:alphaModFix/>
-          </a:blip>
-          <a:stretch>
-            <a:fillRect/>
-          </a:stretch>
-        </p:blipFill>
-        <p:spPr>
-          <a:xfrm>
-            <a:off x="4627800" y="2043866"/>
-            <a:ext cx="7864770" cy="2183175"/>
-          </a:xfrm>
-          <a:prstGeom prst="rect">
-            <a:avLst/>
-          </a:prstGeom>
-          <a:noFill/>
-          <a:ln>
-            <a:noFill/>
-          </a:ln>
-        </p:spPr>
-      </p:pic>
-    </p:spTree>
-  </p:cSld>
-  <p:clrMapOvr>
-    <a:masterClrMapping/>
-  </p:clrMapOvr>
-</p:sld>
-</file>
-
-<file path=ppt/slides/slide3.xml><?xml version="1.0" encoding="utf-8"?>
 <p:sld xmlns:a="http://schemas.openxmlformats.org/drawingml/2006/main" xmlns:r="http://schemas.openxmlformats.org/officeDocument/2006/relationships" xmlns:p="http://schemas.openxmlformats.org/presentationml/2006/main">
   <p:cSld>
     <p:bg>
@@ -23323,144 +19481,6 @@
       </p:sp>
       <p:sp>
         <p:nvSpPr>
-          <p:cNvPr id="165" name="Google Shape;165;p3"/>
-          <p:cNvSpPr txBox="1"/>
-          <p:nvPr/>
-        </p:nvSpPr>
-        <p:spPr>
-          <a:xfrm>
-            <a:off x="14083144" y="9372600"/>
-            <a:ext cx="4044000" cy="461700"/>
-          </a:xfrm>
-          <a:prstGeom prst="rect">
-            <a:avLst/>
-          </a:prstGeom>
-          <a:noFill/>
-          <a:ln>
-            <a:noFill/>
-          </a:ln>
-        </p:spPr>
-        <p:txBody>
-          <a:bodyPr spcFirstLastPara="1" wrap="square" lIns="0" tIns="0" rIns="0" bIns="0" anchor="t" anchorCtr="0">
-            <a:spAutoFit/>
-          </a:bodyPr>
-          <a:lstStyle/>
-          <a:p>
-            <a:pPr marL="0" marR="0" lvl="0" indent="0" algn="ctr" rtl="0">
-              <a:lnSpc>
-                <a:spcPct val="140000"/>
-              </a:lnSpc>
-              <a:spcBef>
-                <a:spcPts val="0"/>
-              </a:spcBef>
-              <a:spcAft>
-                <a:spcPts val="0"/>
-              </a:spcAft>
-              <a:buClr>
-                <a:srgbClr val="000000"/>
-              </a:buClr>
-              <a:buSzPts val="3000"/>
-              <a:buFont typeface="Arial"/>
-              <a:buNone/>
-            </a:pPr>
-            <a:r>
-              <a:rPr lang="en-US" sz="3000" b="0" i="0" u="none" strike="noStrike" cap="none">
-                <a:solidFill>
-                  <a:srgbClr val="000000"/>
-                </a:solidFill>
-                <a:latin typeface="Times"/>
-                <a:ea typeface="Times"/>
-                <a:cs typeface="Times"/>
-                <a:sym typeface="Times"/>
-              </a:rPr>
-              <a:t>Oscillations'2</a:t>
-            </a:r>
-            <a:r>
-              <a:rPr lang="en-US" sz="3000">
-                <a:latin typeface="Times"/>
-                <a:ea typeface="Times"/>
-                <a:cs typeface="Times"/>
-                <a:sym typeface="Times"/>
-              </a:rPr>
-              <a:t>6</a:t>
-            </a:r>
-            <a:r>
-              <a:rPr lang="en-US" sz="3000" b="0" i="0" u="none" strike="noStrike" cap="none">
-                <a:solidFill>
-                  <a:srgbClr val="000000"/>
-                </a:solidFill>
-                <a:latin typeface="Times"/>
-                <a:ea typeface="Times"/>
-                <a:cs typeface="Times"/>
-                <a:sym typeface="Times"/>
-              </a:rPr>
-              <a:t>| VCET</a:t>
-            </a:r>
-            <a:endParaRPr sz="1400" b="0" i="0" u="none" strike="noStrike" cap="none">
-              <a:solidFill>
-                <a:srgbClr val="000000"/>
-              </a:solidFill>
-              <a:latin typeface="Arial"/>
-              <a:ea typeface="Arial"/>
-              <a:cs typeface="Arial"/>
-              <a:sym typeface="Arial"/>
-            </a:endParaRPr>
-          </a:p>
-        </p:txBody>
-      </p:sp>
-      <p:sp>
-        <p:nvSpPr>
-          <p:cNvPr id="166" name="Google Shape;166;p3"/>
-          <p:cNvSpPr/>
-          <p:nvPr/>
-        </p:nvSpPr>
-        <p:spPr>
-          <a:xfrm>
-            <a:off x="15678323" y="306959"/>
-            <a:ext cx="2278904" cy="1263935"/>
-          </a:xfrm>
-          <a:custGeom>
-            <a:avLst/>
-            <a:gdLst/>
-            <a:ahLst/>
-            <a:cxnLst/>
-            <a:rect l="l" t="t" r="r" b="b"/>
-            <a:pathLst>
-              <a:path w="2278904" h="1263935" extrusionOk="0">
-                <a:moveTo>
-                  <a:pt x="0" y="0"/>
-                </a:moveTo>
-                <a:lnTo>
-                  <a:pt x="2278904" y="0"/>
-                </a:lnTo>
-                <a:lnTo>
-                  <a:pt x="2278904" y="1263935"/>
-                </a:lnTo>
-                <a:lnTo>
-                  <a:pt x="0" y="1263935"/>
-                </a:lnTo>
-                <a:lnTo>
-                  <a:pt x="0" y="0"/>
-                </a:lnTo>
-                <a:close/>
-              </a:path>
-            </a:pathLst>
-          </a:custGeom>
-          <a:blipFill rotWithShape="1">
-            <a:blip r:embed="rId5">
-              <a:alphaModFix amt="85000"/>
-            </a:blip>
-            <a:stretch>
-              <a:fillRect t="-483" b="-482"/>
-            </a:stretch>
-          </a:blipFill>
-          <a:ln>
-            <a:noFill/>
-          </a:ln>
-        </p:spPr>
-      </p:sp>
-      <p:sp>
-        <p:nvSpPr>
           <p:cNvPr id="167" name="Google Shape;167;p3"/>
           <p:cNvSpPr/>
           <p:nvPr/>
@@ -23498,7 +19518,7 @@
             </a:pathLst>
           </a:custGeom>
           <a:blipFill rotWithShape="1">
-            <a:blip r:embed="rId6">
+            <a:blip r:embed="rId5">
               <a:alphaModFix/>
             </a:blip>
             <a:stretch>
@@ -23763,7 +19783,7 @@
 </p:sld>
 </file>
 
-<file path=ppt/slides/slide4.xml><?xml version="1.0" encoding="utf-8"?>
+<file path=ppt/slides/slide3.xml><?xml version="1.0" encoding="utf-8"?>
 <p:sld xmlns:a="http://schemas.openxmlformats.org/drawingml/2006/main" xmlns:r="http://schemas.openxmlformats.org/officeDocument/2006/relationships" xmlns:p="http://schemas.openxmlformats.org/presentationml/2006/main">
   <p:cSld>
     <p:bg>
@@ -24665,93 +20685,6 @@
       </p:sp>
       <p:sp>
         <p:nvSpPr>
-          <p:cNvPr id="190" name="Google Shape;190;p4"/>
-          <p:cNvSpPr txBox="1"/>
-          <p:nvPr/>
-        </p:nvSpPr>
-        <p:spPr>
-          <a:xfrm>
-            <a:off x="14083144" y="9372600"/>
-            <a:ext cx="4044000" cy="461700"/>
-          </a:xfrm>
-          <a:prstGeom prst="rect">
-            <a:avLst/>
-          </a:prstGeom>
-          <a:noFill/>
-          <a:ln>
-            <a:noFill/>
-          </a:ln>
-        </p:spPr>
-        <p:txBody>
-          <a:bodyPr spcFirstLastPara="1" wrap="square" lIns="0" tIns="0" rIns="0" bIns="0" anchor="t" anchorCtr="0">
-            <a:spAutoFit/>
-          </a:bodyPr>
-          <a:lstStyle/>
-          <a:p>
-            <a:pPr marL="0" marR="0" lvl="0" indent="0" algn="ctr" rtl="0">
-              <a:lnSpc>
-                <a:spcPct val="140000"/>
-              </a:lnSpc>
-              <a:spcBef>
-                <a:spcPts val="0"/>
-              </a:spcBef>
-              <a:spcAft>
-                <a:spcPts val="0"/>
-              </a:spcAft>
-              <a:buClr>
-                <a:srgbClr val="000000"/>
-              </a:buClr>
-              <a:buSzPts val="3000"/>
-              <a:buFont typeface="Arial"/>
-              <a:buNone/>
-            </a:pPr>
-            <a:r>
-              <a:rPr lang="en-US" sz="3000" b="0" i="0" u="none" strike="noStrike" cap="none">
-                <a:solidFill>
-                  <a:srgbClr val="000000"/>
-                </a:solidFill>
-                <a:latin typeface="Times"/>
-                <a:ea typeface="Times"/>
-                <a:cs typeface="Times"/>
-                <a:sym typeface="Times"/>
-              </a:rPr>
-              <a:t>Oscillations'2</a:t>
-            </a:r>
-            <a:r>
-              <a:rPr lang="en-US" sz="3000">
-                <a:latin typeface="Times"/>
-                <a:ea typeface="Times"/>
-                <a:cs typeface="Times"/>
-                <a:sym typeface="Times"/>
-              </a:rPr>
-              <a:t>6</a:t>
-            </a:r>
-            <a:r>
-              <a:rPr lang="en-US" sz="3000" b="0" i="0" u="none" strike="noStrike" cap="none">
-                <a:solidFill>
-                  <a:srgbClr val="000000"/>
-                </a:solidFill>
-                <a:latin typeface="Times"/>
-                <a:ea typeface="Times"/>
-                <a:cs typeface="Times"/>
-                <a:sym typeface="Times"/>
-              </a:rPr>
-              <a:t>| VCET</a:t>
-            </a:r>
-            <a:endParaRPr sz="1400" b="0" i="0" u="none" strike="noStrike" cap="none">
-              <a:solidFill>
-                <a:srgbClr val="000000"/>
-              </a:solidFill>
-              <a:latin typeface="Arial"/>
-              <a:ea typeface="Arial"/>
-              <a:cs typeface="Arial"/>
-              <a:sym typeface="Arial"/>
-            </a:endParaRPr>
-          </a:p>
-        </p:txBody>
-      </p:sp>
-      <p:sp>
-        <p:nvSpPr>
           <p:cNvPr id="191" name="Google Shape;191;p4"/>
           <p:cNvSpPr/>
           <p:nvPr/>
@@ -24794,57 +20727,6 @@
             </a:blip>
             <a:stretch>
               <a:fillRect/>
-            </a:stretch>
-          </a:blipFill>
-          <a:ln>
-            <a:noFill/>
-          </a:ln>
-        </p:spPr>
-      </p:sp>
-      <p:sp>
-        <p:nvSpPr>
-          <p:cNvPr id="192" name="Google Shape;192;p4"/>
-          <p:cNvSpPr/>
-          <p:nvPr/>
-        </p:nvSpPr>
-        <p:spPr>
-          <a:xfrm>
-            <a:off x="15678323" y="306959"/>
-            <a:ext cx="2278904" cy="1263935"/>
-          </a:xfrm>
-          <a:custGeom>
-            <a:avLst/>
-            <a:gdLst/>
-            <a:ahLst/>
-            <a:cxnLst/>
-            <a:rect l="l" t="t" r="r" b="b"/>
-            <a:pathLst>
-              <a:path w="2278904" h="1263935" extrusionOk="0">
-                <a:moveTo>
-                  <a:pt x="0" y="0"/>
-                </a:moveTo>
-                <a:lnTo>
-                  <a:pt x="2278904" y="0"/>
-                </a:lnTo>
-                <a:lnTo>
-                  <a:pt x="2278904" y="1263935"/>
-                </a:lnTo>
-                <a:lnTo>
-                  <a:pt x="0" y="1263935"/>
-                </a:lnTo>
-                <a:lnTo>
-                  <a:pt x="0" y="0"/>
-                </a:lnTo>
-                <a:close/>
-              </a:path>
-            </a:pathLst>
-          </a:custGeom>
-          <a:blipFill rotWithShape="1">
-            <a:blip r:embed="rId6">
-              <a:alphaModFix amt="85000"/>
-            </a:blip>
-            <a:stretch>
-              <a:fillRect t="-483" b="-482"/>
             </a:stretch>
           </a:blipFill>
           <a:ln>
@@ -25127,7 +21009,7 @@
 </p:sld>
 </file>
 
-<file path=ppt/slides/slide5.xml><?xml version="1.0" encoding="utf-8"?>
+<file path=ppt/slides/slide4.xml><?xml version="1.0" encoding="utf-8"?>
 <p:sld xmlns:a="http://schemas.openxmlformats.org/drawingml/2006/main" xmlns:r="http://schemas.openxmlformats.org/officeDocument/2006/relationships" xmlns:p="http://schemas.openxmlformats.org/presentationml/2006/main">
   <p:cSld>
     <p:bg>
@@ -26021,93 +21903,6 @@
       </p:sp>
       <p:sp>
         <p:nvSpPr>
-          <p:cNvPr id="215" name="Google Shape;215;g3dca87ee7d9_2_0"/>
-          <p:cNvSpPr txBox="1"/>
-          <p:nvPr/>
-        </p:nvSpPr>
-        <p:spPr>
-          <a:xfrm>
-            <a:off x="14083144" y="9372600"/>
-            <a:ext cx="4044000" cy="461700"/>
-          </a:xfrm>
-          <a:prstGeom prst="rect">
-            <a:avLst/>
-          </a:prstGeom>
-          <a:noFill/>
-          <a:ln>
-            <a:noFill/>
-          </a:ln>
-        </p:spPr>
-        <p:txBody>
-          <a:bodyPr spcFirstLastPara="1" wrap="square" lIns="0" tIns="0" rIns="0" bIns="0" anchor="t" anchorCtr="0">
-            <a:spAutoFit/>
-          </a:bodyPr>
-          <a:lstStyle/>
-          <a:p>
-            <a:pPr marL="0" marR="0" lvl="0" indent="0" algn="ctr" rtl="0">
-              <a:lnSpc>
-                <a:spcPct val="140000"/>
-              </a:lnSpc>
-              <a:spcBef>
-                <a:spcPts val="0"/>
-              </a:spcBef>
-              <a:spcAft>
-                <a:spcPts val="0"/>
-              </a:spcAft>
-              <a:buClr>
-                <a:srgbClr val="000000"/>
-              </a:buClr>
-              <a:buSzPts val="3000"/>
-              <a:buFont typeface="Arial"/>
-              <a:buNone/>
-            </a:pPr>
-            <a:r>
-              <a:rPr lang="en-US" sz="3000" b="0" i="0" u="none" strike="noStrike" cap="none">
-                <a:solidFill>
-                  <a:srgbClr val="000000"/>
-                </a:solidFill>
-                <a:latin typeface="Times"/>
-                <a:ea typeface="Times"/>
-                <a:cs typeface="Times"/>
-                <a:sym typeface="Times"/>
-              </a:rPr>
-              <a:t>Oscillations'2</a:t>
-            </a:r>
-            <a:r>
-              <a:rPr lang="en-US" sz="3000">
-                <a:latin typeface="Times"/>
-                <a:ea typeface="Times"/>
-                <a:cs typeface="Times"/>
-                <a:sym typeface="Times"/>
-              </a:rPr>
-              <a:t>6</a:t>
-            </a:r>
-            <a:r>
-              <a:rPr lang="en-US" sz="3000" b="0" i="0" u="none" strike="noStrike" cap="none">
-                <a:solidFill>
-                  <a:srgbClr val="000000"/>
-                </a:solidFill>
-                <a:latin typeface="Times"/>
-                <a:ea typeface="Times"/>
-                <a:cs typeface="Times"/>
-                <a:sym typeface="Times"/>
-              </a:rPr>
-              <a:t>| VCET</a:t>
-            </a:r>
-            <a:endParaRPr sz="1400" b="0" i="0" u="none" strike="noStrike" cap="none">
-              <a:solidFill>
-                <a:srgbClr val="000000"/>
-              </a:solidFill>
-              <a:latin typeface="Arial"/>
-              <a:ea typeface="Arial"/>
-              <a:cs typeface="Arial"/>
-              <a:sym typeface="Arial"/>
-            </a:endParaRPr>
-          </a:p>
-        </p:txBody>
-      </p:sp>
-      <p:sp>
-        <p:nvSpPr>
           <p:cNvPr id="216" name="Google Shape;216;g3dca87ee7d9_2_0"/>
           <p:cNvSpPr/>
           <p:nvPr/>
@@ -26150,57 +21945,6 @@
             </a:blip>
             <a:stretch>
               <a:fillRect/>
-            </a:stretch>
-          </a:blipFill>
-          <a:ln>
-            <a:noFill/>
-          </a:ln>
-        </p:spPr>
-      </p:sp>
-      <p:sp>
-        <p:nvSpPr>
-          <p:cNvPr id="217" name="Google Shape;217;g3dca87ee7d9_2_0"/>
-          <p:cNvSpPr/>
-          <p:nvPr/>
-        </p:nvSpPr>
-        <p:spPr>
-          <a:xfrm>
-            <a:off x="15678323" y="306959"/>
-            <a:ext cx="2278904" cy="1263935"/>
-          </a:xfrm>
-          <a:custGeom>
-            <a:avLst/>
-            <a:gdLst/>
-            <a:ahLst/>
-            <a:cxnLst/>
-            <a:rect l="l" t="t" r="r" b="b"/>
-            <a:pathLst>
-              <a:path w="2278904" h="1263935" extrusionOk="0">
-                <a:moveTo>
-                  <a:pt x="0" y="0"/>
-                </a:moveTo>
-                <a:lnTo>
-                  <a:pt x="2278904" y="0"/>
-                </a:lnTo>
-                <a:lnTo>
-                  <a:pt x="2278904" y="1263935"/>
-                </a:lnTo>
-                <a:lnTo>
-                  <a:pt x="0" y="1263935"/>
-                </a:lnTo>
-                <a:lnTo>
-                  <a:pt x="0" y="0"/>
-                </a:lnTo>
-                <a:close/>
-              </a:path>
-            </a:pathLst>
-          </a:custGeom>
-          <a:blipFill rotWithShape="1">
-            <a:blip r:embed="rId6">
-              <a:alphaModFix amt="85000"/>
-            </a:blip>
-            <a:stretch>
-              <a:fillRect t="-480" b="-480"/>
             </a:stretch>
           </a:blipFill>
           <a:ln>
@@ -26443,7 +22187,7 @@
 </p:sld>
 </file>
 
-<file path=ppt/slides/slide6.xml><?xml version="1.0" encoding="utf-8"?>
+<file path=ppt/slides/slide5.xml><?xml version="1.0" encoding="utf-8"?>
 <p:sld xmlns:a="http://schemas.openxmlformats.org/drawingml/2006/main" xmlns:r="http://schemas.openxmlformats.org/officeDocument/2006/relationships" xmlns:p="http://schemas.openxmlformats.org/presentationml/2006/main">
   <p:cSld>
     <p:bg>
@@ -27218,144 +22962,6 @@
       </p:sp>
       <p:sp>
         <p:nvSpPr>
-          <p:cNvPr id="240" name="Google Shape;240;p5"/>
-          <p:cNvSpPr txBox="1"/>
-          <p:nvPr/>
-        </p:nvSpPr>
-        <p:spPr>
-          <a:xfrm>
-            <a:off x="14083144" y="9372600"/>
-            <a:ext cx="4044000" cy="461700"/>
-          </a:xfrm>
-          <a:prstGeom prst="rect">
-            <a:avLst/>
-          </a:prstGeom>
-          <a:noFill/>
-          <a:ln>
-            <a:noFill/>
-          </a:ln>
-        </p:spPr>
-        <p:txBody>
-          <a:bodyPr spcFirstLastPara="1" wrap="square" lIns="0" tIns="0" rIns="0" bIns="0" anchor="t" anchorCtr="0">
-            <a:spAutoFit/>
-          </a:bodyPr>
-          <a:lstStyle/>
-          <a:p>
-            <a:pPr marL="0" marR="0" lvl="0" indent="0" algn="ctr" rtl="0">
-              <a:lnSpc>
-                <a:spcPct val="140000"/>
-              </a:lnSpc>
-              <a:spcBef>
-                <a:spcPts val="0"/>
-              </a:spcBef>
-              <a:spcAft>
-                <a:spcPts val="0"/>
-              </a:spcAft>
-              <a:buClr>
-                <a:srgbClr val="000000"/>
-              </a:buClr>
-              <a:buSzPts val="3000"/>
-              <a:buFont typeface="Arial"/>
-              <a:buNone/>
-            </a:pPr>
-            <a:r>
-              <a:rPr lang="en-US" sz="3000" b="0" i="0" u="none" strike="noStrike" cap="none">
-                <a:solidFill>
-                  <a:srgbClr val="000000"/>
-                </a:solidFill>
-                <a:latin typeface="Times"/>
-                <a:ea typeface="Times"/>
-                <a:cs typeface="Times"/>
-                <a:sym typeface="Times"/>
-              </a:rPr>
-              <a:t>Oscillations'2</a:t>
-            </a:r>
-            <a:r>
-              <a:rPr lang="en-US" sz="3000">
-                <a:latin typeface="Times"/>
-                <a:ea typeface="Times"/>
-                <a:cs typeface="Times"/>
-                <a:sym typeface="Times"/>
-              </a:rPr>
-              <a:t>6</a:t>
-            </a:r>
-            <a:r>
-              <a:rPr lang="en-US" sz="3000" b="0" i="0" u="none" strike="noStrike" cap="none">
-                <a:solidFill>
-                  <a:srgbClr val="000000"/>
-                </a:solidFill>
-                <a:latin typeface="Times"/>
-                <a:ea typeface="Times"/>
-                <a:cs typeface="Times"/>
-                <a:sym typeface="Times"/>
-              </a:rPr>
-              <a:t>| VCET</a:t>
-            </a:r>
-            <a:endParaRPr sz="1400" b="0" i="0" u="none" strike="noStrike" cap="none">
-              <a:solidFill>
-                <a:srgbClr val="000000"/>
-              </a:solidFill>
-              <a:latin typeface="Arial"/>
-              <a:ea typeface="Arial"/>
-              <a:cs typeface="Arial"/>
-              <a:sym typeface="Arial"/>
-            </a:endParaRPr>
-          </a:p>
-        </p:txBody>
-      </p:sp>
-      <p:sp>
-        <p:nvSpPr>
-          <p:cNvPr id="241" name="Google Shape;241;p5"/>
-          <p:cNvSpPr/>
-          <p:nvPr/>
-        </p:nvSpPr>
-        <p:spPr>
-          <a:xfrm>
-            <a:off x="15678323" y="306959"/>
-            <a:ext cx="2278904" cy="1263935"/>
-          </a:xfrm>
-          <a:custGeom>
-            <a:avLst/>
-            <a:gdLst/>
-            <a:ahLst/>
-            <a:cxnLst/>
-            <a:rect l="l" t="t" r="r" b="b"/>
-            <a:pathLst>
-              <a:path w="2278904" h="1263935" extrusionOk="0">
-                <a:moveTo>
-                  <a:pt x="0" y="0"/>
-                </a:moveTo>
-                <a:lnTo>
-                  <a:pt x="2278904" y="0"/>
-                </a:lnTo>
-                <a:lnTo>
-                  <a:pt x="2278904" y="1263935"/>
-                </a:lnTo>
-                <a:lnTo>
-                  <a:pt x="0" y="1263935"/>
-                </a:lnTo>
-                <a:lnTo>
-                  <a:pt x="0" y="0"/>
-                </a:lnTo>
-                <a:close/>
-              </a:path>
-            </a:pathLst>
-          </a:custGeom>
-          <a:blipFill rotWithShape="1">
-            <a:blip r:embed="rId5">
-              <a:alphaModFix amt="85000"/>
-            </a:blip>
-            <a:stretch>
-              <a:fillRect t="-483" b="-482"/>
-            </a:stretch>
-          </a:blipFill>
-          <a:ln>
-            <a:noFill/>
-          </a:ln>
-        </p:spPr>
-      </p:sp>
-      <p:sp>
-        <p:nvSpPr>
           <p:cNvPr id="242" name="Google Shape;242;p5"/>
           <p:cNvSpPr/>
           <p:nvPr/>
@@ -27393,7 +22999,7 @@
             </a:pathLst>
           </a:custGeom>
           <a:blipFill rotWithShape="1">
-            <a:blip r:embed="rId6">
+            <a:blip r:embed="rId5">
               <a:alphaModFix/>
             </a:blip>
             <a:stretch>
@@ -27640,7 +23246,7 @@
 </p:sld>
 </file>
 
-<file path=ppt/slides/slide7.xml><?xml version="1.0" encoding="utf-8"?>
+<file path=ppt/slides/slide6.xml><?xml version="1.0" encoding="utf-8"?>
 <p:sld xmlns:a="http://schemas.openxmlformats.org/drawingml/2006/main" xmlns:r="http://schemas.openxmlformats.org/officeDocument/2006/relationships" xmlns:p="http://schemas.openxmlformats.org/presentationml/2006/main">
   <p:cSld>
     <p:bg>
@@ -28498,144 +24104,6 @@
       </p:sp>
       <p:sp>
         <p:nvSpPr>
-          <p:cNvPr id="265" name="Google Shape;265;p6"/>
-          <p:cNvSpPr txBox="1"/>
-          <p:nvPr/>
-        </p:nvSpPr>
-        <p:spPr>
-          <a:xfrm>
-            <a:off x="14083144" y="9372600"/>
-            <a:ext cx="4044000" cy="461700"/>
-          </a:xfrm>
-          <a:prstGeom prst="rect">
-            <a:avLst/>
-          </a:prstGeom>
-          <a:noFill/>
-          <a:ln>
-            <a:noFill/>
-          </a:ln>
-        </p:spPr>
-        <p:txBody>
-          <a:bodyPr spcFirstLastPara="1" wrap="square" lIns="0" tIns="0" rIns="0" bIns="0" anchor="t" anchorCtr="0">
-            <a:spAutoFit/>
-          </a:bodyPr>
-          <a:lstStyle/>
-          <a:p>
-            <a:pPr marL="0" marR="0" lvl="0" indent="0" algn="ctr" rtl="0">
-              <a:lnSpc>
-                <a:spcPct val="140000"/>
-              </a:lnSpc>
-              <a:spcBef>
-                <a:spcPts val="0"/>
-              </a:spcBef>
-              <a:spcAft>
-                <a:spcPts val="0"/>
-              </a:spcAft>
-              <a:buClr>
-                <a:srgbClr val="000000"/>
-              </a:buClr>
-              <a:buSzPts val="3000"/>
-              <a:buFont typeface="Arial"/>
-              <a:buNone/>
-            </a:pPr>
-            <a:r>
-              <a:rPr lang="en-US" sz="3000" b="0" i="0" u="none" strike="noStrike" cap="none">
-                <a:solidFill>
-                  <a:srgbClr val="000000"/>
-                </a:solidFill>
-                <a:latin typeface="Times"/>
-                <a:ea typeface="Times"/>
-                <a:cs typeface="Times"/>
-                <a:sym typeface="Times"/>
-              </a:rPr>
-              <a:t>Oscillations'2</a:t>
-            </a:r>
-            <a:r>
-              <a:rPr lang="en-US" sz="3000">
-                <a:latin typeface="Times"/>
-                <a:ea typeface="Times"/>
-                <a:cs typeface="Times"/>
-                <a:sym typeface="Times"/>
-              </a:rPr>
-              <a:t>6</a:t>
-            </a:r>
-            <a:r>
-              <a:rPr lang="en-US" sz="3000" b="0" i="0" u="none" strike="noStrike" cap="none">
-                <a:solidFill>
-                  <a:srgbClr val="000000"/>
-                </a:solidFill>
-                <a:latin typeface="Times"/>
-                <a:ea typeface="Times"/>
-                <a:cs typeface="Times"/>
-                <a:sym typeface="Times"/>
-              </a:rPr>
-              <a:t>| VCET</a:t>
-            </a:r>
-            <a:endParaRPr sz="1400" b="0" i="0" u="none" strike="noStrike" cap="none">
-              <a:solidFill>
-                <a:srgbClr val="000000"/>
-              </a:solidFill>
-              <a:latin typeface="Arial"/>
-              <a:ea typeface="Arial"/>
-              <a:cs typeface="Arial"/>
-              <a:sym typeface="Arial"/>
-            </a:endParaRPr>
-          </a:p>
-        </p:txBody>
-      </p:sp>
-      <p:sp>
-        <p:nvSpPr>
-          <p:cNvPr id="266" name="Google Shape;266;p6"/>
-          <p:cNvSpPr/>
-          <p:nvPr/>
-        </p:nvSpPr>
-        <p:spPr>
-          <a:xfrm>
-            <a:off x="15678323" y="306959"/>
-            <a:ext cx="2278904" cy="1263935"/>
-          </a:xfrm>
-          <a:custGeom>
-            <a:avLst/>
-            <a:gdLst/>
-            <a:ahLst/>
-            <a:cxnLst/>
-            <a:rect l="l" t="t" r="r" b="b"/>
-            <a:pathLst>
-              <a:path w="2278904" h="1263935" extrusionOk="0">
-                <a:moveTo>
-                  <a:pt x="0" y="0"/>
-                </a:moveTo>
-                <a:lnTo>
-                  <a:pt x="2278904" y="0"/>
-                </a:lnTo>
-                <a:lnTo>
-                  <a:pt x="2278904" y="1263935"/>
-                </a:lnTo>
-                <a:lnTo>
-                  <a:pt x="0" y="1263935"/>
-                </a:lnTo>
-                <a:lnTo>
-                  <a:pt x="0" y="0"/>
-                </a:lnTo>
-                <a:close/>
-              </a:path>
-            </a:pathLst>
-          </a:custGeom>
-          <a:blipFill rotWithShape="1">
-            <a:blip r:embed="rId5">
-              <a:alphaModFix amt="85000"/>
-            </a:blip>
-            <a:stretch>
-              <a:fillRect t="-483" b="-482"/>
-            </a:stretch>
-          </a:blipFill>
-          <a:ln>
-            <a:noFill/>
-          </a:ln>
-        </p:spPr>
-      </p:sp>
-      <p:sp>
-        <p:nvSpPr>
           <p:cNvPr id="267" name="Google Shape;267;p6"/>
           <p:cNvSpPr/>
           <p:nvPr/>
@@ -28673,7 +24141,7 @@
             </a:pathLst>
           </a:custGeom>
           <a:blipFill rotWithShape="1">
-            <a:blip r:embed="rId6">
+            <a:blip r:embed="rId5">
               <a:alphaModFix/>
             </a:blip>
             <a:stretch>
@@ -28700,7 +24168,7 @@
           <p:nvPr/>
         </p:nvPicPr>
         <p:blipFill>
-          <a:blip r:embed="rId7"/>
+          <a:blip r:embed="rId6"/>
           <a:stretch>
             <a:fillRect/>
           </a:stretch>
@@ -29019,7 +24487,7 @@
 </p:sld>
 </file>
 
-<file path=ppt/slides/slide8.xml><?xml version="1.0" encoding="utf-8"?>
+<file path=ppt/slides/slide7.xml><?xml version="1.0" encoding="utf-8"?>
 <p:sld xmlns:a="http://schemas.openxmlformats.org/drawingml/2006/main" xmlns:r="http://schemas.openxmlformats.org/officeDocument/2006/relationships" xmlns:p="http://schemas.openxmlformats.org/presentationml/2006/main">
   <p:cSld>
     <p:bg>
@@ -29672,93 +25140,6 @@
       </p:sp>
       <p:sp>
         <p:nvSpPr>
-          <p:cNvPr id="284" name="Google Shape;284;p7"/>
-          <p:cNvSpPr txBox="1"/>
-          <p:nvPr/>
-        </p:nvSpPr>
-        <p:spPr>
-          <a:xfrm>
-            <a:off x="14083144" y="9372600"/>
-            <a:ext cx="4044000" cy="461700"/>
-          </a:xfrm>
-          <a:prstGeom prst="rect">
-            <a:avLst/>
-          </a:prstGeom>
-          <a:noFill/>
-          <a:ln>
-            <a:noFill/>
-          </a:ln>
-        </p:spPr>
-        <p:txBody>
-          <a:bodyPr spcFirstLastPara="1" wrap="square" lIns="0" tIns="0" rIns="0" bIns="0" anchor="t" anchorCtr="0">
-            <a:spAutoFit/>
-          </a:bodyPr>
-          <a:lstStyle/>
-          <a:p>
-            <a:pPr marL="0" marR="0" lvl="0" indent="0" algn="ctr" rtl="0">
-              <a:lnSpc>
-                <a:spcPct val="140000"/>
-              </a:lnSpc>
-              <a:spcBef>
-                <a:spcPts val="0"/>
-              </a:spcBef>
-              <a:spcAft>
-                <a:spcPts val="0"/>
-              </a:spcAft>
-              <a:buClr>
-                <a:srgbClr val="000000"/>
-              </a:buClr>
-              <a:buSzPts val="3000"/>
-              <a:buFont typeface="Arial"/>
-              <a:buNone/>
-            </a:pPr>
-            <a:r>
-              <a:rPr lang="en-US" sz="3000" b="0" i="0" u="none" strike="noStrike" cap="none">
-                <a:solidFill>
-                  <a:srgbClr val="000000"/>
-                </a:solidFill>
-                <a:latin typeface="Times"/>
-                <a:ea typeface="Times"/>
-                <a:cs typeface="Times"/>
-                <a:sym typeface="Times"/>
-              </a:rPr>
-              <a:t>Oscillations'2</a:t>
-            </a:r>
-            <a:r>
-              <a:rPr lang="en-US" sz="3000">
-                <a:latin typeface="Times"/>
-                <a:ea typeface="Times"/>
-                <a:cs typeface="Times"/>
-                <a:sym typeface="Times"/>
-              </a:rPr>
-              <a:t>6</a:t>
-            </a:r>
-            <a:r>
-              <a:rPr lang="en-US" sz="3000" b="0" i="0" u="none" strike="noStrike" cap="none">
-                <a:solidFill>
-                  <a:srgbClr val="000000"/>
-                </a:solidFill>
-                <a:latin typeface="Times"/>
-                <a:ea typeface="Times"/>
-                <a:cs typeface="Times"/>
-                <a:sym typeface="Times"/>
-              </a:rPr>
-              <a:t>| VCET</a:t>
-            </a:r>
-            <a:endParaRPr sz="1400" b="0" i="0" u="none" strike="noStrike" cap="none">
-              <a:solidFill>
-                <a:srgbClr val="000000"/>
-              </a:solidFill>
-              <a:latin typeface="Arial"/>
-              <a:ea typeface="Arial"/>
-              <a:cs typeface="Arial"/>
-              <a:sym typeface="Arial"/>
-            </a:endParaRPr>
-          </a:p>
-        </p:txBody>
-      </p:sp>
-      <p:sp>
-        <p:nvSpPr>
           <p:cNvPr id="285" name="Google Shape;285;p7"/>
           <p:cNvSpPr/>
           <p:nvPr/>
@@ -29801,57 +25182,6 @@
             </a:blip>
             <a:stretch>
               <a:fillRect/>
-            </a:stretch>
-          </a:blipFill>
-          <a:ln>
-            <a:noFill/>
-          </a:ln>
-        </p:spPr>
-      </p:sp>
-      <p:sp>
-        <p:nvSpPr>
-          <p:cNvPr id="286" name="Google Shape;286;p7"/>
-          <p:cNvSpPr/>
-          <p:nvPr/>
-        </p:nvSpPr>
-        <p:spPr>
-          <a:xfrm>
-            <a:off x="15678323" y="306959"/>
-            <a:ext cx="2278904" cy="1263935"/>
-          </a:xfrm>
-          <a:custGeom>
-            <a:avLst/>
-            <a:gdLst/>
-            <a:ahLst/>
-            <a:cxnLst/>
-            <a:rect l="l" t="t" r="r" b="b"/>
-            <a:pathLst>
-              <a:path w="2278904" h="1263935" extrusionOk="0">
-                <a:moveTo>
-                  <a:pt x="0" y="0"/>
-                </a:moveTo>
-                <a:lnTo>
-                  <a:pt x="2278904" y="0"/>
-                </a:lnTo>
-                <a:lnTo>
-                  <a:pt x="2278904" y="1263935"/>
-                </a:lnTo>
-                <a:lnTo>
-                  <a:pt x="0" y="1263935"/>
-                </a:lnTo>
-                <a:lnTo>
-                  <a:pt x="0" y="0"/>
-                </a:lnTo>
-                <a:close/>
-              </a:path>
-            </a:pathLst>
-          </a:custGeom>
-          <a:blipFill rotWithShape="1">
-            <a:blip r:embed="rId6">
-              <a:alphaModFix amt="85000"/>
-            </a:blip>
-            <a:stretch>
-              <a:fillRect t="-483" b="-482"/>
             </a:stretch>
           </a:blipFill>
           <a:ln>
@@ -30384,7 +25714,7 @@
 </p:sld>
 </file>
 
-<file path=ppt/slides/slide9.xml><?xml version="1.0" encoding="utf-8"?>
+<file path=ppt/slides/slide8.xml><?xml version="1.0" encoding="utf-8"?>
 <p:sld xmlns:a="http://schemas.openxmlformats.org/drawingml/2006/main" xmlns:r="http://schemas.openxmlformats.org/officeDocument/2006/relationships" xmlns:p="http://schemas.openxmlformats.org/presentationml/2006/main">
   <p:cSld>
     <p:bg>
@@ -30519,7 +25849,7 @@
         </p:nvGrpSpPr>
         <p:grpSpPr>
           <a:xfrm>
-            <a:off x="1028700" y="593567"/>
+            <a:off x="1028700" y="739378"/>
             <a:ext cx="16230600" cy="8518922"/>
             <a:chOff x="0" y="-76200"/>
             <a:chExt cx="4274726" cy="2243667"/>
@@ -30892,8 +26222,8 @@
         </p:nvGrpSpPr>
         <p:grpSpPr>
           <a:xfrm>
-            <a:off x="4768433" y="1534701"/>
-            <a:ext cx="7113467" cy="874944"/>
+            <a:off x="6341594" y="1253135"/>
+            <a:ext cx="5540306" cy="1156510"/>
             <a:chOff x="0" y="-76200"/>
             <a:chExt cx="1804601" cy="376701"/>
           </a:xfrm>
@@ -30996,57 +26326,126 @@
           </p:txBody>
         </p:sp>
       </p:grpSp>
-      <p:sp>
-        <p:nvSpPr>
-          <p:cNvPr id="304" name="Google Shape;304;p8"/>
-          <p:cNvSpPr/>
+      <p:grpSp>
+        <p:nvGrpSpPr>
+          <p:cNvPr id="303" name="Google Shape;303;p8"/>
+          <p:cNvGrpSpPr/>
           <p:nvPr/>
-        </p:nvSpPr>
-        <p:spPr>
+        </p:nvGrpSpPr>
+        <p:grpSpPr>
           <a:xfrm>
-            <a:off x="4617973" y="1570107"/>
-            <a:ext cx="7440760" cy="990677"/>
+            <a:off x="6508661" y="1438732"/>
+            <a:ext cx="5580232" cy="1090911"/>
+            <a:chOff x="0" y="-76200"/>
+            <a:chExt cx="1817606" cy="355334"/>
           </a:xfrm>
-          <a:custGeom>
-            <a:avLst/>
-            <a:gdLst/>
-            <a:ahLst/>
-            <a:cxnLst/>
-            <a:rect l="l" t="t" r="r" b="b"/>
-            <a:pathLst>
-              <a:path w="1817606" h="279134" extrusionOk="0">
-                <a:moveTo>
-                  <a:pt x="0" y="0"/>
-                </a:moveTo>
-                <a:lnTo>
-                  <a:pt x="1817606" y="0"/>
-                </a:lnTo>
-                <a:lnTo>
-                  <a:pt x="1817606" y="279134"/>
-                </a:lnTo>
-                <a:lnTo>
-                  <a:pt x="0" y="279134"/>
-                </a:lnTo>
-                <a:close/>
-              </a:path>
-            </a:pathLst>
-          </a:custGeom>
-          <a:solidFill>
-            <a:srgbClr val="000000">
-              <a:alpha val="0"/>
-            </a:srgbClr>
-          </a:solidFill>
-          <a:ln w="76200" cap="sq" cmpd="sng">
+        </p:grpSpPr>
+        <p:sp>
+          <p:nvSpPr>
+            <p:cNvPr id="304" name="Google Shape;304;p8"/>
+            <p:cNvSpPr/>
+            <p:nvPr/>
+          </p:nvSpPr>
+          <p:spPr>
+            <a:xfrm>
+              <a:off x="0" y="0"/>
+              <a:ext cx="1817606" cy="279134"/>
+            </a:xfrm>
+            <a:custGeom>
+              <a:avLst/>
+              <a:gdLst/>
+              <a:ahLst/>
+              <a:cxnLst/>
+              <a:rect l="l" t="t" r="r" b="b"/>
+              <a:pathLst>
+                <a:path w="1817606" h="279134" extrusionOk="0">
+                  <a:moveTo>
+                    <a:pt x="0" y="0"/>
+                  </a:moveTo>
+                  <a:lnTo>
+                    <a:pt x="1817606" y="0"/>
+                  </a:lnTo>
+                  <a:lnTo>
+                    <a:pt x="1817606" y="279134"/>
+                  </a:lnTo>
+                  <a:lnTo>
+                    <a:pt x="0" y="279134"/>
+                  </a:lnTo>
+                  <a:close/>
+                </a:path>
+              </a:pathLst>
+            </a:custGeom>
             <a:solidFill>
-              <a:srgbClr val="CB74F7"/>
+              <a:srgbClr val="000000">
+                <a:alpha val="0"/>
+              </a:srgbClr>
             </a:solidFill>
-            <a:prstDash val="solid"/>
-            <a:miter lim="8000"/>
-            <a:headEnd type="none" w="sm" len="sm"/>
-            <a:tailEnd type="none" w="sm" len="sm"/>
-          </a:ln>
-        </p:spPr>
-      </p:sp>
+            <a:ln w="76200" cap="sq" cmpd="sng">
+              <a:solidFill>
+                <a:srgbClr val="CB74F7"/>
+              </a:solidFill>
+              <a:prstDash val="solid"/>
+              <a:miter lim="8000"/>
+              <a:headEnd type="none" w="sm" len="sm"/>
+              <a:tailEnd type="none" w="sm" len="sm"/>
+            </a:ln>
+          </p:spPr>
+        </p:sp>
+        <p:sp>
+          <p:nvSpPr>
+            <p:cNvPr id="305" name="Google Shape;305;p8"/>
+            <p:cNvSpPr txBox="1"/>
+            <p:nvPr/>
+          </p:nvSpPr>
+          <p:spPr>
+            <a:xfrm>
+              <a:off x="0" y="-76200"/>
+              <a:ext cx="1817606" cy="355334"/>
+            </a:xfrm>
+            <a:prstGeom prst="rect">
+              <a:avLst/>
+            </a:prstGeom>
+            <a:noFill/>
+            <a:ln>
+              <a:noFill/>
+            </a:ln>
+          </p:spPr>
+          <p:txBody>
+            <a:bodyPr spcFirstLastPara="1" wrap="square" lIns="50800" tIns="50800" rIns="50800" bIns="50800" anchor="ctr" anchorCtr="0">
+              <a:noAutofit/>
+            </a:bodyPr>
+            <a:lstStyle/>
+            <a:p>
+              <a:pPr marL="0" marR="0" lvl="0" indent="0" algn="ctr" rtl="0">
+                <a:lnSpc>
+                  <a:spcPct val="147722"/>
+                </a:lnSpc>
+                <a:spcBef>
+                  <a:spcPts val="0"/>
+                </a:spcBef>
+                <a:spcAft>
+                  <a:spcPts val="0"/>
+                </a:spcAft>
+                <a:buClr>
+                  <a:srgbClr val="000000"/>
+                </a:buClr>
+                <a:buSzPts val="1800"/>
+                <a:buFont typeface="Arial"/>
+                <a:buNone/>
+              </a:pPr>
+              <a:endParaRPr sz="1800" b="0" i="0" u="none" strike="noStrike" cap="none">
+                <a:solidFill>
+                  <a:schemeClr val="dk1"/>
+                </a:solidFill>
+                <a:latin typeface="Calibri"/>
+                <a:ea typeface="Calibri"/>
+                <a:cs typeface="Calibri"/>
+                <a:sym typeface="Calibri"/>
+              </a:endParaRPr>
+            </a:p>
+          </p:txBody>
+        </p:sp>
+      </p:grpSp>
       <p:sp>
         <p:nvSpPr>
           <p:cNvPr id="306" name="Google Shape;306;p8"/>
@@ -31055,8 +26454,8 @@
         </p:nvSpPr>
         <p:spPr>
           <a:xfrm>
-            <a:off x="5165371" y="1618991"/>
-            <a:ext cx="6807212" cy="826060"/>
+            <a:off x="6874398" y="1754577"/>
+            <a:ext cx="4770623" cy="655057"/>
           </a:xfrm>
           <a:prstGeom prst="rect">
             <a:avLst/>
@@ -31217,144 +26616,6 @@
       </p:sp>
       <p:sp>
         <p:nvSpPr>
-          <p:cNvPr id="309" name="Google Shape;309;p8"/>
-          <p:cNvSpPr txBox="1"/>
-          <p:nvPr/>
-        </p:nvSpPr>
-        <p:spPr>
-          <a:xfrm>
-            <a:off x="14083144" y="9372600"/>
-            <a:ext cx="4044000" cy="461700"/>
-          </a:xfrm>
-          <a:prstGeom prst="rect">
-            <a:avLst/>
-          </a:prstGeom>
-          <a:noFill/>
-          <a:ln>
-            <a:noFill/>
-          </a:ln>
-        </p:spPr>
-        <p:txBody>
-          <a:bodyPr spcFirstLastPara="1" wrap="square" lIns="0" tIns="0" rIns="0" bIns="0" anchor="t" anchorCtr="0">
-            <a:spAutoFit/>
-          </a:bodyPr>
-          <a:lstStyle/>
-          <a:p>
-            <a:pPr marL="0" marR="0" lvl="0" indent="0" algn="ctr" rtl="0">
-              <a:lnSpc>
-                <a:spcPct val="140000"/>
-              </a:lnSpc>
-              <a:spcBef>
-                <a:spcPts val="0"/>
-              </a:spcBef>
-              <a:spcAft>
-                <a:spcPts val="0"/>
-              </a:spcAft>
-              <a:buClr>
-                <a:srgbClr val="000000"/>
-              </a:buClr>
-              <a:buSzPts val="3000"/>
-              <a:buFont typeface="Arial"/>
-              <a:buNone/>
-            </a:pPr>
-            <a:r>
-              <a:rPr lang="en-US" sz="3000" b="0" i="0" u="none" strike="noStrike" cap="none">
-                <a:solidFill>
-                  <a:srgbClr val="000000"/>
-                </a:solidFill>
-                <a:latin typeface="Times"/>
-                <a:ea typeface="Times"/>
-                <a:cs typeface="Times"/>
-                <a:sym typeface="Times"/>
-              </a:rPr>
-              <a:t>Oscillations'2</a:t>
-            </a:r>
-            <a:r>
-              <a:rPr lang="en-US" sz="3000">
-                <a:latin typeface="Times"/>
-                <a:ea typeface="Times"/>
-                <a:cs typeface="Times"/>
-                <a:sym typeface="Times"/>
-              </a:rPr>
-              <a:t>6</a:t>
-            </a:r>
-            <a:r>
-              <a:rPr lang="en-US" sz="3000" b="0" i="0" u="none" strike="noStrike" cap="none">
-                <a:solidFill>
-                  <a:srgbClr val="000000"/>
-                </a:solidFill>
-                <a:latin typeface="Times"/>
-                <a:ea typeface="Times"/>
-                <a:cs typeface="Times"/>
-                <a:sym typeface="Times"/>
-              </a:rPr>
-              <a:t>| VCET</a:t>
-            </a:r>
-            <a:endParaRPr sz="1400" b="0" i="0" u="none" strike="noStrike" cap="none">
-              <a:solidFill>
-                <a:srgbClr val="000000"/>
-              </a:solidFill>
-              <a:latin typeface="Arial"/>
-              <a:ea typeface="Arial"/>
-              <a:cs typeface="Arial"/>
-              <a:sym typeface="Arial"/>
-            </a:endParaRPr>
-          </a:p>
-        </p:txBody>
-      </p:sp>
-      <p:sp>
-        <p:nvSpPr>
-          <p:cNvPr id="310" name="Google Shape;310;p8"/>
-          <p:cNvSpPr/>
-          <p:nvPr/>
-        </p:nvSpPr>
-        <p:spPr>
-          <a:xfrm>
-            <a:off x="15678323" y="306959"/>
-            <a:ext cx="2278904" cy="1263935"/>
-          </a:xfrm>
-          <a:custGeom>
-            <a:avLst/>
-            <a:gdLst/>
-            <a:ahLst/>
-            <a:cxnLst/>
-            <a:rect l="l" t="t" r="r" b="b"/>
-            <a:pathLst>
-              <a:path w="2278904" h="1263935" extrusionOk="0">
-                <a:moveTo>
-                  <a:pt x="0" y="0"/>
-                </a:moveTo>
-                <a:lnTo>
-                  <a:pt x="2278904" y="0"/>
-                </a:lnTo>
-                <a:lnTo>
-                  <a:pt x="2278904" y="1263935"/>
-                </a:lnTo>
-                <a:lnTo>
-                  <a:pt x="0" y="1263935"/>
-                </a:lnTo>
-                <a:lnTo>
-                  <a:pt x="0" y="0"/>
-                </a:lnTo>
-                <a:close/>
-              </a:path>
-            </a:pathLst>
-          </a:custGeom>
-          <a:blipFill rotWithShape="1">
-            <a:blip r:embed="rId5">
-              <a:alphaModFix amt="85000"/>
-            </a:blip>
-            <a:stretch>
-              <a:fillRect t="-483" b="-482"/>
-            </a:stretch>
-          </a:blipFill>
-          <a:ln>
-            <a:noFill/>
-          </a:ln>
-        </p:spPr>
-      </p:sp>
-      <p:sp>
-        <p:nvSpPr>
           <p:cNvPr id="311" name="Google Shape;311;p8"/>
           <p:cNvSpPr/>
           <p:nvPr/>
@@ -31392,7 +26653,7 @@
             </a:pathLst>
           </a:custGeom>
           <a:blipFill rotWithShape="1">
-            <a:blip r:embed="rId6">
+            <a:blip r:embed="rId5">
               <a:alphaModFix/>
             </a:blip>
             <a:stretch>
@@ -31623,6 +26884,1215 @@
               </a:rPr>
               <a:t> Issues with seasonal demand, email dependency, and scalability. </a:t>
             </a:r>
+          </a:p>
+          <a:p>
+            <a:endParaRPr lang="en-IN" sz="3000" dirty="0">
+              <a:latin typeface="Times New Roman" panose="02020603050405020304" pitchFamily="18" charset="0"/>
+              <a:cs typeface="Times New Roman" panose="02020603050405020304" pitchFamily="18" charset="0"/>
+            </a:endParaRPr>
+          </a:p>
+        </p:txBody>
+      </p:sp>
+    </p:spTree>
+  </p:cSld>
+  <p:clrMapOvr>
+    <a:masterClrMapping/>
+  </p:clrMapOvr>
+</p:sld>
+</file>
+
+<file path=ppt/slides/slide9.xml><?xml version="1.0" encoding="utf-8"?>
+<p:sld xmlns:a="http://schemas.openxmlformats.org/drawingml/2006/main" xmlns:r="http://schemas.openxmlformats.org/officeDocument/2006/relationships" xmlns:p="http://schemas.openxmlformats.org/presentationml/2006/main">
+  <p:cSld>
+    <p:bg>
+      <p:bgPr>
+        <a:solidFill>
+          <a:srgbClr val="F4EDFB"/>
+        </a:solidFill>
+        <a:effectLst/>
+      </p:bgPr>
+    </p:bg>
+    <p:spTree>
+      <p:nvGrpSpPr>
+        <p:cNvPr id="1" name="Shape 315"/>
+        <p:cNvGrpSpPr/>
+        <p:nvPr/>
+      </p:nvGrpSpPr>
+      <p:grpSpPr>
+        <a:xfrm>
+          <a:off x="0" y="0"/>
+          <a:ext cx="0" cy="0"/>
+          <a:chOff x="0" y="0"/>
+          <a:chExt cx="0" cy="0"/>
+        </a:xfrm>
+      </p:grpSpPr>
+      <p:sp>
+        <p:nvSpPr>
+          <p:cNvPr id="316" name="Google Shape;316;p9"/>
+          <p:cNvSpPr/>
+          <p:nvPr/>
+        </p:nvSpPr>
+        <p:spPr>
+          <a:xfrm rot="-5400000">
+            <a:off x="10693624" y="-3524350"/>
+            <a:ext cx="4729037" cy="7048700"/>
+          </a:xfrm>
+          <a:custGeom>
+            <a:avLst/>
+            <a:gdLst/>
+            <a:ahLst/>
+            <a:cxnLst/>
+            <a:rect l="l" t="t" r="r" b="b"/>
+            <a:pathLst>
+              <a:path w="4729037" h="7048700" extrusionOk="0">
+                <a:moveTo>
+                  <a:pt x="0" y="0"/>
+                </a:moveTo>
+                <a:lnTo>
+                  <a:pt x="4729037" y="0"/>
+                </a:lnTo>
+                <a:lnTo>
+                  <a:pt x="4729037" y="7048700"/>
+                </a:lnTo>
+                <a:lnTo>
+                  <a:pt x="0" y="7048700"/>
+                </a:lnTo>
+                <a:lnTo>
+                  <a:pt x="0" y="0"/>
+                </a:lnTo>
+                <a:close/>
+              </a:path>
+            </a:pathLst>
+          </a:custGeom>
+          <a:blipFill rotWithShape="1">
+            <a:blip r:embed="rId3">
+              <a:alphaModFix amt="17000"/>
+            </a:blip>
+            <a:stretch>
+              <a:fillRect/>
+            </a:stretch>
+          </a:blipFill>
+          <a:ln>
+            <a:noFill/>
+          </a:ln>
+        </p:spPr>
+      </p:sp>
+      <p:sp>
+        <p:nvSpPr>
+          <p:cNvPr id="317" name="Google Shape;317;p9"/>
+          <p:cNvSpPr/>
+          <p:nvPr/>
+        </p:nvSpPr>
+        <p:spPr>
+          <a:xfrm rot="-5400000">
+            <a:off x="2915845" y="6786337"/>
+            <a:ext cx="4729037" cy="7048700"/>
+          </a:xfrm>
+          <a:custGeom>
+            <a:avLst/>
+            <a:gdLst/>
+            <a:ahLst/>
+            <a:cxnLst/>
+            <a:rect l="l" t="t" r="r" b="b"/>
+            <a:pathLst>
+              <a:path w="4729037" h="7048700" extrusionOk="0">
+                <a:moveTo>
+                  <a:pt x="0" y="0"/>
+                </a:moveTo>
+                <a:lnTo>
+                  <a:pt x="4729037" y="0"/>
+                </a:lnTo>
+                <a:lnTo>
+                  <a:pt x="4729037" y="7048700"/>
+                </a:lnTo>
+                <a:lnTo>
+                  <a:pt x="0" y="7048700"/>
+                </a:lnTo>
+                <a:lnTo>
+                  <a:pt x="0" y="0"/>
+                </a:lnTo>
+                <a:close/>
+              </a:path>
+            </a:pathLst>
+          </a:custGeom>
+          <a:blipFill rotWithShape="1">
+            <a:blip r:embed="rId3">
+              <a:alphaModFix amt="17000"/>
+            </a:blip>
+            <a:stretch>
+              <a:fillRect/>
+            </a:stretch>
+          </a:blipFill>
+          <a:ln>
+            <a:noFill/>
+          </a:ln>
+        </p:spPr>
+      </p:sp>
+      <p:grpSp>
+        <p:nvGrpSpPr>
+          <p:cNvPr id="318" name="Google Shape;318;p9"/>
+          <p:cNvGrpSpPr/>
+          <p:nvPr/>
+        </p:nvGrpSpPr>
+        <p:grpSpPr>
+          <a:xfrm>
+            <a:off x="1028700" y="739378"/>
+            <a:ext cx="16230600" cy="8518922"/>
+            <a:chOff x="0" y="-76200"/>
+            <a:chExt cx="4274726" cy="2243667"/>
+          </a:xfrm>
+        </p:grpSpPr>
+        <p:sp>
+          <p:nvSpPr>
+            <p:cNvPr id="319" name="Google Shape;319;p9"/>
+            <p:cNvSpPr/>
+            <p:nvPr/>
+          </p:nvSpPr>
+          <p:spPr>
+            <a:xfrm>
+              <a:off x="0" y="0"/>
+              <a:ext cx="4274726" cy="2167467"/>
+            </a:xfrm>
+            <a:custGeom>
+              <a:avLst/>
+              <a:gdLst/>
+              <a:ahLst/>
+              <a:cxnLst/>
+              <a:rect l="l" t="t" r="r" b="b"/>
+              <a:pathLst>
+                <a:path w="4274726" h="2167467" extrusionOk="0">
+                  <a:moveTo>
+                    <a:pt x="24327" y="0"/>
+                  </a:moveTo>
+                  <a:lnTo>
+                    <a:pt x="4250399" y="0"/>
+                  </a:lnTo>
+                  <a:cubicBezTo>
+                    <a:pt x="4263834" y="0"/>
+                    <a:pt x="4274726" y="10891"/>
+                    <a:pt x="4274726" y="24327"/>
+                  </a:cubicBezTo>
+                  <a:lnTo>
+                    <a:pt x="4274726" y="2143140"/>
+                  </a:lnTo>
+                  <a:cubicBezTo>
+                    <a:pt x="4274726" y="2156575"/>
+                    <a:pt x="4263834" y="2167467"/>
+                    <a:pt x="4250399" y="2167467"/>
+                  </a:cubicBezTo>
+                  <a:lnTo>
+                    <a:pt x="24327" y="2167467"/>
+                  </a:lnTo>
+                  <a:cubicBezTo>
+                    <a:pt x="10891" y="2167467"/>
+                    <a:pt x="0" y="2156575"/>
+                    <a:pt x="0" y="2143140"/>
+                  </a:cubicBezTo>
+                  <a:lnTo>
+                    <a:pt x="0" y="24327"/>
+                  </a:lnTo>
+                  <a:cubicBezTo>
+                    <a:pt x="0" y="10891"/>
+                    <a:pt x="10891" y="0"/>
+                    <a:pt x="24327" y="0"/>
+                  </a:cubicBezTo>
+                  <a:close/>
+                </a:path>
+              </a:pathLst>
+            </a:custGeom>
+            <a:solidFill>
+              <a:srgbClr val="FDFBFF"/>
+            </a:solidFill>
+            <a:ln>
+              <a:noFill/>
+            </a:ln>
+          </p:spPr>
+          <p:txBody>
+            <a:bodyPr spcFirstLastPara="1" wrap="square" lIns="91425" tIns="91425" rIns="91425" bIns="91425" anchor="ctr" anchorCtr="0">
+              <a:noAutofit/>
+            </a:bodyPr>
+            <a:lstStyle/>
+            <a:p>
+              <a:pPr marL="0" marR="0" lvl="0" indent="0" algn="l" rtl="0">
+                <a:lnSpc>
+                  <a:spcPct val="100000"/>
+                </a:lnSpc>
+                <a:spcBef>
+                  <a:spcPts val="0"/>
+                </a:spcBef>
+                <a:spcAft>
+                  <a:spcPts val="0"/>
+                </a:spcAft>
+                <a:buClr>
+                  <a:srgbClr val="000000"/>
+                </a:buClr>
+                <a:buSzPts val="1400"/>
+                <a:buFont typeface="Arial"/>
+                <a:buNone/>
+              </a:pPr>
+              <a:endParaRPr sz="1400" b="0" i="0" u="none" strike="noStrike" cap="none">
+                <a:solidFill>
+                  <a:srgbClr val="000000"/>
+                </a:solidFill>
+                <a:latin typeface="Arial"/>
+                <a:ea typeface="Arial"/>
+                <a:cs typeface="Arial"/>
+                <a:sym typeface="Arial"/>
+              </a:endParaRPr>
+            </a:p>
+          </p:txBody>
+        </p:sp>
+        <p:sp>
+          <p:nvSpPr>
+            <p:cNvPr id="320" name="Google Shape;320;p9"/>
+            <p:cNvSpPr txBox="1"/>
+            <p:nvPr/>
+          </p:nvSpPr>
+          <p:spPr>
+            <a:xfrm>
+              <a:off x="0" y="-76200"/>
+              <a:ext cx="4274726" cy="2243667"/>
+            </a:xfrm>
+            <a:prstGeom prst="rect">
+              <a:avLst/>
+            </a:prstGeom>
+            <a:noFill/>
+            <a:ln>
+              <a:noFill/>
+            </a:ln>
+          </p:spPr>
+          <p:txBody>
+            <a:bodyPr spcFirstLastPara="1" wrap="square" lIns="50800" tIns="50800" rIns="50800" bIns="50800" anchor="ctr" anchorCtr="0">
+              <a:noAutofit/>
+            </a:bodyPr>
+            <a:lstStyle/>
+            <a:p>
+              <a:pPr marL="0" marR="0" lvl="0" indent="0" algn="ctr" rtl="0">
+                <a:lnSpc>
+                  <a:spcPct val="147722"/>
+                </a:lnSpc>
+                <a:spcBef>
+                  <a:spcPts val="0"/>
+                </a:spcBef>
+                <a:spcAft>
+                  <a:spcPts val="0"/>
+                </a:spcAft>
+                <a:buClr>
+                  <a:srgbClr val="000000"/>
+                </a:buClr>
+                <a:buSzPts val="1800"/>
+                <a:buFont typeface="Arial"/>
+                <a:buNone/>
+              </a:pPr>
+              <a:endParaRPr sz="1800" b="0" i="0" u="none" strike="noStrike" cap="none">
+                <a:solidFill>
+                  <a:schemeClr val="dk1"/>
+                </a:solidFill>
+                <a:latin typeface="Calibri"/>
+                <a:ea typeface="Calibri"/>
+                <a:cs typeface="Calibri"/>
+                <a:sym typeface="Calibri"/>
+              </a:endParaRPr>
+            </a:p>
+          </p:txBody>
+        </p:sp>
+      </p:grpSp>
+      <p:sp>
+        <p:nvSpPr>
+          <p:cNvPr id="321" name="Google Shape;321;p9"/>
+          <p:cNvSpPr/>
+          <p:nvPr/>
+        </p:nvSpPr>
+        <p:spPr>
+          <a:xfrm>
+            <a:off x="1756013" y="1534701"/>
+            <a:ext cx="2448843" cy="405172"/>
+          </a:xfrm>
+          <a:custGeom>
+            <a:avLst/>
+            <a:gdLst/>
+            <a:ahLst/>
+            <a:cxnLst/>
+            <a:rect l="l" t="t" r="r" b="b"/>
+            <a:pathLst>
+              <a:path w="2448843" h="405172" extrusionOk="0">
+                <a:moveTo>
+                  <a:pt x="0" y="0"/>
+                </a:moveTo>
+                <a:lnTo>
+                  <a:pt x="2448843" y="0"/>
+                </a:lnTo>
+                <a:lnTo>
+                  <a:pt x="2448843" y="405172"/>
+                </a:lnTo>
+                <a:lnTo>
+                  <a:pt x="0" y="405172"/>
+                </a:lnTo>
+                <a:lnTo>
+                  <a:pt x="0" y="0"/>
+                </a:lnTo>
+                <a:close/>
+              </a:path>
+            </a:pathLst>
+          </a:custGeom>
+          <a:blipFill rotWithShape="1">
+            <a:blip r:embed="rId4">
+              <a:alphaModFix/>
+            </a:blip>
+            <a:stretch>
+              <a:fillRect/>
+            </a:stretch>
+          </a:blipFill>
+          <a:ln>
+            <a:noFill/>
+          </a:ln>
+        </p:spPr>
+      </p:sp>
+      <p:sp>
+        <p:nvSpPr>
+          <p:cNvPr id="322" name="Google Shape;322;p9"/>
+          <p:cNvSpPr/>
+          <p:nvPr/>
+        </p:nvSpPr>
+        <p:spPr>
+          <a:xfrm>
+            <a:off x="14083144" y="8450319"/>
+            <a:ext cx="2448843" cy="405172"/>
+          </a:xfrm>
+          <a:custGeom>
+            <a:avLst/>
+            <a:gdLst/>
+            <a:ahLst/>
+            <a:cxnLst/>
+            <a:rect l="l" t="t" r="r" b="b"/>
+            <a:pathLst>
+              <a:path w="2448843" h="405172" extrusionOk="0">
+                <a:moveTo>
+                  <a:pt x="0" y="0"/>
+                </a:moveTo>
+                <a:lnTo>
+                  <a:pt x="2448843" y="0"/>
+                </a:lnTo>
+                <a:lnTo>
+                  <a:pt x="2448843" y="405172"/>
+                </a:lnTo>
+                <a:lnTo>
+                  <a:pt x="0" y="405172"/>
+                </a:lnTo>
+                <a:lnTo>
+                  <a:pt x="0" y="0"/>
+                </a:lnTo>
+                <a:close/>
+              </a:path>
+            </a:pathLst>
+          </a:custGeom>
+          <a:blipFill rotWithShape="1">
+            <a:blip r:embed="rId4">
+              <a:alphaModFix/>
+            </a:blip>
+            <a:stretch>
+              <a:fillRect/>
+            </a:stretch>
+          </a:blipFill>
+          <a:ln>
+            <a:noFill/>
+          </a:ln>
+        </p:spPr>
+      </p:sp>
+      <p:sp>
+        <p:nvSpPr>
+          <p:cNvPr id="323" name="Google Shape;323;p9"/>
+          <p:cNvSpPr/>
+          <p:nvPr/>
+        </p:nvSpPr>
+        <p:spPr>
+          <a:xfrm rot="-5400000">
+            <a:off x="16076374" y="-2482323"/>
+            <a:ext cx="4423252" cy="6592923"/>
+          </a:xfrm>
+          <a:custGeom>
+            <a:avLst/>
+            <a:gdLst/>
+            <a:ahLst/>
+            <a:cxnLst/>
+            <a:rect l="l" t="t" r="r" b="b"/>
+            <a:pathLst>
+              <a:path w="4423252" h="6592923" extrusionOk="0">
+                <a:moveTo>
+                  <a:pt x="0" y="0"/>
+                </a:moveTo>
+                <a:lnTo>
+                  <a:pt x="4423252" y="0"/>
+                </a:lnTo>
+                <a:lnTo>
+                  <a:pt x="4423252" y="6592922"/>
+                </a:lnTo>
+                <a:lnTo>
+                  <a:pt x="0" y="6592922"/>
+                </a:lnTo>
+                <a:lnTo>
+                  <a:pt x="0" y="0"/>
+                </a:lnTo>
+                <a:close/>
+              </a:path>
+            </a:pathLst>
+          </a:custGeom>
+          <a:blipFill rotWithShape="1">
+            <a:blip r:embed="rId3">
+              <a:alphaModFix/>
+            </a:blip>
+            <a:stretch>
+              <a:fillRect/>
+            </a:stretch>
+          </a:blipFill>
+          <a:ln>
+            <a:noFill/>
+          </a:ln>
+        </p:spPr>
+      </p:sp>
+      <p:sp>
+        <p:nvSpPr>
+          <p:cNvPr id="324" name="Google Shape;324;p9"/>
+          <p:cNvSpPr/>
+          <p:nvPr/>
+        </p:nvSpPr>
+        <p:spPr>
+          <a:xfrm rot="-5400000">
+            <a:off x="-2250585" y="6195701"/>
+            <a:ext cx="4423252" cy="6592923"/>
+          </a:xfrm>
+          <a:custGeom>
+            <a:avLst/>
+            <a:gdLst/>
+            <a:ahLst/>
+            <a:cxnLst/>
+            <a:rect l="l" t="t" r="r" b="b"/>
+            <a:pathLst>
+              <a:path w="4423252" h="6592923" extrusionOk="0">
+                <a:moveTo>
+                  <a:pt x="0" y="0"/>
+                </a:moveTo>
+                <a:lnTo>
+                  <a:pt x="4423251" y="0"/>
+                </a:lnTo>
+                <a:lnTo>
+                  <a:pt x="4423251" y="6592923"/>
+                </a:lnTo>
+                <a:lnTo>
+                  <a:pt x="0" y="6592923"/>
+                </a:lnTo>
+                <a:lnTo>
+                  <a:pt x="0" y="0"/>
+                </a:lnTo>
+                <a:close/>
+              </a:path>
+            </a:pathLst>
+          </a:custGeom>
+          <a:blipFill rotWithShape="1">
+            <a:blip r:embed="rId3">
+              <a:alphaModFix/>
+            </a:blip>
+            <a:stretch>
+              <a:fillRect/>
+            </a:stretch>
+          </a:blipFill>
+          <a:ln>
+            <a:noFill/>
+          </a:ln>
+        </p:spPr>
+      </p:sp>
+      <p:grpSp>
+        <p:nvGrpSpPr>
+          <p:cNvPr id="325" name="Google Shape;325;p9"/>
+          <p:cNvGrpSpPr/>
+          <p:nvPr/>
+        </p:nvGrpSpPr>
+        <p:grpSpPr>
+          <a:xfrm>
+            <a:off x="6341594" y="1300762"/>
+            <a:ext cx="5481584" cy="1189501"/>
+            <a:chOff x="0" y="-76200"/>
+            <a:chExt cx="1785490" cy="387451"/>
+          </a:xfrm>
+        </p:grpSpPr>
+        <p:sp>
+          <p:nvSpPr>
+            <p:cNvPr id="326" name="Google Shape;326;p9"/>
+            <p:cNvSpPr/>
+            <p:nvPr/>
+          </p:nvSpPr>
+          <p:spPr>
+            <a:xfrm>
+              <a:off x="0" y="0"/>
+              <a:ext cx="1785490" cy="311251"/>
+            </a:xfrm>
+            <a:custGeom>
+              <a:avLst/>
+              <a:gdLst/>
+              <a:ahLst/>
+              <a:cxnLst/>
+              <a:rect l="l" t="t" r="r" b="b"/>
+              <a:pathLst>
+                <a:path w="1785490" h="311251" extrusionOk="0">
+                  <a:moveTo>
+                    <a:pt x="0" y="0"/>
+                  </a:moveTo>
+                  <a:lnTo>
+                    <a:pt x="1785490" y="0"/>
+                  </a:lnTo>
+                  <a:lnTo>
+                    <a:pt x="1785490" y="311251"/>
+                  </a:lnTo>
+                  <a:lnTo>
+                    <a:pt x="0" y="311251"/>
+                  </a:lnTo>
+                  <a:close/>
+                </a:path>
+              </a:pathLst>
+            </a:custGeom>
+            <a:solidFill>
+              <a:srgbClr val="EAD6FF"/>
+            </a:solidFill>
+            <a:ln>
+              <a:noFill/>
+            </a:ln>
+          </p:spPr>
+        </p:sp>
+        <p:sp>
+          <p:nvSpPr>
+            <p:cNvPr id="327" name="Google Shape;327;p9"/>
+            <p:cNvSpPr txBox="1"/>
+            <p:nvPr/>
+          </p:nvSpPr>
+          <p:spPr>
+            <a:xfrm>
+              <a:off x="0" y="-76200"/>
+              <a:ext cx="1785490" cy="387451"/>
+            </a:xfrm>
+            <a:prstGeom prst="rect">
+              <a:avLst/>
+            </a:prstGeom>
+            <a:noFill/>
+            <a:ln>
+              <a:noFill/>
+            </a:ln>
+          </p:spPr>
+          <p:txBody>
+            <a:bodyPr spcFirstLastPara="1" wrap="square" lIns="50800" tIns="50800" rIns="50800" bIns="50800" anchor="ctr" anchorCtr="0">
+              <a:noAutofit/>
+            </a:bodyPr>
+            <a:lstStyle/>
+            <a:p>
+              <a:pPr marL="0" marR="0" lvl="0" indent="0" algn="ctr" rtl="0">
+                <a:lnSpc>
+                  <a:spcPct val="147722"/>
+                </a:lnSpc>
+                <a:spcBef>
+                  <a:spcPts val="0"/>
+                </a:spcBef>
+                <a:spcAft>
+                  <a:spcPts val="0"/>
+                </a:spcAft>
+                <a:buClr>
+                  <a:srgbClr val="000000"/>
+                </a:buClr>
+                <a:buSzPts val="1800"/>
+                <a:buFont typeface="Arial"/>
+                <a:buNone/>
+              </a:pPr>
+              <a:endParaRPr sz="1800" b="0" i="0" u="none" strike="noStrike" cap="none">
+                <a:solidFill>
+                  <a:schemeClr val="dk1"/>
+                </a:solidFill>
+                <a:latin typeface="Calibri"/>
+                <a:ea typeface="Calibri"/>
+                <a:cs typeface="Calibri"/>
+                <a:sym typeface="Calibri"/>
+              </a:endParaRPr>
+            </a:p>
+          </p:txBody>
+        </p:sp>
+      </p:grpSp>
+      <p:grpSp>
+        <p:nvGrpSpPr>
+          <p:cNvPr id="328" name="Google Shape;328;p9"/>
+          <p:cNvGrpSpPr/>
+          <p:nvPr/>
+        </p:nvGrpSpPr>
+        <p:grpSpPr>
+          <a:xfrm>
+            <a:off x="6464822" y="1457785"/>
+            <a:ext cx="5481584" cy="1189501"/>
+            <a:chOff x="0" y="-76200"/>
+            <a:chExt cx="1785490" cy="387451"/>
+          </a:xfrm>
+        </p:grpSpPr>
+        <p:sp>
+          <p:nvSpPr>
+            <p:cNvPr id="329" name="Google Shape;329;p9"/>
+            <p:cNvSpPr/>
+            <p:nvPr/>
+          </p:nvSpPr>
+          <p:spPr>
+            <a:xfrm>
+              <a:off x="0" y="0"/>
+              <a:ext cx="1785490" cy="311251"/>
+            </a:xfrm>
+            <a:custGeom>
+              <a:avLst/>
+              <a:gdLst/>
+              <a:ahLst/>
+              <a:cxnLst/>
+              <a:rect l="l" t="t" r="r" b="b"/>
+              <a:pathLst>
+                <a:path w="1785490" h="311251" extrusionOk="0">
+                  <a:moveTo>
+                    <a:pt x="0" y="0"/>
+                  </a:moveTo>
+                  <a:lnTo>
+                    <a:pt x="1785490" y="0"/>
+                  </a:lnTo>
+                  <a:lnTo>
+                    <a:pt x="1785490" y="311251"/>
+                  </a:lnTo>
+                  <a:lnTo>
+                    <a:pt x="0" y="311251"/>
+                  </a:lnTo>
+                  <a:close/>
+                </a:path>
+              </a:pathLst>
+            </a:custGeom>
+            <a:solidFill>
+              <a:srgbClr val="000000">
+                <a:alpha val="0"/>
+              </a:srgbClr>
+            </a:solidFill>
+            <a:ln w="76200" cap="sq" cmpd="sng">
+              <a:solidFill>
+                <a:srgbClr val="CB74F7"/>
+              </a:solidFill>
+              <a:prstDash val="solid"/>
+              <a:miter lim="8000"/>
+              <a:headEnd type="none" w="sm" len="sm"/>
+              <a:tailEnd type="none" w="sm" len="sm"/>
+            </a:ln>
+          </p:spPr>
+        </p:sp>
+        <p:sp>
+          <p:nvSpPr>
+            <p:cNvPr id="330" name="Google Shape;330;p9"/>
+            <p:cNvSpPr txBox="1"/>
+            <p:nvPr/>
+          </p:nvSpPr>
+          <p:spPr>
+            <a:xfrm>
+              <a:off x="0" y="-76200"/>
+              <a:ext cx="1785490" cy="387451"/>
+            </a:xfrm>
+            <a:prstGeom prst="rect">
+              <a:avLst/>
+            </a:prstGeom>
+            <a:noFill/>
+            <a:ln>
+              <a:noFill/>
+            </a:ln>
+          </p:spPr>
+          <p:txBody>
+            <a:bodyPr spcFirstLastPara="1" wrap="square" lIns="50800" tIns="50800" rIns="50800" bIns="50800" anchor="ctr" anchorCtr="0">
+              <a:noAutofit/>
+            </a:bodyPr>
+            <a:lstStyle/>
+            <a:p>
+              <a:pPr marL="0" marR="0" lvl="0" indent="0" algn="ctr" rtl="0">
+                <a:lnSpc>
+                  <a:spcPct val="147722"/>
+                </a:lnSpc>
+                <a:spcBef>
+                  <a:spcPts val="0"/>
+                </a:spcBef>
+                <a:spcAft>
+                  <a:spcPts val="0"/>
+                </a:spcAft>
+                <a:buClr>
+                  <a:srgbClr val="000000"/>
+                </a:buClr>
+                <a:buSzPts val="1800"/>
+                <a:buFont typeface="Arial"/>
+                <a:buNone/>
+              </a:pPr>
+              <a:endParaRPr sz="1800" b="0" i="0" u="none" strike="noStrike" cap="none">
+                <a:solidFill>
+                  <a:schemeClr val="dk1"/>
+                </a:solidFill>
+                <a:latin typeface="Calibri"/>
+                <a:ea typeface="Calibri"/>
+                <a:cs typeface="Calibri"/>
+                <a:sym typeface="Calibri"/>
+              </a:endParaRPr>
+            </a:p>
+          </p:txBody>
+        </p:sp>
+      </p:grpSp>
+      <p:sp>
+        <p:nvSpPr>
+          <p:cNvPr id="331" name="Google Shape;331;p9"/>
+          <p:cNvSpPr txBox="1"/>
+          <p:nvPr/>
+        </p:nvSpPr>
+        <p:spPr>
+          <a:xfrm>
+            <a:off x="7052555" y="1803903"/>
+            <a:ext cx="4182889" cy="655003"/>
+          </a:xfrm>
+          <a:prstGeom prst="rect">
+            <a:avLst/>
+          </a:prstGeom>
+          <a:noFill/>
+          <a:ln>
+            <a:noFill/>
+          </a:ln>
+        </p:spPr>
+        <p:txBody>
+          <a:bodyPr spcFirstLastPara="1" wrap="square" lIns="0" tIns="0" rIns="0" bIns="0" anchor="t" anchorCtr="0">
+            <a:spAutoFit/>
+          </a:bodyPr>
+          <a:lstStyle/>
+          <a:p>
+            <a:pPr marL="0" marR="0" lvl="0" indent="0" algn="ctr" rtl="0">
+              <a:lnSpc>
+                <a:spcPct val="140036"/>
+              </a:lnSpc>
+              <a:spcBef>
+                <a:spcPts val="0"/>
+              </a:spcBef>
+              <a:spcAft>
+                <a:spcPts val="0"/>
+              </a:spcAft>
+              <a:buClr>
+                <a:srgbClr val="000000"/>
+              </a:buClr>
+              <a:buSzPts val="3834"/>
+              <a:buFont typeface="Arial"/>
+              <a:buNone/>
+            </a:pPr>
+            <a:r>
+              <a:rPr lang="en-US" sz="3834" b="0" i="0" u="none" strike="noStrike" cap="none" dirty="0">
+                <a:solidFill>
+                  <a:srgbClr val="000000"/>
+                </a:solidFill>
+                <a:latin typeface="Arial"/>
+                <a:ea typeface="Arial"/>
+                <a:cs typeface="Arial"/>
+                <a:sym typeface="Arial"/>
+              </a:rPr>
+              <a:t>CONCLUSION</a:t>
+            </a:r>
+            <a:endParaRPr sz="1400" b="0" i="0" u="none" strike="noStrike" cap="none" dirty="0">
+              <a:solidFill>
+                <a:srgbClr val="000000"/>
+              </a:solidFill>
+              <a:latin typeface="Arial"/>
+              <a:ea typeface="Arial"/>
+              <a:cs typeface="Arial"/>
+              <a:sym typeface="Arial"/>
+            </a:endParaRPr>
+          </a:p>
+        </p:txBody>
+      </p:sp>
+      <p:sp>
+        <p:nvSpPr>
+          <p:cNvPr id="332" name="Google Shape;332;p9"/>
+          <p:cNvSpPr/>
+          <p:nvPr/>
+        </p:nvSpPr>
+        <p:spPr>
+          <a:xfrm rot="-5400000">
+            <a:off x="17620984" y="1556567"/>
+            <a:ext cx="4423252" cy="6592923"/>
+          </a:xfrm>
+          <a:custGeom>
+            <a:avLst/>
+            <a:gdLst/>
+            <a:ahLst/>
+            <a:cxnLst/>
+            <a:rect l="l" t="t" r="r" b="b"/>
+            <a:pathLst>
+              <a:path w="4423252" h="6592923" extrusionOk="0">
+                <a:moveTo>
+                  <a:pt x="0" y="0"/>
+                </a:moveTo>
+                <a:lnTo>
+                  <a:pt x="4423252" y="0"/>
+                </a:lnTo>
+                <a:lnTo>
+                  <a:pt x="4423252" y="6592923"/>
+                </a:lnTo>
+                <a:lnTo>
+                  <a:pt x="0" y="6592923"/>
+                </a:lnTo>
+                <a:lnTo>
+                  <a:pt x="0" y="0"/>
+                </a:lnTo>
+                <a:close/>
+              </a:path>
+            </a:pathLst>
+          </a:custGeom>
+          <a:blipFill rotWithShape="1">
+            <a:blip r:embed="rId3">
+              <a:alphaModFix/>
+            </a:blip>
+            <a:stretch>
+              <a:fillRect/>
+            </a:stretch>
+          </a:blipFill>
+          <a:ln>
+            <a:noFill/>
+          </a:ln>
+        </p:spPr>
+      </p:sp>
+      <p:sp>
+        <p:nvSpPr>
+          <p:cNvPr id="333" name="Google Shape;333;p9"/>
+          <p:cNvSpPr/>
+          <p:nvPr/>
+        </p:nvSpPr>
+        <p:spPr>
+          <a:xfrm rot="-5400000" flipH="1">
+            <a:off x="-3752074" y="2286941"/>
+            <a:ext cx="4423252" cy="6592923"/>
+          </a:xfrm>
+          <a:custGeom>
+            <a:avLst/>
+            <a:gdLst/>
+            <a:ahLst/>
+            <a:cxnLst/>
+            <a:rect l="l" t="t" r="r" b="b"/>
+            <a:pathLst>
+              <a:path w="4423252" h="6592923" extrusionOk="0">
+                <a:moveTo>
+                  <a:pt x="4423252" y="0"/>
+                </a:moveTo>
+                <a:lnTo>
+                  <a:pt x="0" y="0"/>
+                </a:lnTo>
+                <a:lnTo>
+                  <a:pt x="0" y="6592923"/>
+                </a:lnTo>
+                <a:lnTo>
+                  <a:pt x="4423252" y="6592923"/>
+                </a:lnTo>
+                <a:lnTo>
+                  <a:pt x="4423252" y="0"/>
+                </a:lnTo>
+                <a:close/>
+              </a:path>
+            </a:pathLst>
+          </a:custGeom>
+          <a:blipFill rotWithShape="1">
+            <a:blip r:embed="rId3">
+              <a:alphaModFix/>
+            </a:blip>
+            <a:stretch>
+              <a:fillRect/>
+            </a:stretch>
+          </a:blipFill>
+          <a:ln>
+            <a:noFill/>
+          </a:ln>
+        </p:spPr>
+      </p:sp>
+      <p:sp>
+        <p:nvSpPr>
+          <p:cNvPr id="335" name="Google Shape;335;p9"/>
+          <p:cNvSpPr/>
+          <p:nvPr/>
+        </p:nvSpPr>
+        <p:spPr>
+          <a:xfrm>
+            <a:off x="189876" y="296181"/>
+            <a:ext cx="1713069" cy="1643692"/>
+          </a:xfrm>
+          <a:custGeom>
+            <a:avLst/>
+            <a:gdLst/>
+            <a:ahLst/>
+            <a:cxnLst/>
+            <a:rect l="l" t="t" r="r" b="b"/>
+            <a:pathLst>
+              <a:path w="1713069" h="1643692" extrusionOk="0">
+                <a:moveTo>
+                  <a:pt x="0" y="0"/>
+                </a:moveTo>
+                <a:lnTo>
+                  <a:pt x="1713068" y="0"/>
+                </a:lnTo>
+                <a:lnTo>
+                  <a:pt x="1713068" y="1643692"/>
+                </a:lnTo>
+                <a:lnTo>
+                  <a:pt x="0" y="1643692"/>
+                </a:lnTo>
+                <a:lnTo>
+                  <a:pt x="0" y="0"/>
+                </a:lnTo>
+                <a:close/>
+              </a:path>
+            </a:pathLst>
+          </a:custGeom>
+          <a:blipFill rotWithShape="1">
+            <a:blip r:embed="rId5">
+              <a:alphaModFix/>
+            </a:blip>
+            <a:stretch>
+              <a:fillRect/>
+            </a:stretch>
+          </a:blipFill>
+          <a:ln>
+            <a:noFill/>
+          </a:ln>
+        </p:spPr>
+      </p:sp>
+      <p:sp>
+        <p:nvSpPr>
+          <p:cNvPr id="4" name="TextBox 3">
+            <a:extLst>
+              <a:ext uri="{FF2B5EF4-FFF2-40B4-BE49-F238E27FC236}">
+                <a16:creationId xmlns:a16="http://schemas.microsoft.com/office/drawing/2014/main" id="{378305F1-FF05-4288-F3C9-295C56C5FE58}"/>
+              </a:ext>
+            </a:extLst>
+          </p:cNvPr>
+          <p:cNvSpPr txBox="1"/>
+          <p:nvPr/>
+        </p:nvSpPr>
+        <p:spPr>
+          <a:xfrm>
+            <a:off x="2300695" y="2919348"/>
+            <a:ext cx="12537524" cy="5170646"/>
+          </a:xfrm>
+          <a:prstGeom prst="rect">
+            <a:avLst/>
+          </a:prstGeom>
+          <a:noFill/>
+        </p:spPr>
+        <p:txBody>
+          <a:bodyPr wrap="square" rtlCol="0">
+            <a:spAutoFit/>
+          </a:bodyPr>
+          <a:lstStyle/>
+          <a:p>
+            <a:pPr lvl="0" eaLnBrk="0" fontAlgn="base" hangingPunct="0">
+              <a:spcBef>
+                <a:spcPct val="0"/>
+              </a:spcBef>
+              <a:spcAft>
+                <a:spcPct val="0"/>
+              </a:spcAft>
+              <a:buClrTx/>
+            </a:pPr>
+            <a:endParaRPr lang="en-US" altLang="en-US" sz="3000" dirty="0">
+              <a:solidFill>
+                <a:schemeClr val="tx1"/>
+              </a:solidFill>
+              <a:latin typeface="Times New Roman" panose="02020603050405020304" pitchFamily="18" charset="0"/>
+              <a:cs typeface="Times New Roman" panose="02020603050405020304" pitchFamily="18" charset="0"/>
+            </a:endParaRPr>
+          </a:p>
+          <a:p>
+            <a:pPr lvl="0" eaLnBrk="0" fontAlgn="base" hangingPunct="0">
+              <a:spcBef>
+                <a:spcPct val="0"/>
+              </a:spcBef>
+              <a:spcAft>
+                <a:spcPct val="0"/>
+              </a:spcAft>
+              <a:buClrTx/>
+              <a:buFontTx/>
+              <a:buChar char="•"/>
+            </a:pPr>
+            <a:r>
+              <a:rPr lang="en-US" altLang="en-US" sz="3000" b="1" dirty="0">
+                <a:solidFill>
+                  <a:schemeClr val="tx1"/>
+                </a:solidFill>
+                <a:latin typeface="Times New Roman" panose="02020603050405020304" pitchFamily="18" charset="0"/>
+                <a:cs typeface="Times New Roman" panose="02020603050405020304" pitchFamily="18" charset="0"/>
+              </a:rPr>
+              <a:t>Achievement:</a:t>
+            </a:r>
+            <a:r>
+              <a:rPr lang="en-US" altLang="en-US" sz="3000" dirty="0">
+                <a:solidFill>
+                  <a:schemeClr val="tx1"/>
+                </a:solidFill>
+                <a:latin typeface="Times New Roman" panose="02020603050405020304" pitchFamily="18" charset="0"/>
+                <a:cs typeface="Times New Roman" panose="02020603050405020304" pitchFamily="18" charset="0"/>
+              </a:rPr>
+              <a:t> </a:t>
+            </a:r>
+            <a:r>
+              <a:rPr lang="en-US" altLang="en-US" sz="3000" i="1" dirty="0" err="1">
+                <a:solidFill>
+                  <a:schemeClr val="tx1"/>
+                </a:solidFill>
+                <a:latin typeface="Times New Roman" panose="02020603050405020304" pitchFamily="18" charset="0"/>
+                <a:cs typeface="Times New Roman" panose="02020603050405020304" pitchFamily="18" charset="0"/>
+              </a:rPr>
+              <a:t>InveXa</a:t>
+            </a:r>
+            <a:r>
+              <a:rPr lang="en-US" altLang="en-US" sz="3000" i="1" dirty="0">
+                <a:solidFill>
+                  <a:schemeClr val="tx1"/>
+                </a:solidFill>
+                <a:latin typeface="Times New Roman" panose="02020603050405020304" pitchFamily="18" charset="0"/>
+                <a:cs typeface="Times New Roman" panose="02020603050405020304" pitchFamily="18" charset="0"/>
+              </a:rPr>
+              <a:t> </a:t>
+            </a:r>
+            <a:r>
+              <a:rPr lang="en-US" altLang="en-US" sz="3000" i="1" dirty="0" err="1">
+                <a:solidFill>
+                  <a:schemeClr val="tx1"/>
+                </a:solidFill>
+                <a:latin typeface="Times New Roman" panose="02020603050405020304" pitchFamily="18" charset="0"/>
+                <a:cs typeface="Times New Roman" panose="02020603050405020304" pitchFamily="18" charset="0"/>
+              </a:rPr>
+              <a:t>sTacK</a:t>
+            </a:r>
+            <a:r>
+              <a:rPr lang="en-US" altLang="en-US" sz="3000" dirty="0">
+                <a:solidFill>
+                  <a:schemeClr val="tx1"/>
+                </a:solidFill>
+                <a:latin typeface="Times New Roman" panose="02020603050405020304" pitchFamily="18" charset="0"/>
+                <a:cs typeface="Times New Roman" panose="02020603050405020304" pitchFamily="18" charset="0"/>
+              </a:rPr>
+              <a:t> delivers low-cost, AI-powered inventory management using a lean Node.js architecture.</a:t>
+            </a:r>
+          </a:p>
+          <a:p>
+            <a:pPr lvl="0" eaLnBrk="0" fontAlgn="base" hangingPunct="0">
+              <a:spcBef>
+                <a:spcPct val="0"/>
+              </a:spcBef>
+              <a:spcAft>
+                <a:spcPct val="0"/>
+              </a:spcAft>
+              <a:buClrTx/>
+              <a:buFontTx/>
+              <a:buChar char="•"/>
+            </a:pPr>
+            <a:endParaRPr lang="en-US" altLang="en-US" sz="3000" dirty="0">
+              <a:solidFill>
+                <a:schemeClr val="tx1"/>
+              </a:solidFill>
+              <a:latin typeface="Times New Roman" panose="02020603050405020304" pitchFamily="18" charset="0"/>
+              <a:cs typeface="Times New Roman" panose="02020603050405020304" pitchFamily="18" charset="0"/>
+            </a:endParaRPr>
+          </a:p>
+          <a:p>
+            <a:pPr lvl="0" eaLnBrk="0" fontAlgn="base" hangingPunct="0">
+              <a:spcBef>
+                <a:spcPct val="0"/>
+              </a:spcBef>
+              <a:spcAft>
+                <a:spcPct val="0"/>
+              </a:spcAft>
+              <a:buClrTx/>
+              <a:buFontTx/>
+              <a:buChar char="•"/>
+            </a:pPr>
+            <a:r>
+              <a:rPr lang="en-US" altLang="en-US" sz="3000" b="1" dirty="0">
+                <a:solidFill>
+                  <a:schemeClr val="tx1"/>
+                </a:solidFill>
+                <a:latin typeface="Times New Roman" panose="02020603050405020304" pitchFamily="18" charset="0"/>
+                <a:cs typeface="Times New Roman" panose="02020603050405020304" pitchFamily="18" charset="0"/>
+              </a:rPr>
+              <a:t>Core Strengths:</a:t>
+            </a:r>
+            <a:r>
+              <a:rPr lang="en-US" altLang="en-US" sz="3000" dirty="0">
+                <a:solidFill>
+                  <a:schemeClr val="tx1"/>
+                </a:solidFill>
+                <a:latin typeface="Times New Roman" panose="02020603050405020304" pitchFamily="18" charset="0"/>
+                <a:cs typeface="Times New Roman" panose="02020603050405020304" pitchFamily="18" charset="0"/>
+              </a:rPr>
+              <a:t> Secure multi-tenant design with database isolation, JWT-based RBAC, OTP verification, and demand prediction without heavy ML.</a:t>
+            </a:r>
+          </a:p>
+          <a:p>
+            <a:pPr lvl="0" eaLnBrk="0" fontAlgn="base" hangingPunct="0">
+              <a:spcBef>
+                <a:spcPct val="0"/>
+              </a:spcBef>
+              <a:spcAft>
+                <a:spcPct val="0"/>
+              </a:spcAft>
+              <a:buClrTx/>
+              <a:buFontTx/>
+              <a:buChar char="•"/>
+            </a:pPr>
+            <a:endParaRPr lang="en-US" altLang="en-US" sz="3000" dirty="0">
+              <a:solidFill>
+                <a:schemeClr val="tx1"/>
+              </a:solidFill>
+              <a:latin typeface="Times New Roman" panose="02020603050405020304" pitchFamily="18" charset="0"/>
+              <a:cs typeface="Times New Roman" panose="02020603050405020304" pitchFamily="18" charset="0"/>
+            </a:endParaRPr>
+          </a:p>
+          <a:p>
+            <a:pPr lvl="0" eaLnBrk="0" fontAlgn="base" hangingPunct="0">
+              <a:spcBef>
+                <a:spcPct val="0"/>
+              </a:spcBef>
+              <a:spcAft>
+                <a:spcPct val="0"/>
+              </a:spcAft>
+              <a:buClrTx/>
+              <a:buFontTx/>
+              <a:buChar char="•"/>
+            </a:pPr>
+            <a:r>
+              <a:rPr lang="en-US" altLang="en-US" sz="3000" b="1" dirty="0">
+                <a:solidFill>
+                  <a:schemeClr val="tx1"/>
+                </a:solidFill>
+                <a:latin typeface="Times New Roman" panose="02020603050405020304" pitchFamily="18" charset="0"/>
+                <a:cs typeface="Times New Roman" panose="02020603050405020304" pitchFamily="18" charset="0"/>
+              </a:rPr>
+              <a:t>Impact &amp; Future:</a:t>
+            </a:r>
+            <a:r>
+              <a:rPr lang="en-US" altLang="en-US" sz="3000" dirty="0">
+                <a:solidFill>
+                  <a:schemeClr val="tx1"/>
+                </a:solidFill>
+                <a:latin typeface="Times New Roman" panose="02020603050405020304" pitchFamily="18" charset="0"/>
+                <a:cs typeface="Times New Roman" panose="02020603050405020304" pitchFamily="18" charset="0"/>
+              </a:rPr>
+              <a:t> Fully implemented system with scope for advanced forecasting, mobile (PWA) support, and barcode-based management.</a:t>
+            </a:r>
+          </a:p>
+          <a:p>
+            <a:pPr lvl="0" eaLnBrk="0" fontAlgn="base" hangingPunct="0">
+              <a:spcBef>
+                <a:spcPct val="0"/>
+              </a:spcBef>
+              <a:spcAft>
+                <a:spcPct val="0"/>
+              </a:spcAft>
+              <a:buClrTx/>
+            </a:pPr>
+            <a:endParaRPr lang="en-US" altLang="en-US" sz="3000" dirty="0">
+              <a:solidFill>
+                <a:schemeClr val="tx1"/>
+              </a:solidFill>
+              <a:latin typeface="Times New Roman" panose="02020603050405020304" pitchFamily="18" charset="0"/>
+              <a:cs typeface="Times New Roman" panose="02020603050405020304" pitchFamily="18" charset="0"/>
+            </a:endParaRPr>
           </a:p>
           <a:p>
             <a:endParaRPr lang="en-IN" sz="3000" dirty="0">
